--- a/presentation/GitHub-Copilot-Agentic-Development.pptx
+++ b/presentation/GitHub-Copilot-Agentic-Development.pptx
@@ -6,6 +6,11 @@
   </p:sldMasterIdLst>
   <p:sldIdLst>
     <p:sldId id="256" r:id="rId7"/>
+    <p:sldId id="274" r:id="rId26"/>
+    <p:sldId id="275" r:id="rId27"/>
+    <p:sldId id="276" r:id="rId28"/>
+    <p:sldId id="277" r:id="rId29"/>
+    <p:sldId id="278" r:id="rId30"/>
     <p:sldId id="257" r:id="rId9"/>
     <p:sldId id="258" r:id="rId10"/>
     <p:sldId id="259" r:id="rId11"/>
@@ -519,7 +524,7 @@
           <a:lstStyle/>
           <a:p>
             <a:r>
-              <a:t>CXO 오프닝: 오늘은 개발 도구의 기능 목록보다 팀의 실행 여력을 어떻게 확장할지 보겠습니다. 반복 작업을 AI에 맡기고 개발자는 중요한 결정에 집중하는 방식입니다. 생산성, 가치 전달 속도, 품질과 통제의 잠재 가치를 실제 고객 문제 해결로 보여 줍니다. 같은 인원으로 몇 퍼센트 더 많이 처리했다는 성과는 측정하지 않았으므로 주장하지 않습니다.</a:t>
+              <a:t>CXO 오프닝: 먼저 GitHub Copilot이 무엇인지, 어디서 사용하고 어떤 방식으로 작업을 맡길 수 있는지 짧게 소개합니다. 이어 팀의 실행 여력을 어떻게 확장할지 보겠습니다. 반복 작업을 AI에 맡기고 개발자는 중요한 결정에 집중하는 방식입니다. 생산성, 가치 전달 속도, 품질과 통제의 잠재 가치를 실제 고객 문제 해결로 보여 줍니다. 같은 인원으로 몇 퍼센트 더 많이 처리했다는 성과는 측정하지 않았으므로 주장하지 않습니다.</a:t>
             </a:r>
           </a:p>
           <a:p/>
@@ -1337,7 +1342,7 @@
           <a:lstStyle/>
           <a:p>
             <a:r>
-              <a:t>공식 문서와 설치된 copilot --help, copilot help permissions를 함께 확인했습니다. 제품 화면과 키트 보조 기능, 관측 결과와 기대 효과, 리허설 입력과 실제 사람의 승인을 구분해서 설명합니다. 승인 입력의 출처는 원본 actions.jsonl에 보존합니다.</a:t>
+              <a:t>2026-09-26에 공식 GitHub 문서와 설치된 CLI 도움말을 확인했습니다. 서두는 제품 전반의 개요이고, 이후 CLI 데모는 실제로 실행한 범위만 보여 줍니다. 제품 기능과 키트 보조 기능, 관측과 기대 효과, 리허설 입력과 실제 승인을 구분합니다. 각 서두 슬라이드 노트에는 해당 서피스·모드·기능의 상세 출처가 있습니다.</a:t>
             </a:r>
           </a:p>
           <a:p/>
@@ -1354,17 +1359,27 @@
           </a:p>
           <a:p>
             <a:r>
-              <a:t>https://docs.github.com/en/copilot/concepts/agents/about-copilot-cli</a:t>
-            </a:r>
-          </a:p>
-          <a:p>
-            <a:r>
-              <a:t>https://docs.github.com/en/copilot/how-tos/copilot-cli/use-copilot-cli/overview</a:t>
-            </a:r>
-          </a:p>
-          <a:p>
-            <a:r>
-              <a:t>https://docs.github.com/en/copilot/reference/custom-agents-configuration</a:t>
+              <a:t>https://docs.github.com/en/copilot/get-started/about-github-copilot</a:t>
+            </a:r>
+          </a:p>
+          <a:p>
+            <a:r>
+              <a:t>https://docs.github.com/en/copilot/how-tos/chat-with-copilot/chat-in-ide</a:t>
+            </a:r>
+          </a:p>
+          <a:p>
+            <a:r>
+              <a:t>https://docs.github.com/en/copilot/concepts/agents/copilot-cli/about-copilot-cli</a:t>
+            </a:r>
+          </a:p>
+          <a:p>
+            <a:r>
+              <a:t>https://docs.github.com/en/copilot/concepts/agents/cloud-agent/about-cloud-agent</a:t>
+            </a:r>
+          </a:p>
+          <a:p>
+            <a:r>
+              <a:t>https://docs.github.com/en/copilot/reference/customization-cheat-sheet</a:t>
             </a:r>
           </a:p>
           <a:p>
@@ -1375,6 +1390,93 @@
           <a:p>
             <a:r>
               <a:t>evidence/VERIFICATION.ko.md</a:t>
+            </a:r>
+          </a:p>
+        </p:txBody>
+      </p:sp>
+      <p:sp>
+        <p:nvSpPr>
+          <p:cNvPr id="4" name="Slide Number Placeholder 3"/>
+          <p:cNvSpPr>
+            <a:spLocks noGrp="1"/>
+          </p:cNvSpPr>
+          <p:nvPr>
+            <p:ph type="sldNum" idx="5" sz="quarter"/>
+          </p:nvPr>
+        </p:nvSpPr>
+        <p:spPr/>
+      </p:sp>
+    </p:spTree>
+  </p:cSld>
+  <p:clrMapOvr>
+    <a:masterClrMapping/>
+  </p:clrMapOvr>
+</p:notes>
+</file>
+
+<file path=ppt/notesSlides/notesSlide19.xml><?xml version="1.0" encoding="utf-8"?>
+<p:notes xmlns:a="http://schemas.openxmlformats.org/drawingml/2006/main" xmlns:p="http://schemas.openxmlformats.org/presentationml/2006/main" xmlns:r="http://schemas.openxmlformats.org/officeDocument/2006/relationships">
+  <p:cSld>
+    <p:spTree>
+      <p:nvGrpSpPr>
+        <p:cNvPr id="1" name=""/>
+        <p:cNvGrpSpPr/>
+        <p:nvPr/>
+      </p:nvGrpSpPr>
+      <p:grpSpPr>
+        <a:xfrm>
+          <a:off x="0" y="0"/>
+          <a:ext cx="0" cy="0"/>
+          <a:chOff x="0" y="0"/>
+          <a:chExt cx="0" cy="0"/>
+        </a:xfrm>
+      </p:grpSpPr>
+      <p:sp>
+        <p:nvSpPr>
+          <p:cNvPr id="2" name="Slide Image Placeholder 1"/>
+          <p:cNvSpPr>
+            <a:spLocks noGrp="1"/>
+          </p:cNvSpPr>
+          <p:nvPr>
+            <p:ph type="sldImg" idx="2"/>
+          </p:nvPr>
+        </p:nvSpPr>
+        <p:spPr/>
+      </p:sp>
+      <p:sp>
+        <p:nvSpPr>
+          <p:cNvPr id="3" name="Notes Placeholder 2"/>
+          <p:cNvSpPr>
+            <a:spLocks noGrp="1"/>
+          </p:cNvSpPr>
+          <p:nvPr>
+            <p:ph type="body" idx="3" sz="quarter"/>
+          </p:nvPr>
+        </p:nvSpPr>
+        <p:spPr/>
+        <p:txBody>
+          <a:bodyPr/>
+          <a:lstStyle/>
+          <a:p>
+            <a:r>
+              <a:t>권장 40초. GitHub는 코드와 협업을 관리하는 플랫폼이고 GitHub Copilot은 그 개발 흐름에서 코드 작성·이해·출시 준비를 돕는 AI 제품입니다. 자동완성과 대화형 보조뿐 아니라 목표를 받고 파일과 도구를 다루는 에이전트 기능도 제공합니다. 이 제품을 Microsoft 365 Copilot이나 Copilot Studio와 같은 것으로 설명하지 않습니다. 지원 기능은 플랜·클라이언트·조직 정책에 따라 다르며 모든 서피스가 같은 기능을 제공하는 것은 아닙니다. 이 슬라이드는 제품 소개이지 모든 기능의 실행 증거는 아닙니다.</a:t>
+            </a:r>
+          </a:p>
+          <a:p/>
+          <a:p>
+            <a:r>
+              <a:t>표현 경계: 실제 Copilot CLI PTY 녹화와 합성 주문 앱을 사용했습니다. 영상의 승인 키 입력은 자동 리허설이며 실제 사람·조직의 승인이 아닙니다. 라이브 session 명령은 발표자 입력을 기다립니다. 실제 결제·PR·배포 없음. 편집 영상 길이는 개발 시간이나 생산성 개선율이 아닙니다.</a:t>
+            </a:r>
+          </a:p>
+          <a:p/>
+          <a:p>
+            <a:r>
+              <a:t>출처/근거:</a:t>
+            </a:r>
+          </a:p>
+          <a:p>
+            <a:r>
+              <a:t>https://docs.github.com/en/copilot/get-started/about-github-copilot</a:t>
             </a:r>
           </a:p>
         </p:txBody>
@@ -1467,6 +1569,419 @@
           <a:p>
             <a:r>
               <a:t>https://docs.github.com/en/copilot/concepts/agents/about-copilot-cli</a:t>
+            </a:r>
+          </a:p>
+        </p:txBody>
+      </p:sp>
+      <p:sp>
+        <p:nvSpPr>
+          <p:cNvPr id="4" name="Slide Number Placeholder 3"/>
+          <p:cNvSpPr>
+            <a:spLocks noGrp="1"/>
+          </p:cNvSpPr>
+          <p:nvPr>
+            <p:ph type="sldNum" idx="5" sz="quarter"/>
+          </p:nvPr>
+        </p:nvSpPr>
+        <p:spPr/>
+      </p:sp>
+    </p:spTree>
+  </p:cSld>
+  <p:clrMapOvr>
+    <a:masterClrMapping/>
+  </p:clrMapOvr>
+</p:notes>
+</file>
+
+<file path=ppt/notesSlides/notesSlide20.xml><?xml version="1.0" encoding="utf-8"?>
+<p:notes xmlns:a="http://schemas.openxmlformats.org/drawingml/2006/main" xmlns:p="http://schemas.openxmlformats.org/presentationml/2006/main" xmlns:r="http://schemas.openxmlformats.org/officeDocument/2006/relationships">
+  <p:cSld>
+    <p:spTree>
+      <p:nvGrpSpPr>
+        <p:cNvPr id="1" name=""/>
+        <p:cNvGrpSpPr/>
+        <p:nvPr/>
+      </p:nvGrpSpPr>
+      <p:grpSpPr>
+        <a:xfrm>
+          <a:off x="0" y="0"/>
+          <a:ext cx="0" cy="0"/>
+          <a:chOff x="0" y="0"/>
+          <a:chExt cx="0" cy="0"/>
+        </a:xfrm>
+      </p:grpSpPr>
+      <p:sp>
+        <p:nvSpPr>
+          <p:cNvPr id="2" name="Slide Image Placeholder 1"/>
+          <p:cNvSpPr>
+            <a:spLocks noGrp="1"/>
+          </p:cNvSpPr>
+          <p:nvPr>
+            <p:ph type="sldImg" idx="2"/>
+          </p:nvPr>
+        </p:nvSpPr>
+        <p:spPr/>
+      </p:sp>
+      <p:sp>
+        <p:nvSpPr>
+          <p:cNvPr id="3" name="Notes Placeholder 2"/>
+          <p:cNvSpPr>
+            <a:spLocks noGrp="1"/>
+          </p:cNvSpPr>
+          <p:nvPr>
+            <p:ph type="body" idx="3" sz="quarter"/>
+          </p:nvPr>
+        </p:nvSpPr>
+        <p:spPr/>
+        <p:txBody>
+          <a:bodyPr/>
+          <a:lstStyle/>
+          <a:p>
+            <a:r>
+              <a:t>권장 45초. 서피스는 사용 접점, 작업 모드는 도움을 받는 방식, 실행 환경은 도구가 실제로 동작하는 위치입니다. 서로 같은 분류가 아닙니다. IDE에는 VS Code, Visual Studio, JetBrains 등이 있으며 세부 지원은 feature matrix를 봅니다. GitHub.com에서는 저장소 대화, Cloud agent 위임, PR 검토 등을 사용할 수 있습니다. Copilot app은 별도 데스크톱 제품으로 프로젝트와 에이전트 세션을 관리하며 GitHub Desktop과 혼동하지 않습니다. GitHub Mobile은 저장소·코드·PR 질문과 지원되는 검토 기능을 제공합니다. 앱과 CLI의 조직 정책도 별도일 수 있습니다. 이 데모는 강조한 CLI만 실제 실행했습니다.</a:t>
+            </a:r>
+          </a:p>
+          <a:p/>
+          <a:p>
+            <a:r>
+              <a:t>표현 경계: 실제 Copilot CLI PTY 녹화와 합성 주문 앱을 사용했습니다. 영상의 승인 키 입력은 자동 리허설이며 실제 사람·조직의 승인이 아닙니다. 라이브 session 명령은 발표자 입력을 기다립니다. 실제 결제·PR·배포 없음. 편집 영상 길이는 개발 시간이나 생산성 개선율이 아닙니다.</a:t>
+            </a:r>
+          </a:p>
+          <a:p/>
+          <a:p>
+            <a:r>
+              <a:t>출처/근거:</a:t>
+            </a:r>
+          </a:p>
+          <a:p>
+            <a:r>
+              <a:t>https://docs.github.com/en/copilot/get-started/about-github-copilot</a:t>
+            </a:r>
+          </a:p>
+          <a:p>
+            <a:r>
+              <a:t>https://docs.github.com/en/copilot/reference/copilot-feature-matrix</a:t>
+            </a:r>
+          </a:p>
+          <a:p>
+            <a:r>
+              <a:t>https://docs.github.com/en/copilot/concepts/agents/copilot-cli/about-copilot-cli</a:t>
+            </a:r>
+          </a:p>
+          <a:p>
+            <a:r>
+              <a:t>https://docs.github.com/en/copilot/get-started/quickstart-copilot-app</a:t>
+            </a:r>
+          </a:p>
+          <a:p>
+            <a:r>
+              <a:t>https://docs.github.com/en/copilot/how-tos/copilot-on-github/chat-with-copilot/chat-in-mobile</a:t>
+            </a:r>
+          </a:p>
+          <a:p>
+            <a:r>
+              <a:t>https://docs.github.com/en/copilot/concepts/agents/code-review</a:t>
+            </a:r>
+          </a:p>
+        </p:txBody>
+      </p:sp>
+      <p:sp>
+        <p:nvSpPr>
+          <p:cNvPr id="4" name="Slide Number Placeholder 3"/>
+          <p:cNvSpPr>
+            <a:spLocks noGrp="1"/>
+          </p:cNvSpPr>
+          <p:nvPr>
+            <p:ph type="sldNum" idx="5" sz="quarter"/>
+          </p:nvPr>
+        </p:nvSpPr>
+        <p:spPr/>
+      </p:sp>
+    </p:spTree>
+  </p:cSld>
+  <p:clrMapOvr>
+    <a:masterClrMapping/>
+  </p:clrMapOvr>
+</p:notes>
+</file>
+
+<file path=ppt/notesSlides/notesSlide21.xml><?xml version="1.0" encoding="utf-8"?>
+<p:notes xmlns:a="http://schemas.openxmlformats.org/drawingml/2006/main" xmlns:p="http://schemas.openxmlformats.org/presentationml/2006/main" xmlns:r="http://schemas.openxmlformats.org/officeDocument/2006/relationships">
+  <p:cSld>
+    <p:spTree>
+      <p:nvGrpSpPr>
+        <p:cNvPr id="1" name=""/>
+        <p:cNvGrpSpPr/>
+        <p:nvPr/>
+      </p:nvGrpSpPr>
+      <p:grpSpPr>
+        <a:xfrm>
+          <a:off x="0" y="0"/>
+          <a:ext cx="0" cy="0"/>
+          <a:chOff x="0" y="0"/>
+          <a:chExt cx="0" cy="0"/>
+        </a:xfrm>
+      </p:grpSpPr>
+      <p:sp>
+        <p:nvSpPr>
+          <p:cNvPr id="2" name="Slide Image Placeholder 1"/>
+          <p:cNvSpPr>
+            <a:spLocks noGrp="1"/>
+          </p:cNvSpPr>
+          <p:nvPr>
+            <p:ph type="sldImg" idx="2"/>
+          </p:nvPr>
+        </p:nvSpPr>
+        <p:spPr/>
+      </p:sp>
+      <p:sp>
+        <p:nvSpPr>
+          <p:cNvPr id="3" name="Notes Placeholder 2"/>
+          <p:cNvSpPr>
+            <a:spLocks noGrp="1"/>
+          </p:cNvSpPr>
+          <p:nvPr>
+            <p:ph type="body" idx="3" sz="quarter"/>
+          </p:nvPr>
+        </p:nvSpPr>
+        <p:spPr/>
+        <p:txBody>
+          <a:bodyPr/>
+          <a:lstStyle/>
+          <a:p>
+            <a:r>
+              <a:t>권장 60초. 위 네 카드는 IDE에서 접하는 대표 작업 방식이며 모든 클라이언트에 동일한 메뉴가 있다는 뜻은 아닙니다. 현재 GitHub의 VS Code 사용 가이드는 Ask·Plan·Agent를 소개합니다. Edit은 feature matrix에 나온 지원 IDE·버전에서 선택 파일을 중심으로 수정하는 방식이므로 별표로 한정했습니다. CLI는 대화형과 프로그램 방식 인터페이스를 제공하며, 대화형 작업에서 Interactive·Plan·Autopilot을 구분할 수 있습니다. Autopilot은 완료나 제한에 이를 때까지 이어서 작업하는 모드이지 권한 무제한과 같은 옵션이 아닙니다. 제한된 권한으로 계속하면 승인이 필요한 작업이 거부될 수 있고, 넓은 권한 부여에는 별도의 위험 검토가 필요합니다. 이 데모는 Autopilot을 사용하지 않았습니다. 영상의 demo-planner는 사용자 정의 역할이지 내장 Plan 모드를 켠 증거가 아닙니다.</a:t>
+            </a:r>
+          </a:p>
+          <a:p/>
+          <a:p>
+            <a:r>
+              <a:t>표현 경계: 실제 Copilot CLI PTY 녹화와 합성 주문 앱을 사용했습니다. 영상의 승인 키 입력은 자동 리허설이며 실제 사람·조직의 승인이 아닙니다. 라이브 session 명령은 발표자 입력을 기다립니다. 실제 결제·PR·배포 없음. 편집 영상 길이는 개발 시간이나 생산성 개선율이 아닙니다.</a:t>
+            </a:r>
+          </a:p>
+          <a:p/>
+          <a:p>
+            <a:r>
+              <a:t>출처/근거:</a:t>
+            </a:r>
+          </a:p>
+          <a:p>
+            <a:r>
+              <a:t>https://docs.github.com/en/copilot/how-tos/chat-with-copilot/chat-in-ide</a:t>
+            </a:r>
+          </a:p>
+          <a:p>
+            <a:r>
+              <a:t>https://docs.github.com/en/copilot/reference/copilot-feature-matrix</a:t>
+            </a:r>
+          </a:p>
+          <a:p>
+            <a:r>
+              <a:t>https://docs.github.com/en/copilot/concepts/agents/copilot-cli/about-copilot-cli</a:t>
+            </a:r>
+          </a:p>
+          <a:p>
+            <a:r>
+              <a:t>https://docs.github.com/en/copilot/concepts/agents/copilot-cli/autopilot</a:t>
+            </a:r>
+          </a:p>
+        </p:txBody>
+      </p:sp>
+      <p:sp>
+        <p:nvSpPr>
+          <p:cNvPr id="4" name="Slide Number Placeholder 3"/>
+          <p:cNvSpPr>
+            <a:spLocks noGrp="1"/>
+          </p:cNvSpPr>
+          <p:nvPr>
+            <p:ph type="sldNum" idx="5" sz="quarter"/>
+          </p:nvPr>
+        </p:nvSpPr>
+        <p:spPr/>
+      </p:sp>
+    </p:spTree>
+  </p:cSld>
+  <p:clrMapOvr>
+    <a:masterClrMapping/>
+  </p:clrMapOvr>
+</p:notes>
+</file>
+
+<file path=ppt/notesSlides/notesSlide22.xml><?xml version="1.0" encoding="utf-8"?>
+<p:notes xmlns:a="http://schemas.openxmlformats.org/drawingml/2006/main" xmlns:p="http://schemas.openxmlformats.org/presentationml/2006/main" xmlns:r="http://schemas.openxmlformats.org/officeDocument/2006/relationships">
+  <p:cSld>
+    <p:spTree>
+      <p:nvGrpSpPr>
+        <p:cNvPr id="1" name=""/>
+        <p:cNvGrpSpPr/>
+        <p:nvPr/>
+      </p:nvGrpSpPr>
+      <p:grpSpPr>
+        <a:xfrm>
+          <a:off x="0" y="0"/>
+          <a:ext cx="0" cy="0"/>
+          <a:chOff x="0" y="0"/>
+          <a:chExt cx="0" cy="0"/>
+        </a:xfrm>
+      </p:grpSpPr>
+      <p:sp>
+        <p:nvSpPr>
+          <p:cNvPr id="2" name="Slide Image Placeholder 1"/>
+          <p:cNvSpPr>
+            <a:spLocks noGrp="1"/>
+          </p:cNvSpPr>
+          <p:nvPr>
+            <p:ph type="sldImg" idx="2"/>
+          </p:nvPr>
+        </p:nvSpPr>
+        <p:spPr/>
+      </p:sp>
+      <p:sp>
+        <p:nvSpPr>
+          <p:cNvPr id="3" name="Notes Placeholder 2"/>
+          <p:cNvSpPr>
+            <a:spLocks noGrp="1"/>
+          </p:cNvSpPr>
+          <p:nvPr>
+            <p:ph type="body" idx="3" sz="quarter"/>
+          </p:nvPr>
+        </p:nvSpPr>
+        <p:spPr/>
+        <p:txBody>
+          <a:bodyPr/>
+          <a:lstStyle/>
+          <a:p>
+            <a:r>
+              <a:t>권장 50초. Agent mode나 CLI는 개발 환경에서 파일과 도구를 사용해 목표를 해결할 수 있습니다. Cloud agent는 GitHub의 별도 실행 환경에서 백그라운드로 조사·계획·변경을 수행하고 필요할 때 PR을 만드는 서비스입니다. IDE의 Agent mode와 같은 이름의 모드로 묶지 않습니다. GitHub의 현재 명칭은 Copilot cloud agent이며 이전 coding agent 명칭을 아는 참석자에게는 같은 제품의 현재 명칭으로 설명합니다. Copilot code review는 변경 맥락을 모아 문제와 개선안을 제안하는 제품 기능이며 검토를 사람의 승인으로 해석하지 않습니다. 이번 영상은 세 역할의 CLI 실행을 로컬 파일로 인계한 사례입니다. 테스트는 로컬 컨트롤러가 실행했고 demo-reviewer는 사용자 정의 읽기 전용 역할입니다. Cloud agent나 GitHub의 PR code review 서비스를 실제로 실행한 데모는 아닙니다.</a:t>
+            </a:r>
+          </a:p>
+          <a:p/>
+          <a:p>
+            <a:r>
+              <a:t>표현 경계: 실제 Copilot CLI PTY 녹화와 합성 주문 앱을 사용했습니다. 영상의 승인 키 입력은 자동 리허설이며 실제 사람·조직의 승인이 아닙니다. 라이브 session 명령은 발표자 입력을 기다립니다. 실제 결제·PR·배포 없음. 편집 영상 길이는 개발 시간이나 생산성 개선율이 아닙니다.</a:t>
+            </a:r>
+          </a:p>
+          <a:p/>
+          <a:p>
+            <a:r>
+              <a:t>출처/근거:</a:t>
+            </a:r>
+          </a:p>
+          <a:p>
+            <a:r>
+              <a:t>https://docs.github.com/en/copilot/how-tos/chat-with-copilot/chat-in-ide</a:t>
+            </a:r>
+          </a:p>
+          <a:p>
+            <a:r>
+              <a:t>https://docs.github.com/en/copilot/concepts/agents/copilot-cli/about-copilot-cli</a:t>
+            </a:r>
+          </a:p>
+          <a:p>
+            <a:r>
+              <a:t>https://docs.github.com/en/copilot/concepts/agents/cloud-agent/about-cloud-agent</a:t>
+            </a:r>
+          </a:p>
+          <a:p>
+            <a:r>
+              <a:t>https://docs.github.com/en/copilot/concepts/agents/code-review</a:t>
+            </a:r>
+          </a:p>
+        </p:txBody>
+      </p:sp>
+      <p:sp>
+        <p:nvSpPr>
+          <p:cNvPr id="4" name="Slide Number Placeholder 3"/>
+          <p:cNvSpPr>
+            <a:spLocks noGrp="1"/>
+          </p:cNvSpPr>
+          <p:nvPr>
+            <p:ph type="sldNum" idx="5" sz="quarter"/>
+          </p:nvPr>
+        </p:nvSpPr>
+        <p:spPr/>
+      </p:sp>
+    </p:spTree>
+  </p:cSld>
+  <p:clrMapOvr>
+    <a:masterClrMapping/>
+  </p:clrMapOvr>
+</p:notes>
+</file>
+
+<file path=ppt/notesSlides/notesSlide23.xml><?xml version="1.0" encoding="utf-8"?>
+<p:notes xmlns:a="http://schemas.openxmlformats.org/drawingml/2006/main" xmlns:p="http://schemas.openxmlformats.org/presentationml/2006/main" xmlns:r="http://schemas.openxmlformats.org/officeDocument/2006/relationships">
+  <p:cSld>
+    <p:spTree>
+      <p:nvGrpSpPr>
+        <p:cNvPr id="1" name=""/>
+        <p:cNvGrpSpPr/>
+        <p:nvPr/>
+      </p:nvGrpSpPr>
+      <p:grpSpPr>
+        <a:xfrm>
+          <a:off x="0" y="0"/>
+          <a:ext cx="0" cy="0"/>
+          <a:chOff x="0" y="0"/>
+          <a:chExt cx="0" cy="0"/>
+        </a:xfrm>
+      </p:grpSpPr>
+      <p:sp>
+        <p:nvSpPr>
+          <p:cNvPr id="2" name="Slide Image Placeholder 1"/>
+          <p:cNvSpPr>
+            <a:spLocks noGrp="1"/>
+          </p:cNvSpPr>
+          <p:nvPr>
+            <p:ph type="sldImg" idx="2"/>
+          </p:nvPr>
+        </p:nvSpPr>
+        <p:spPr/>
+      </p:sp>
+      <p:sp>
+        <p:nvSpPr>
+          <p:cNvPr id="3" name="Notes Placeholder 2"/>
+          <p:cNvSpPr>
+            <a:spLocks noGrp="1"/>
+          </p:cNvSpPr>
+          <p:nvPr>
+            <p:ph type="body" idx="3" sz="quarter"/>
+          </p:nvPr>
+        </p:nvSpPr>
+        <p:spPr/>
+        <p:txBody>
+          <a:bodyPr/>
+          <a:lstStyle/>
+          <a:p>
+            <a:r>
+              <a:t>권장 60초. Custom instructions는 작업 맥락에 적용할 기준이고 Prompt files는 반복 요청 템플릿입니다. Prompt files를 CLI 공통 기능이라고 말하지 않으며 지원 클라이언트를 확인합니다. Custom agents는 역할·도구 구성이며 Subagents는 별도 맥락에서 하위 작업을 수행하는 실행 단위입니다. CLI의 Fleet는 병렬 가능한 작업을 subagents에 나누는 기능으로, 에이전트 수가 늘면 항상 빨라진다고 보장하지 않습니다. Skills는 관련 업무의 절차·스크립트·자료를 필요할 때 로드합니다. MCP는 외부 도구와 데이터에 연결하고 Hooks는 실행 지점에서 검사·기록·정책 동작을 수행하도록 확장합니다. 지원 범위는 클라이언트·버전·정책에 따라 다르고 지침 자체가 보안 격리를 보장하지는 않습니다. 이번 촬영은 저장소 지침, 세 Custom agent 프로필, 네이티브 편집 승인을 사용했습니다. Fleet·Subagents·Skills·MCP·Hooks를 시연한 것으로 설명하지 않습니다. 이제 이 제품 소개를 바탕으로 다음 CXO 가치와 실제 CLI 사례로 연결합니다.</a:t>
+            </a:r>
+          </a:p>
+          <a:p/>
+          <a:p>
+            <a:r>
+              <a:t>표현 경계: 실제 Copilot CLI PTY 녹화와 합성 주문 앱을 사용했습니다. 영상의 승인 키 입력은 자동 리허설이며 실제 사람·조직의 승인이 아닙니다. 라이브 session 명령은 발표자 입력을 기다립니다. 실제 결제·PR·배포 없음. 편집 영상 길이는 개발 시간이나 생산성 개선율이 아닙니다.</a:t>
+            </a:r>
+          </a:p>
+          <a:p/>
+          <a:p>
+            <a:r>
+              <a:t>출처/근거:</a:t>
+            </a:r>
+          </a:p>
+          <a:p>
+            <a:r>
+              <a:t>https://docs.github.com/en/copilot/reference/customization-cheat-sheet</a:t>
+            </a:r>
+          </a:p>
+          <a:p>
+            <a:r>
+              <a:t>https://docs.github.com/en/copilot/how-tos/copilot-cli/use-copilot-cli/speed-up-task-completion</a:t>
+            </a:r>
+          </a:p>
+          <a:p>
+            <a:r>
+              <a:t>https://docs.github.com/en/copilot/how-tos/chat-with-copilot/chat-in-ide</a:t>
             </a:r>
           </a:p>
         </p:txBody>
@@ -5310,7 +5825,7 @@
                 <a:latin typeface="Arial"/>
                 <a:ea typeface="Apple SD Gothic Neo"/>
               </a:rPr>
-              <a:t>GitHub Copilot CLI  /  Real execution. Human control.</a:t>
+              <a:t>GitHub Copilot  /  CXO Briefing. Real execution. Human control.</a:t>
             </a:r>
           </a:p>
         </p:txBody>
@@ -6013,7 +6528,7 @@
                 <a:latin typeface="Arial"/>
                 <a:ea typeface="Apple SD Gothic Neo"/>
               </a:rPr>
-              <a:t>GitHub Copilot CLI  /  Real execution. Human control.</a:t>
+              <a:t>GitHub Copilot  /  CXO Briefing. Real execution. Human control.</a:t>
             </a:r>
           </a:p>
         </p:txBody>
@@ -6059,7 +6574,7 @@
                 <a:latin typeface="Arial"/>
                 <a:ea typeface="Apple SD Gothic Neo"/>
               </a:rPr>
-              <a:t>14</a:t>
+              <a:t>19</a:t>
             </a:r>
           </a:p>
         </p:txBody>
@@ -6557,7 +7072,7 @@
                 <a:latin typeface="Arial"/>
                 <a:ea typeface="Apple SD Gothic Neo"/>
               </a:rPr>
-              <a:t>GitHub Copilot CLI  /  Real execution. Human control.</a:t>
+              <a:t>GitHub Copilot  /  CXO Briefing. Real execution. Human control.</a:t>
             </a:r>
           </a:p>
         </p:txBody>
@@ -6603,7 +7118,7 @@
                 <a:latin typeface="Arial"/>
                 <a:ea typeface="Apple SD Gothic Neo"/>
               </a:rPr>
-              <a:t>15</a:t>
+              <a:t>20</a:t>
             </a:r>
           </a:p>
         </p:txBody>
@@ -7329,7 +7844,7 @@
                 <a:latin typeface="Arial"/>
                 <a:ea typeface="Apple SD Gothic Neo"/>
               </a:rPr>
-              <a:t>GitHub Copilot CLI  /  Real execution. Human control.</a:t>
+              <a:t>GitHub Copilot  /  CXO Briefing. Real execution. Human control.</a:t>
             </a:r>
           </a:p>
         </p:txBody>
@@ -7375,7 +7890,7 @@
                 <a:latin typeface="Arial"/>
                 <a:ea typeface="Apple SD Gothic Neo"/>
               </a:rPr>
-              <a:t>08</a:t>
+              <a:t>13</a:t>
             </a:r>
           </a:p>
         </p:txBody>
@@ -7917,7 +8432,7 @@
                 <a:latin typeface="Arial"/>
                 <a:ea typeface="Apple SD Gothic Neo"/>
               </a:rPr>
-              <a:t>GitHub Copilot CLI  /  Real execution. Human control.</a:t>
+              <a:t>GitHub Copilot  /  CXO Briefing. Real execution. Human control.</a:t>
             </a:r>
           </a:p>
         </p:txBody>
@@ -7963,7 +8478,7 @@
                 <a:latin typeface="Arial"/>
                 <a:ea typeface="Apple SD Gothic Neo"/>
               </a:rPr>
-              <a:t>10</a:t>
+              <a:t>15</a:t>
             </a:r>
           </a:p>
         </p:txBody>
@@ -8484,7 +8999,7 @@
                 <a:latin typeface="Arial"/>
                 <a:ea typeface="Apple SD Gothic Neo"/>
               </a:rPr>
-              <a:t>GitHub Copilot CLI  /  Real execution. Human control.</a:t>
+              <a:t>GitHub Copilot  /  CXO Briefing. Real execution. Human control.</a:t>
             </a:r>
           </a:p>
         </p:txBody>
@@ -8530,7 +9045,7 @@
                 <a:latin typeface="Arial"/>
                 <a:ea typeface="Apple SD Gothic Neo"/>
               </a:rPr>
-              <a:t>11</a:t>
+              <a:t>16</a:t>
             </a:r>
           </a:p>
         </p:txBody>
@@ -9300,7 +9815,7 @@
                 <a:latin typeface="Arial"/>
                 <a:ea typeface="Apple SD Gothic Neo"/>
               </a:rPr>
-              <a:t>GitHub Copilot CLI  /  Real execution. Human control.</a:t>
+              <a:t>GitHub Copilot  /  CXO Briefing. Real execution. Human control.</a:t>
             </a:r>
           </a:p>
         </p:txBody>
@@ -9346,7 +9861,7 @@
                 <a:latin typeface="Arial"/>
                 <a:ea typeface="Apple SD Gothic Neo"/>
               </a:rPr>
-              <a:t>12</a:t>
+              <a:t>17</a:t>
             </a:r>
           </a:p>
         </p:txBody>
@@ -10350,7 +10865,7 @@
                 <a:latin typeface="Arial"/>
                 <a:ea typeface="Apple SD Gothic Neo"/>
               </a:rPr>
-              <a:t>GitHub Copilot CLI  /  Real execution. Human control.</a:t>
+              <a:t>GitHub Copilot  /  CXO Briefing. Real execution. Human control.</a:t>
             </a:r>
           </a:p>
         </p:txBody>
@@ -10396,7 +10911,7 @@
                 <a:latin typeface="Arial"/>
                 <a:ea typeface="Apple SD Gothic Neo"/>
               </a:rPr>
-              <a:t>16</a:t>
+              <a:t>21</a:t>
             </a:r>
           </a:p>
         </p:txBody>
@@ -11055,7 +11570,7 @@
                 <a:latin typeface="Arial"/>
                 <a:ea typeface="Apple SD Gothic Neo"/>
               </a:rPr>
-              <a:t>GitHub Copilot CLI  /  Real execution. Human control.</a:t>
+              <a:t>GitHub Copilot  /  CXO Briefing. Real execution. Human control.</a:t>
             </a:r>
           </a:p>
         </p:txBody>
@@ -11101,7 +11616,7 @@
                 <a:latin typeface="Arial"/>
                 <a:ea typeface="Apple SD Gothic Neo"/>
               </a:rPr>
-              <a:t>17</a:t>
+              <a:t>22</a:t>
             </a:r>
           </a:p>
         </p:txBody>
@@ -11967,7 +12482,7 @@
                 <a:latin typeface="Arial"/>
                 <a:ea typeface="Apple SD Gothic Neo"/>
               </a:rPr>
-              <a:t>GitHub Copilot CLI  /  Real execution. Human control.</a:t>
+              <a:t>GitHub Copilot  /  CXO Briefing. Real execution. Human control.</a:t>
             </a:r>
           </a:p>
         </p:txBody>
@@ -12013,7 +12528,7 @@
                 <a:latin typeface="Arial"/>
                 <a:ea typeface="Apple SD Gothic Neo"/>
               </a:rPr>
-              <a:t>18</a:t>
+              <a:t>23</a:t>
             </a:r>
           </a:p>
         </p:txBody>
@@ -12074,8 +12589,8 @@
         </p:nvSpPr>
         <p:spPr>
           <a:xfrm>
-            <a:off x="667512" y="3136392"/>
-            <a:ext cx="5138928" cy="402336"/>
+            <a:off x="667512" y="3063240"/>
+            <a:ext cx="5138928" cy="329184"/>
           </a:xfrm>
           <a:prstGeom prst="rect">
             <a:avLst/>
@@ -12100,14 +12615,14 @@
               </a:spcAft>
             </a:pPr>
             <a:r>
-              <a:rPr sz="1800" b="0">
+              <a:rPr sz="1600" b="0">
                 <a:solidFill>
                   <a:srgbClr val="A783D7"/>
                 </a:solidFill>
                 <a:latin typeface="Arial"/>
                 <a:ea typeface="Apple SD Gothic Neo"/>
               </a:rPr>
-              <a:t>01  Copilot CLI 개요·권한 경계 ↗</a:t>
+              <a:t>01  GitHub Copilot 제품 개요 ↗</a:t>
             </a:r>
           </a:p>
         </p:txBody>
@@ -12122,8 +12637,8 @@
         </p:nvSpPr>
         <p:spPr>
           <a:xfrm>
-            <a:off x="667512" y="3648456"/>
-            <a:ext cx="5138928" cy="402336"/>
+            <a:off x="667512" y="3429000"/>
+            <a:ext cx="5138928" cy="329184"/>
           </a:xfrm>
           <a:prstGeom prst="rect">
             <a:avLst/>
@@ -12148,14 +12663,14 @@
               </a:spcAft>
             </a:pPr>
             <a:r>
-              <a:rPr sz="1800" b="0">
+              <a:rPr sz="1600" b="0">
                 <a:solidFill>
                   <a:srgbClr val="A783D7"/>
                 </a:solidFill>
                 <a:latin typeface="Arial"/>
                 <a:ea typeface="Apple SD Gothic Neo"/>
               </a:rPr>
-              <a:t>02  CLI 사용 가이드 ↗</a:t>
+              <a:t>02  IDE의 작업 모드·에이전트 ↗</a:t>
             </a:r>
           </a:p>
         </p:txBody>
@@ -12170,8 +12685,8 @@
         </p:nvSpPr>
         <p:spPr>
           <a:xfrm>
-            <a:off x="667512" y="4160520"/>
-            <a:ext cx="5138928" cy="402336"/>
+            <a:off x="667512" y="3794760"/>
+            <a:ext cx="5138928" cy="329184"/>
           </a:xfrm>
           <a:prstGeom prst="rect">
             <a:avLst/>
@@ -12196,14 +12711,14 @@
               </a:spcAft>
             </a:pPr>
             <a:r>
-              <a:rPr sz="1800" b="0">
+              <a:rPr sz="1600" b="0">
                 <a:solidFill>
                   <a:srgbClr val="A783D7"/>
                 </a:solidFill>
                 <a:latin typeface="Arial"/>
                 <a:ea typeface="Apple SD Gothic Neo"/>
               </a:rPr>
-              <a:t>03  Custom agents 설정 ↗</a:t>
+              <a:t>03  CLI 기능·권한 경계 ↗</a:t>
             </a:r>
           </a:p>
         </p:txBody>
@@ -12218,8 +12733,8 @@
         </p:nvSpPr>
         <p:spPr>
           <a:xfrm>
-            <a:off x="667512" y="4672584"/>
-            <a:ext cx="5138928" cy="402336"/>
+            <a:off x="667512" y="4160520"/>
+            <a:ext cx="5138928" cy="329184"/>
           </a:xfrm>
           <a:prstGeom prst="rect">
             <a:avLst/>
@@ -12244,21 +12759,117 @@
               </a:spcAft>
             </a:pPr>
             <a:r>
-              <a:rPr sz="1800" b="0">
+              <a:rPr sz="1600" b="0">
                 <a:solidFill>
                   <a:srgbClr val="A783D7"/>
                 </a:solidFill>
                 <a:latin typeface="Arial"/>
                 <a:ea typeface="Apple SD Gothic Neo"/>
               </a:rPr>
-              <a:t>04  도입 활용도·업무 흐름 metrics ↗</a:t>
-            </a:r>
-          </a:p>
-        </p:txBody>
-      </p:sp>
-      <p:sp>
-        <p:nvSpPr>
-          <p:cNvPr id="12" name="TextBox 11"/>
+              <a:t>04  Cloud agent·비동기 위임 ↗</a:t>
+            </a:r>
+          </a:p>
+        </p:txBody>
+      </p:sp>
+      <p:sp>
+        <p:nvSpPr>
+          <p:cNvPr id="12" name="TextBox 11">
+            <a:hlinkClick r:id="rId6"/>
+          </p:cNvPr>
+          <p:cNvSpPr txBox="1"/>
+          <p:nvPr/>
+        </p:nvSpPr>
+        <p:spPr>
+          <a:xfrm>
+            <a:off x="667512" y="4526280"/>
+            <a:ext cx="5138928" cy="329184"/>
+          </a:xfrm>
+          <a:prstGeom prst="rect">
+            <a:avLst/>
+          </a:prstGeom>
+          <a:noFill/>
+        </p:spPr>
+        <p:txBody>
+          <a:bodyPr wrap="square" lIns="0" rIns="0" tIns="0" bIns="0">
+            <a:spAutoFit/>
+          </a:bodyPr>
+          <a:lstStyle/>
+          <a:p>
+            <a:pPr algn="l">
+              <a:lnSpc>
+                <a:spcPct val="113000"/>
+              </a:lnSpc>
+              <a:spcBef>
+                <a:spcPts val="0"/>
+              </a:spcBef>
+              <a:spcAft>
+                <a:spcPts val="400"/>
+              </a:spcAft>
+            </a:pPr>
+            <a:r>
+              <a:rPr sz="1600" b="0">
+                <a:solidFill>
+                  <a:srgbClr val="A783D7"/>
+                </a:solidFill>
+                <a:latin typeface="Arial"/>
+                <a:ea typeface="Apple SD Gothic Neo"/>
+              </a:rPr>
+              <a:t>05  Agents·Skills·MCP·Hooks ↗</a:t>
+            </a:r>
+          </a:p>
+        </p:txBody>
+      </p:sp>
+      <p:sp>
+        <p:nvSpPr>
+          <p:cNvPr id="13" name="TextBox 12">
+            <a:hlinkClick r:id="rId7"/>
+          </p:cNvPr>
+          <p:cNvSpPr txBox="1"/>
+          <p:nvPr/>
+        </p:nvSpPr>
+        <p:spPr>
+          <a:xfrm>
+            <a:off x="667512" y="4892040"/>
+            <a:ext cx="5138928" cy="329184"/>
+          </a:xfrm>
+          <a:prstGeom prst="rect">
+            <a:avLst/>
+          </a:prstGeom>
+          <a:noFill/>
+        </p:spPr>
+        <p:txBody>
+          <a:bodyPr wrap="square" lIns="0" rIns="0" tIns="0" bIns="0">
+            <a:spAutoFit/>
+          </a:bodyPr>
+          <a:lstStyle/>
+          <a:p>
+            <a:pPr algn="l">
+              <a:lnSpc>
+                <a:spcPct val="113000"/>
+              </a:lnSpc>
+              <a:spcBef>
+                <a:spcPts val="0"/>
+              </a:spcBef>
+              <a:spcAft>
+                <a:spcPts val="400"/>
+              </a:spcAft>
+            </a:pPr>
+            <a:r>
+              <a:rPr sz="1600" b="0">
+                <a:solidFill>
+                  <a:srgbClr val="A783D7"/>
+                </a:solidFill>
+                <a:latin typeface="Arial"/>
+                <a:ea typeface="Apple SD Gothic Neo"/>
+              </a:rPr>
+              <a:t>06  도입 활용도·업무 흐름 metrics ↗</a:t>
+            </a:r>
+          </a:p>
+        </p:txBody>
+      </p:sp>
+      <p:sp>
+        <p:nvSpPr>
+          <p:cNvPr id="14" name="TextBox 13"/>
           <p:cNvSpPr txBox="1"/>
           <p:nvPr/>
         </p:nvSpPr>
@@ -12327,7 +12938,7 @@
       </p:sp>
       <p:sp>
         <p:nvSpPr>
-          <p:cNvPr id="13" name="Rounded Rectangle 12"/>
+          <p:cNvPr id="15" name="Rounded Rectangle 14"/>
           <p:cNvSpPr/>
           <p:nvPr/>
         </p:nvSpPr>
@@ -12372,7 +12983,7 @@
       </p:sp>
       <p:sp>
         <p:nvSpPr>
-          <p:cNvPr id="14" name="TextBox 13"/>
+          <p:cNvPr id="16" name="TextBox 15"/>
           <p:cNvSpPr txBox="1"/>
           <p:nvPr/>
         </p:nvSpPr>
@@ -12418,7 +13029,7 @@
       </p:sp>
       <p:sp>
         <p:nvSpPr>
-          <p:cNvPr id="15" name="TextBox 14"/>
+          <p:cNvPr id="17" name="TextBox 16"/>
           <p:cNvSpPr txBox="1"/>
           <p:nvPr/>
         </p:nvSpPr>
@@ -12527,6 +13138,1125 @@
                 <a:ea typeface="Apple SD Gothic Neo"/>
               </a:rPr>
               <a:t>인증된 조직 승인·자동 배포</a:t>
+            </a:r>
+          </a:p>
+        </p:txBody>
+      </p:sp>
+    </p:spTree>
+  </p:cSld>
+  <p:clrMapOvr>
+    <a:masterClrMapping/>
+  </p:clrMapOvr>
+</p:sld>
+</file>
+
+<file path=ppt/slides/slide19.xml><?xml version="1.0" encoding="utf-8"?>
+<p:sld xmlns:a="http://schemas.openxmlformats.org/drawingml/2006/main" xmlns:p="http://schemas.openxmlformats.org/presentationml/2006/main" xmlns:r="http://schemas.openxmlformats.org/officeDocument/2006/relationships">
+  <p:cSld>
+    <p:bg>
+      <p:bgPr>
+        <a:solidFill>
+          <a:srgbClr val="F7F8FC"/>
+        </a:solidFill>
+        <a:effectLst/>
+      </p:bgPr>
+    </p:bg>
+    <p:spTree>
+      <p:nvGrpSpPr>
+        <p:cNvPr id="1" name=""/>
+        <p:cNvGrpSpPr/>
+        <p:nvPr/>
+      </p:nvGrpSpPr>
+      <p:grpSpPr/>
+      <p:sp>
+        <p:nvSpPr>
+          <p:cNvPr id="2" name="TextBox 1"/>
+          <p:cNvSpPr txBox="1"/>
+          <p:nvPr/>
+        </p:nvSpPr>
+        <p:spPr>
+          <a:xfrm>
+            <a:off x="539496" y="310896"/>
+            <a:ext cx="10972800" cy="237744"/>
+          </a:xfrm>
+          <a:prstGeom prst="rect">
+            <a:avLst/>
+          </a:prstGeom>
+          <a:noFill/>
+        </p:spPr>
+        <p:txBody>
+          <a:bodyPr wrap="square" lIns="0" rIns="0" tIns="0" bIns="0">
+            <a:spAutoFit/>
+          </a:bodyPr>
+          <a:lstStyle/>
+          <a:p>
+            <a:pPr algn="l">
+              <a:lnSpc>
+                <a:spcPct val="113000"/>
+              </a:lnSpc>
+              <a:spcBef>
+                <a:spcPts val="0"/>
+              </a:spcBef>
+              <a:spcAft>
+                <a:spcPts val="200"/>
+              </a:spcAft>
+            </a:pPr>
+            <a:r>
+              <a:rPr sz="1000" b="1">
+                <a:solidFill>
+                  <a:srgbClr val="A783D7"/>
+                </a:solidFill>
+                <a:latin typeface="Arial"/>
+                <a:ea typeface="Apple SD Gothic Neo"/>
+              </a:rPr>
+              <a:t>INTRO 01 / WHAT IS GITHUB COPILOT</a:t>
+            </a:r>
+          </a:p>
+        </p:txBody>
+      </p:sp>
+      <p:sp>
+        <p:nvSpPr>
+          <p:cNvPr id="3" name="TextBox 2"/>
+          <p:cNvSpPr txBox="1"/>
+          <p:nvPr/>
+        </p:nvSpPr>
+        <p:spPr>
+          <a:xfrm>
+            <a:off x="539496" y="832104"/>
+            <a:ext cx="11064240" cy="1124712"/>
+          </a:xfrm>
+          <a:prstGeom prst="rect">
+            <a:avLst/>
+          </a:prstGeom>
+          <a:noFill/>
+        </p:spPr>
+        <p:txBody>
+          <a:bodyPr wrap="square" lIns="0" rIns="0" tIns="0" bIns="0">
+            <a:spAutoFit/>
+          </a:bodyPr>
+          <a:lstStyle/>
+          <a:p>
+            <a:pPr algn="l">
+              <a:lnSpc>
+                <a:spcPct val="109000"/>
+              </a:lnSpc>
+              <a:spcBef>
+                <a:spcPts val="0"/>
+              </a:spcBef>
+              <a:spcAft>
+                <a:spcPts val="400"/>
+              </a:spcAft>
+            </a:pPr>
+            <a:r>
+              <a:rPr sz="3200" b="1">
+                <a:solidFill>
+                  <a:srgbClr val="182236"/>
+                </a:solidFill>
+                <a:latin typeface="Arial"/>
+                <a:ea typeface="Apple SD Gothic Neo"/>
+              </a:rPr>
+              <a:t>GitHub Copilot은,</a:t>
+            </a:r>
+          </a:p>
+          <a:p>
+            <a:pPr algn="l">
+              <a:lnSpc>
+                <a:spcPct val="109000"/>
+              </a:lnSpc>
+              <a:spcBef>
+                <a:spcPts val="0"/>
+              </a:spcBef>
+              <a:spcAft>
+                <a:spcPts val="400"/>
+              </a:spcAft>
+            </a:pPr>
+            <a:r>
+              <a:rPr sz="3200" b="1">
+                <a:solidFill>
+                  <a:srgbClr val="182236"/>
+                </a:solidFill>
+                <a:latin typeface="Arial"/>
+                <a:ea typeface="Apple SD Gothic Neo"/>
+              </a:rPr>
+              <a:t>소프트웨어 개발을 돕는 AI입니다.</a:t>
+            </a:r>
+          </a:p>
+        </p:txBody>
+      </p:sp>
+      <p:sp>
+        <p:nvSpPr>
+          <p:cNvPr id="4" name="TextBox 3"/>
+          <p:cNvSpPr txBox="1"/>
+          <p:nvPr/>
+        </p:nvSpPr>
+        <p:spPr>
+          <a:xfrm>
+            <a:off x="557784" y="1947672"/>
+            <a:ext cx="10972800" cy="411480"/>
+          </a:xfrm>
+          <a:prstGeom prst="rect">
+            <a:avLst/>
+          </a:prstGeom>
+          <a:noFill/>
+        </p:spPr>
+        <p:txBody>
+          <a:bodyPr wrap="square" lIns="0" rIns="0" tIns="0" bIns="0">
+            <a:spAutoFit/>
+          </a:bodyPr>
+          <a:lstStyle/>
+          <a:p>
+            <a:pPr algn="l">
+              <a:lnSpc>
+                <a:spcPct val="113000"/>
+              </a:lnSpc>
+              <a:spcBef>
+                <a:spcPts val="0"/>
+              </a:spcBef>
+              <a:spcAft>
+                <a:spcPts val="200"/>
+              </a:spcAft>
+            </a:pPr>
+            <a:r>
+              <a:rPr sz="1500" b="0">
+                <a:solidFill>
+                  <a:srgbClr val="78859A"/>
+                </a:solidFill>
+                <a:latin typeface="Arial"/>
+                <a:ea typeface="Apple SD Gothic Neo"/>
+              </a:rPr>
+              <a:t>코드 작성·이해·계획·변경·검토를 기존 개발 흐름 안에서 지원합니다.</a:t>
+            </a:r>
+          </a:p>
+        </p:txBody>
+      </p:sp>
+      <p:cxnSp>
+        <p:nvCxnSpPr>
+          <p:cNvPr id="5" name="Connector 4"/>
+          <p:cNvCxnSpPr/>
+          <p:nvPr/>
+        </p:nvCxnSpPr>
+        <p:spPr>
+          <a:xfrm>
+            <a:off x="539496" y="6446520"/>
+            <a:ext cx="11100816" cy="0"/>
+          </a:xfrm>
+          <a:prstGeom prst="line">
+            <a:avLst/>
+          </a:prstGeom>
+          <a:ln w="8890">
+            <a:solidFill>
+              <a:srgbClr val="DCE2EC"/>
+            </a:solidFill>
+          </a:ln>
+        </p:spPr>
+        <p:style>
+          <a:lnRef idx="2">
+            <a:schemeClr val="accent1"/>
+          </a:lnRef>
+          <a:fillRef idx="0">
+            <a:schemeClr val="accent1"/>
+          </a:fillRef>
+          <a:effectRef idx="0">
+            <a:schemeClr val="accent1"/>
+          </a:effectRef>
+          <a:fontRef idx="minor">
+            <a:schemeClr val="tx1"/>
+          </a:fontRef>
+        </p:style>
+      </p:cxnSp>
+      <p:sp>
+        <p:nvSpPr>
+          <p:cNvPr id="6" name="TextBox 5"/>
+          <p:cNvSpPr txBox="1"/>
+          <p:nvPr/>
+        </p:nvSpPr>
+        <p:spPr>
+          <a:xfrm>
+            <a:off x="557784" y="6547104"/>
+            <a:ext cx="9875520" cy="173736"/>
+          </a:xfrm>
+          <a:prstGeom prst="rect">
+            <a:avLst/>
+          </a:prstGeom>
+          <a:noFill/>
+        </p:spPr>
+        <p:txBody>
+          <a:bodyPr wrap="square" lIns="0" rIns="0" tIns="0" bIns="0">
+            <a:spAutoFit/>
+          </a:bodyPr>
+          <a:lstStyle/>
+          <a:p>
+            <a:pPr algn="l">
+              <a:lnSpc>
+                <a:spcPct val="113000"/>
+              </a:lnSpc>
+              <a:spcBef>
+                <a:spcPts val="0"/>
+              </a:spcBef>
+              <a:spcAft>
+                <a:spcPts val="200"/>
+              </a:spcAft>
+            </a:pPr>
+            <a:r>
+              <a:rPr sz="850" b="0">
+                <a:solidFill>
+                  <a:srgbClr val="78859A"/>
+                </a:solidFill>
+                <a:latin typeface="Arial"/>
+                <a:ea typeface="Apple SD Gothic Neo"/>
+              </a:rPr>
+              <a:t>GitHub Copilot  /  CXO Briefing. Real execution. Human control.</a:t>
+            </a:r>
+          </a:p>
+        </p:txBody>
+      </p:sp>
+      <p:sp>
+        <p:nvSpPr>
+          <p:cNvPr id="7" name="TextBox 6"/>
+          <p:cNvSpPr txBox="1"/>
+          <p:nvPr/>
+        </p:nvSpPr>
+        <p:spPr>
+          <a:xfrm>
+            <a:off x="11045952" y="6510528"/>
+            <a:ext cx="576072" cy="237744"/>
+          </a:xfrm>
+          <a:prstGeom prst="rect">
+            <a:avLst/>
+          </a:prstGeom>
+          <a:noFill/>
+        </p:spPr>
+        <p:txBody>
+          <a:bodyPr wrap="square" lIns="0" rIns="0" tIns="0" bIns="0">
+            <a:spAutoFit/>
+          </a:bodyPr>
+          <a:lstStyle/>
+          <a:p>
+            <a:pPr algn="r">
+              <a:lnSpc>
+                <a:spcPct val="113000"/>
+              </a:lnSpc>
+              <a:spcBef>
+                <a:spcPts val="0"/>
+              </a:spcBef>
+              <a:spcAft>
+                <a:spcPts val="200"/>
+              </a:spcAft>
+            </a:pPr>
+            <a:r>
+              <a:rPr sz="1100" b="0">
+                <a:solidFill>
+                  <a:srgbClr val="78859A"/>
+                </a:solidFill>
+                <a:latin typeface="Arial"/>
+                <a:ea typeface="Apple SD Gothic Neo"/>
+              </a:rPr>
+              <a:t>02</a:t>
+            </a:r>
+          </a:p>
+        </p:txBody>
+      </p:sp>
+      <p:sp>
+        <p:nvSpPr>
+          <p:cNvPr id="8" name="Rounded Rectangle 7"/>
+          <p:cNvSpPr/>
+          <p:nvPr/>
+        </p:nvSpPr>
+        <p:spPr>
+          <a:xfrm>
+            <a:off x="566928" y="2542032"/>
+            <a:ext cx="3547872" cy="2944368"/>
+          </a:xfrm>
+          <a:prstGeom prst="roundRect">
+            <a:avLst>
+              <a:gd name="adj" fmla="val 12000"/>
+            </a:avLst>
+          </a:prstGeom>
+          <a:solidFill>
+            <a:srgbClr val="FFFFFF"/>
+          </a:solidFill>
+          <a:ln w="10160">
+            <a:solidFill>
+              <a:srgbClr val="DCE2EC"/>
+            </a:solidFill>
+          </a:ln>
+        </p:spPr>
+        <p:style>
+          <a:lnRef idx="1">
+            <a:schemeClr val="accent1"/>
+          </a:lnRef>
+          <a:fillRef idx="3">
+            <a:schemeClr val="accent1"/>
+          </a:fillRef>
+          <a:effectRef idx="0">
+            <a:schemeClr val="accent1"/>
+          </a:effectRef>
+          <a:fontRef idx="minor">
+            <a:schemeClr val="lt1"/>
+          </a:fontRef>
+        </p:style>
+        <p:txBody>
+          <a:bodyPr rtlCol="0" anchor="ctr"/>
+          <a:lstStyle/>
+          <a:p>
+            <a:pPr algn="ctr"/>
+          </a:p>
+        </p:txBody>
+      </p:sp>
+      <p:sp>
+        <p:nvSpPr>
+          <p:cNvPr id="9" name="Rounded Rectangle 8"/>
+          <p:cNvSpPr/>
+          <p:nvPr/>
+        </p:nvSpPr>
+        <p:spPr>
+          <a:xfrm>
+            <a:off x="786384" y="2761487"/>
+            <a:ext cx="3099816" cy="310896"/>
+          </a:xfrm>
+          <a:prstGeom prst="roundRect">
+            <a:avLst>
+              <a:gd name="adj" fmla="val 12000"/>
+            </a:avLst>
+          </a:prstGeom>
+          <a:solidFill>
+            <a:srgbClr val="EEE7F7"/>
+          </a:solidFill>
+          <a:ln>
+            <a:noFill/>
+          </a:ln>
+        </p:spPr>
+        <p:style>
+          <a:lnRef idx="1">
+            <a:schemeClr val="accent1"/>
+          </a:lnRef>
+          <a:fillRef idx="3">
+            <a:schemeClr val="accent1"/>
+          </a:fillRef>
+          <a:effectRef idx="0">
+            <a:schemeClr val="accent1"/>
+          </a:effectRef>
+          <a:fontRef idx="minor">
+            <a:schemeClr val="lt1"/>
+          </a:fontRef>
+        </p:style>
+        <p:txBody>
+          <a:bodyPr rtlCol="0" anchor="ctr"/>
+          <a:lstStyle/>
+          <a:p>
+            <a:pPr algn="ctr"/>
+          </a:p>
+        </p:txBody>
+      </p:sp>
+      <p:sp>
+        <p:nvSpPr>
+          <p:cNvPr id="10" name="TextBox 9"/>
+          <p:cNvSpPr txBox="1"/>
+          <p:nvPr/>
+        </p:nvSpPr>
+        <p:spPr>
+          <a:xfrm>
+            <a:off x="859536" y="2802635"/>
+            <a:ext cx="2953512" cy="228600"/>
+          </a:xfrm>
+          <a:prstGeom prst="rect">
+            <a:avLst/>
+          </a:prstGeom>
+          <a:noFill/>
+        </p:spPr>
+        <p:txBody>
+          <a:bodyPr wrap="square" lIns="0" rIns="0" tIns="0" bIns="0">
+            <a:spAutoFit/>
+          </a:bodyPr>
+          <a:lstStyle/>
+          <a:p>
+            <a:pPr algn="ctr">
+              <a:lnSpc>
+                <a:spcPct val="113000"/>
+              </a:lnSpc>
+              <a:spcBef>
+                <a:spcPts val="0"/>
+              </a:spcBef>
+              <a:spcAft>
+                <a:spcPts val="200"/>
+              </a:spcAft>
+            </a:pPr>
+            <a:r>
+              <a:rPr sz="1000" b="1">
+                <a:solidFill>
+                  <a:srgbClr val="A783D7"/>
+                </a:solidFill>
+                <a:latin typeface="Arial"/>
+                <a:ea typeface="Apple SD Gothic Neo"/>
+              </a:rPr>
+              <a:t>ASSIST</a:t>
+            </a:r>
+          </a:p>
+        </p:txBody>
+      </p:sp>
+      <p:sp>
+        <p:nvSpPr>
+          <p:cNvPr id="11" name="TextBox 10"/>
+          <p:cNvSpPr txBox="1"/>
+          <p:nvPr/>
+        </p:nvSpPr>
+        <p:spPr>
+          <a:xfrm>
+            <a:off x="795528" y="3429000"/>
+            <a:ext cx="3072384" cy="749808"/>
+          </a:xfrm>
+          <a:prstGeom prst="rect">
+            <a:avLst/>
+          </a:prstGeom>
+          <a:noFill/>
+        </p:spPr>
+        <p:txBody>
+          <a:bodyPr wrap="square" lIns="0" rIns="0" tIns="0" bIns="0">
+            <a:spAutoFit/>
+          </a:bodyPr>
+          <a:lstStyle/>
+          <a:p>
+            <a:pPr algn="l">
+              <a:lnSpc>
+                <a:spcPct val="113000"/>
+              </a:lnSpc>
+              <a:spcBef>
+                <a:spcPts val="0"/>
+              </a:spcBef>
+              <a:spcAft>
+                <a:spcPts val="400"/>
+              </a:spcAft>
+            </a:pPr>
+            <a:r>
+              <a:rPr sz="2400" b="1">
+                <a:solidFill>
+                  <a:srgbClr val="182236"/>
+                </a:solidFill>
+                <a:latin typeface="Arial"/>
+                <a:ea typeface="Apple SD Gothic Neo"/>
+              </a:rPr>
+              <a:t>코드를 제안하고</a:t>
+            </a:r>
+          </a:p>
+        </p:txBody>
+      </p:sp>
+      <p:sp>
+        <p:nvSpPr>
+          <p:cNvPr id="12" name="TextBox 11"/>
+          <p:cNvSpPr txBox="1"/>
+          <p:nvPr/>
+        </p:nvSpPr>
+        <p:spPr>
+          <a:xfrm>
+            <a:off x="795528" y="4379975"/>
+            <a:ext cx="3072384" cy="932688"/>
+          </a:xfrm>
+          <a:prstGeom prst="rect">
+            <a:avLst/>
+          </a:prstGeom>
+          <a:noFill/>
+        </p:spPr>
+        <p:txBody>
+          <a:bodyPr wrap="square" lIns="0" rIns="0" tIns="0" bIns="0">
+            <a:spAutoFit/>
+          </a:bodyPr>
+          <a:lstStyle/>
+          <a:p>
+            <a:pPr algn="l">
+              <a:lnSpc>
+                <a:spcPct val="113000"/>
+              </a:lnSpc>
+              <a:spcBef>
+                <a:spcPts val="0"/>
+              </a:spcBef>
+              <a:spcAft>
+                <a:spcPts val="400"/>
+              </a:spcAft>
+            </a:pPr>
+            <a:r>
+              <a:rPr sz="1700" b="0">
+                <a:solidFill>
+                  <a:srgbClr val="78859A"/>
+                </a:solidFill>
+                <a:latin typeface="Arial"/>
+                <a:ea typeface="Apple SD Gothic Neo"/>
+              </a:rPr>
+              <a:t>입력 중 코드 추천</a:t>
+            </a:r>
+          </a:p>
+          <a:p>
+            <a:pPr algn="l">
+              <a:lnSpc>
+                <a:spcPct val="113000"/>
+              </a:lnSpc>
+              <a:spcBef>
+                <a:spcPts val="0"/>
+              </a:spcBef>
+              <a:spcAft>
+                <a:spcPts val="400"/>
+              </a:spcAft>
+            </a:pPr>
+            <a:r>
+              <a:rPr sz="1700" b="0">
+                <a:solidFill>
+                  <a:srgbClr val="78859A"/>
+                </a:solidFill>
+                <a:latin typeface="Arial"/>
+                <a:ea typeface="Apple SD Gothic Neo"/>
+              </a:rPr>
+              <a:t>질문 답변·코드 설명</a:t>
+            </a:r>
+          </a:p>
+        </p:txBody>
+      </p:sp>
+      <p:sp>
+        <p:nvSpPr>
+          <p:cNvPr id="13" name="Rounded Rectangle 12"/>
+          <p:cNvSpPr/>
+          <p:nvPr/>
+        </p:nvSpPr>
+        <p:spPr>
+          <a:xfrm>
+            <a:off x="4361688" y="2542032"/>
+            <a:ext cx="3547872" cy="2944368"/>
+          </a:xfrm>
+          <a:prstGeom prst="roundRect">
+            <a:avLst>
+              <a:gd name="adj" fmla="val 12000"/>
+            </a:avLst>
+          </a:prstGeom>
+          <a:solidFill>
+            <a:srgbClr val="FFFFFF"/>
+          </a:solidFill>
+          <a:ln w="10160">
+            <a:solidFill>
+              <a:srgbClr val="DCE2EC"/>
+            </a:solidFill>
+          </a:ln>
+        </p:spPr>
+        <p:style>
+          <a:lnRef idx="1">
+            <a:schemeClr val="accent1"/>
+          </a:lnRef>
+          <a:fillRef idx="3">
+            <a:schemeClr val="accent1"/>
+          </a:fillRef>
+          <a:effectRef idx="0">
+            <a:schemeClr val="accent1"/>
+          </a:effectRef>
+          <a:fontRef idx="minor">
+            <a:schemeClr val="lt1"/>
+          </a:fontRef>
+        </p:style>
+        <p:txBody>
+          <a:bodyPr rtlCol="0" anchor="ctr"/>
+          <a:lstStyle/>
+          <a:p>
+            <a:pPr algn="ctr"/>
+          </a:p>
+        </p:txBody>
+      </p:sp>
+      <p:sp>
+        <p:nvSpPr>
+          <p:cNvPr id="14" name="Rounded Rectangle 13"/>
+          <p:cNvSpPr/>
+          <p:nvPr/>
+        </p:nvSpPr>
+        <p:spPr>
+          <a:xfrm>
+            <a:off x="4581144" y="2761487"/>
+            <a:ext cx="3099816" cy="310896"/>
+          </a:xfrm>
+          <a:prstGeom prst="roundRect">
+            <a:avLst>
+              <a:gd name="adj" fmla="val 12000"/>
+            </a:avLst>
+          </a:prstGeom>
+          <a:solidFill>
+            <a:srgbClr val="EEE7F7"/>
+          </a:solidFill>
+          <a:ln>
+            <a:noFill/>
+          </a:ln>
+        </p:spPr>
+        <p:style>
+          <a:lnRef idx="1">
+            <a:schemeClr val="accent1"/>
+          </a:lnRef>
+          <a:fillRef idx="3">
+            <a:schemeClr val="accent1"/>
+          </a:fillRef>
+          <a:effectRef idx="0">
+            <a:schemeClr val="accent1"/>
+          </a:effectRef>
+          <a:fontRef idx="minor">
+            <a:schemeClr val="lt1"/>
+          </a:fontRef>
+        </p:style>
+        <p:txBody>
+          <a:bodyPr rtlCol="0" anchor="ctr"/>
+          <a:lstStyle/>
+          <a:p>
+            <a:pPr algn="ctr"/>
+          </a:p>
+        </p:txBody>
+      </p:sp>
+      <p:sp>
+        <p:nvSpPr>
+          <p:cNvPr id="15" name="TextBox 14"/>
+          <p:cNvSpPr txBox="1"/>
+          <p:nvPr/>
+        </p:nvSpPr>
+        <p:spPr>
+          <a:xfrm>
+            <a:off x="4654296" y="2802635"/>
+            <a:ext cx="2953512" cy="228600"/>
+          </a:xfrm>
+          <a:prstGeom prst="rect">
+            <a:avLst/>
+          </a:prstGeom>
+          <a:noFill/>
+        </p:spPr>
+        <p:txBody>
+          <a:bodyPr wrap="square" lIns="0" rIns="0" tIns="0" bIns="0">
+            <a:spAutoFit/>
+          </a:bodyPr>
+          <a:lstStyle/>
+          <a:p>
+            <a:pPr algn="ctr">
+              <a:lnSpc>
+                <a:spcPct val="113000"/>
+              </a:lnSpc>
+              <a:spcBef>
+                <a:spcPts val="0"/>
+              </a:spcBef>
+              <a:spcAft>
+                <a:spcPts val="200"/>
+              </a:spcAft>
+            </a:pPr>
+            <a:r>
+              <a:rPr sz="1000" b="1">
+                <a:solidFill>
+                  <a:srgbClr val="267F62"/>
+                </a:solidFill>
+                <a:latin typeface="Arial"/>
+                <a:ea typeface="Apple SD Gothic Neo"/>
+              </a:rPr>
+              <a:t>CONTEXT</a:t>
+            </a:r>
+          </a:p>
+        </p:txBody>
+      </p:sp>
+      <p:sp>
+        <p:nvSpPr>
+          <p:cNvPr id="16" name="TextBox 15"/>
+          <p:cNvSpPr txBox="1"/>
+          <p:nvPr/>
+        </p:nvSpPr>
+        <p:spPr>
+          <a:xfrm>
+            <a:off x="4590288" y="3429000"/>
+            <a:ext cx="3072384" cy="749808"/>
+          </a:xfrm>
+          <a:prstGeom prst="rect">
+            <a:avLst/>
+          </a:prstGeom>
+          <a:noFill/>
+        </p:spPr>
+        <p:txBody>
+          <a:bodyPr wrap="square" lIns="0" rIns="0" tIns="0" bIns="0">
+            <a:spAutoFit/>
+          </a:bodyPr>
+          <a:lstStyle/>
+          <a:p>
+            <a:pPr algn="l">
+              <a:lnSpc>
+                <a:spcPct val="113000"/>
+              </a:lnSpc>
+              <a:spcBef>
+                <a:spcPts val="0"/>
+              </a:spcBef>
+              <a:spcAft>
+                <a:spcPts val="400"/>
+              </a:spcAft>
+            </a:pPr>
+            <a:r>
+              <a:rPr sz="2400" b="1">
+                <a:solidFill>
+                  <a:srgbClr val="182236"/>
+                </a:solidFill>
+                <a:latin typeface="Arial"/>
+                <a:ea typeface="Apple SD Gothic Neo"/>
+              </a:rPr>
+              <a:t>맥락을 이해하고</a:t>
+            </a:r>
+          </a:p>
+        </p:txBody>
+      </p:sp>
+      <p:sp>
+        <p:nvSpPr>
+          <p:cNvPr id="17" name="TextBox 16"/>
+          <p:cNvSpPr txBox="1"/>
+          <p:nvPr/>
+        </p:nvSpPr>
+        <p:spPr>
+          <a:xfrm>
+            <a:off x="4590288" y="4379975"/>
+            <a:ext cx="3072384" cy="932688"/>
+          </a:xfrm>
+          <a:prstGeom prst="rect">
+            <a:avLst/>
+          </a:prstGeom>
+          <a:noFill/>
+        </p:spPr>
+        <p:txBody>
+          <a:bodyPr wrap="square" lIns="0" rIns="0" tIns="0" bIns="0">
+            <a:spAutoFit/>
+          </a:bodyPr>
+          <a:lstStyle/>
+          <a:p>
+            <a:pPr algn="l">
+              <a:lnSpc>
+                <a:spcPct val="113000"/>
+              </a:lnSpc>
+              <a:spcBef>
+                <a:spcPts val="0"/>
+              </a:spcBef>
+              <a:spcAft>
+                <a:spcPts val="400"/>
+              </a:spcAft>
+            </a:pPr>
+            <a:r>
+              <a:rPr sz="1700" b="0">
+                <a:solidFill>
+                  <a:srgbClr val="78859A"/>
+                </a:solidFill>
+                <a:latin typeface="Arial"/>
+                <a:ea typeface="Apple SD Gothic Neo"/>
+              </a:rPr>
+              <a:t>요청·코드·저장소를 참고</a:t>
+            </a:r>
+          </a:p>
+          <a:p>
+            <a:pPr algn="l">
+              <a:lnSpc>
+                <a:spcPct val="113000"/>
+              </a:lnSpc>
+              <a:spcBef>
+                <a:spcPts val="0"/>
+              </a:spcBef>
+              <a:spcAft>
+                <a:spcPts val="400"/>
+              </a:spcAft>
+            </a:pPr>
+            <a:r>
+              <a:rPr sz="1700" b="0">
+                <a:solidFill>
+                  <a:srgbClr val="78859A"/>
+                </a:solidFill>
+                <a:latin typeface="Arial"/>
+                <a:ea typeface="Apple SD Gothic Neo"/>
+              </a:rPr>
+              <a:t>작업에 필요한 정보 탐색</a:t>
+            </a:r>
+          </a:p>
+        </p:txBody>
+      </p:sp>
+      <p:sp>
+        <p:nvSpPr>
+          <p:cNvPr id="18" name="Rounded Rectangle 17"/>
+          <p:cNvSpPr/>
+          <p:nvPr/>
+        </p:nvSpPr>
+        <p:spPr>
+          <a:xfrm>
+            <a:off x="8156448" y="2542032"/>
+            <a:ext cx="3547872" cy="2944368"/>
+          </a:xfrm>
+          <a:prstGeom prst="roundRect">
+            <a:avLst>
+              <a:gd name="adj" fmla="val 12000"/>
+            </a:avLst>
+          </a:prstGeom>
+          <a:solidFill>
+            <a:srgbClr val="FFFFFF"/>
+          </a:solidFill>
+          <a:ln w="10160">
+            <a:solidFill>
+              <a:srgbClr val="DCE2EC"/>
+            </a:solidFill>
+          </a:ln>
+        </p:spPr>
+        <p:style>
+          <a:lnRef idx="1">
+            <a:schemeClr val="accent1"/>
+          </a:lnRef>
+          <a:fillRef idx="3">
+            <a:schemeClr val="accent1"/>
+          </a:fillRef>
+          <a:effectRef idx="0">
+            <a:schemeClr val="accent1"/>
+          </a:effectRef>
+          <a:fontRef idx="minor">
+            <a:schemeClr val="lt1"/>
+          </a:fontRef>
+        </p:style>
+        <p:txBody>
+          <a:bodyPr rtlCol="0" anchor="ctr"/>
+          <a:lstStyle/>
+          <a:p>
+            <a:pPr algn="ctr"/>
+          </a:p>
+        </p:txBody>
+      </p:sp>
+      <p:sp>
+        <p:nvSpPr>
+          <p:cNvPr id="19" name="Rounded Rectangle 18"/>
+          <p:cNvSpPr/>
+          <p:nvPr/>
+        </p:nvSpPr>
+        <p:spPr>
+          <a:xfrm>
+            <a:off x="8375904" y="2761487"/>
+            <a:ext cx="3099816" cy="310896"/>
+          </a:xfrm>
+          <a:prstGeom prst="roundRect">
+            <a:avLst>
+              <a:gd name="adj" fmla="val 12000"/>
+            </a:avLst>
+          </a:prstGeom>
+          <a:solidFill>
+            <a:srgbClr val="EEE7F7"/>
+          </a:solidFill>
+          <a:ln>
+            <a:noFill/>
+          </a:ln>
+        </p:spPr>
+        <p:style>
+          <a:lnRef idx="1">
+            <a:schemeClr val="accent1"/>
+          </a:lnRef>
+          <a:fillRef idx="3">
+            <a:schemeClr val="accent1"/>
+          </a:fillRef>
+          <a:effectRef idx="0">
+            <a:schemeClr val="accent1"/>
+          </a:effectRef>
+          <a:fontRef idx="minor">
+            <a:schemeClr val="lt1"/>
+          </a:fontRef>
+        </p:style>
+        <p:txBody>
+          <a:bodyPr rtlCol="0" anchor="ctr"/>
+          <a:lstStyle/>
+          <a:p>
+            <a:pPr algn="ctr"/>
+          </a:p>
+        </p:txBody>
+      </p:sp>
+      <p:sp>
+        <p:nvSpPr>
+          <p:cNvPr id="20" name="TextBox 19"/>
+          <p:cNvSpPr txBox="1"/>
+          <p:nvPr/>
+        </p:nvSpPr>
+        <p:spPr>
+          <a:xfrm>
+            <a:off x="8449056" y="2802635"/>
+            <a:ext cx="2953512" cy="228600"/>
+          </a:xfrm>
+          <a:prstGeom prst="rect">
+            <a:avLst/>
+          </a:prstGeom>
+          <a:noFill/>
+        </p:spPr>
+        <p:txBody>
+          <a:bodyPr wrap="square" lIns="0" rIns="0" tIns="0" bIns="0">
+            <a:spAutoFit/>
+          </a:bodyPr>
+          <a:lstStyle/>
+          <a:p>
+            <a:pPr algn="ctr">
+              <a:lnSpc>
+                <a:spcPct val="113000"/>
+              </a:lnSpc>
+              <a:spcBef>
+                <a:spcPts val="0"/>
+              </a:spcBef>
+              <a:spcAft>
+                <a:spcPts val="200"/>
+              </a:spcAft>
+            </a:pPr>
+            <a:r>
+              <a:rPr sz="1000" b="1">
+                <a:solidFill>
+                  <a:srgbClr val="A783D7"/>
+                </a:solidFill>
+                <a:latin typeface="Arial"/>
+                <a:ea typeface="Apple SD Gothic Neo"/>
+              </a:rPr>
+              <a:t>AGENT</a:t>
+            </a:r>
+          </a:p>
+        </p:txBody>
+      </p:sp>
+      <p:sp>
+        <p:nvSpPr>
+          <p:cNvPr id="21" name="TextBox 20"/>
+          <p:cNvSpPr txBox="1"/>
+          <p:nvPr/>
+        </p:nvSpPr>
+        <p:spPr>
+          <a:xfrm>
+            <a:off x="8385048" y="3429000"/>
+            <a:ext cx="3072384" cy="749808"/>
+          </a:xfrm>
+          <a:prstGeom prst="rect">
+            <a:avLst/>
+          </a:prstGeom>
+          <a:noFill/>
+        </p:spPr>
+        <p:txBody>
+          <a:bodyPr wrap="square" lIns="0" rIns="0" tIns="0" bIns="0">
+            <a:spAutoFit/>
+          </a:bodyPr>
+          <a:lstStyle/>
+          <a:p>
+            <a:pPr algn="l">
+              <a:lnSpc>
+                <a:spcPct val="113000"/>
+              </a:lnSpc>
+              <a:spcBef>
+                <a:spcPts val="0"/>
+              </a:spcBef>
+              <a:spcAft>
+                <a:spcPts val="400"/>
+              </a:spcAft>
+            </a:pPr>
+            <a:r>
+              <a:rPr sz="2400" b="1">
+                <a:solidFill>
+                  <a:srgbClr val="182236"/>
+                </a:solidFill>
+                <a:latin typeface="Arial"/>
+                <a:ea typeface="Apple SD Gothic Neo"/>
+              </a:rPr>
+              <a:t>작업을 실행합니다</a:t>
+            </a:r>
+          </a:p>
+        </p:txBody>
+      </p:sp>
+      <p:sp>
+        <p:nvSpPr>
+          <p:cNvPr id="22" name="TextBox 21"/>
+          <p:cNvSpPr txBox="1"/>
+          <p:nvPr/>
+        </p:nvSpPr>
+        <p:spPr>
+          <a:xfrm>
+            <a:off x="8385048" y="4379975"/>
+            <a:ext cx="3072384" cy="932688"/>
+          </a:xfrm>
+          <a:prstGeom prst="rect">
+            <a:avLst/>
+          </a:prstGeom>
+          <a:noFill/>
+        </p:spPr>
+        <p:txBody>
+          <a:bodyPr wrap="square" lIns="0" rIns="0" tIns="0" bIns="0">
+            <a:spAutoFit/>
+          </a:bodyPr>
+          <a:lstStyle/>
+          <a:p>
+            <a:pPr algn="l">
+              <a:lnSpc>
+                <a:spcPct val="113000"/>
+              </a:lnSpc>
+              <a:spcBef>
+                <a:spcPts val="0"/>
+              </a:spcBef>
+              <a:spcAft>
+                <a:spcPts val="400"/>
+              </a:spcAft>
+            </a:pPr>
+            <a:r>
+              <a:rPr sz="1700" b="0">
+                <a:solidFill>
+                  <a:srgbClr val="78859A"/>
+                </a:solidFill>
+                <a:latin typeface="Arial"/>
+                <a:ea typeface="Apple SD Gothic Neo"/>
+              </a:rPr>
+              <a:t>목표를 받아 여러 단계 수행</a:t>
+            </a:r>
+          </a:p>
+          <a:p>
+            <a:pPr algn="l">
+              <a:lnSpc>
+                <a:spcPct val="113000"/>
+              </a:lnSpc>
+              <a:spcBef>
+                <a:spcPts val="0"/>
+              </a:spcBef>
+              <a:spcAft>
+                <a:spcPts val="400"/>
+              </a:spcAft>
+            </a:pPr>
+            <a:r>
+              <a:rPr sz="1700" b="0">
+                <a:solidFill>
+                  <a:srgbClr val="78859A"/>
+                </a:solidFill>
+                <a:latin typeface="Arial"/>
+                <a:ea typeface="Apple SD Gothic Neo"/>
+              </a:rPr>
+              <a:t>변경과 검증 결과를 검토</a:t>
+            </a:r>
+          </a:p>
+        </p:txBody>
+      </p:sp>
+      <p:sp>
+        <p:nvSpPr>
+          <p:cNvPr id="23" name="TextBox 22"/>
+          <p:cNvSpPr txBox="1"/>
+          <p:nvPr/>
+        </p:nvSpPr>
+        <p:spPr>
+          <a:xfrm>
+            <a:off x="612648" y="5852160"/>
+            <a:ext cx="10972800" cy="384048"/>
+          </a:xfrm>
+          <a:prstGeom prst="rect">
+            <a:avLst/>
+          </a:prstGeom>
+          <a:noFill/>
+        </p:spPr>
+        <p:txBody>
+          <a:bodyPr wrap="square" lIns="0" rIns="0" tIns="0" bIns="0">
+            <a:spAutoFit/>
+          </a:bodyPr>
+          <a:lstStyle/>
+          <a:p>
+            <a:pPr algn="l">
+              <a:lnSpc>
+                <a:spcPct val="113000"/>
+              </a:lnSpc>
+              <a:spcBef>
+                <a:spcPts val="0"/>
+              </a:spcBef>
+              <a:spcAft>
+                <a:spcPts val="400"/>
+              </a:spcAft>
+            </a:pPr>
+            <a:r>
+              <a:rPr sz="1600" b="1">
+                <a:solidFill>
+                  <a:srgbClr val="182236"/>
+                </a:solidFill>
+                <a:latin typeface="Arial"/>
+                <a:ea typeface="Apple SD Gothic Neo"/>
+              </a:rPr>
+              <a:t>자동완성만이 아니라, 개발 업무를 함께 수행하는 파트너입니다. 최종 판단은 사람에게 남습니다.</a:t>
             </a:r>
           </a:p>
         </p:txBody>
@@ -12748,7 +14478,7 @@
                 <a:latin typeface="Arial"/>
                 <a:ea typeface="Apple SD Gothic Neo"/>
               </a:rPr>
-              <a:t>GitHub Copilot CLI  /  Real execution. Human control.</a:t>
+              <a:t>GitHub Copilot  /  CXO Briefing. Real execution. Human control.</a:t>
             </a:r>
           </a:p>
         </p:txBody>
@@ -12794,7 +14524,7 @@
                 <a:latin typeface="Arial"/>
                 <a:ea typeface="Apple SD Gothic Neo"/>
               </a:rPr>
-              <a:t>02</a:t>
+              <a:t>07</a:t>
             </a:r>
           </a:p>
         </p:txBody>
@@ -13600,6 +15330,5980 @@
                 <a:ea typeface="Apple SD Gothic Neo"/>
               </a:rPr>
               <a:t>관찰할 것: 실제 작업 위임과 승인 흐름  |  측정할 것: 리드타임·재작업·검토 부담의 변화</a:t>
+            </a:r>
+          </a:p>
+        </p:txBody>
+      </p:sp>
+    </p:spTree>
+  </p:cSld>
+  <p:clrMapOvr>
+    <a:masterClrMapping/>
+  </p:clrMapOvr>
+</p:sld>
+</file>
+
+<file path=ppt/slides/slide20.xml><?xml version="1.0" encoding="utf-8"?>
+<p:sld xmlns:a="http://schemas.openxmlformats.org/drawingml/2006/main" xmlns:p="http://schemas.openxmlformats.org/presentationml/2006/main" xmlns:r="http://schemas.openxmlformats.org/officeDocument/2006/relationships">
+  <p:cSld>
+    <p:bg>
+      <p:bgPr>
+        <a:solidFill>
+          <a:srgbClr val="F7F8FC"/>
+        </a:solidFill>
+        <a:effectLst/>
+      </p:bgPr>
+    </p:bg>
+    <p:spTree>
+      <p:nvGrpSpPr>
+        <p:cNvPr id="1" name=""/>
+        <p:cNvGrpSpPr/>
+        <p:nvPr/>
+      </p:nvGrpSpPr>
+      <p:grpSpPr/>
+      <p:sp>
+        <p:nvSpPr>
+          <p:cNvPr id="2" name="TextBox 1"/>
+          <p:cNvSpPr txBox="1"/>
+          <p:nvPr/>
+        </p:nvSpPr>
+        <p:spPr>
+          <a:xfrm>
+            <a:off x="539496" y="310896"/>
+            <a:ext cx="10972800" cy="237744"/>
+          </a:xfrm>
+          <a:prstGeom prst="rect">
+            <a:avLst/>
+          </a:prstGeom>
+          <a:noFill/>
+        </p:spPr>
+        <p:txBody>
+          <a:bodyPr wrap="square" lIns="0" rIns="0" tIns="0" bIns="0">
+            <a:spAutoFit/>
+          </a:bodyPr>
+          <a:lstStyle/>
+          <a:p>
+            <a:pPr algn="l">
+              <a:lnSpc>
+                <a:spcPct val="113000"/>
+              </a:lnSpc>
+              <a:spcBef>
+                <a:spcPts val="0"/>
+              </a:spcBef>
+              <a:spcAft>
+                <a:spcPts val="200"/>
+              </a:spcAft>
+            </a:pPr>
+            <a:r>
+              <a:rPr sz="1000" b="1">
+                <a:solidFill>
+                  <a:srgbClr val="A783D7"/>
+                </a:solidFill>
+                <a:latin typeface="Arial"/>
+                <a:ea typeface="Apple SD Gothic Neo"/>
+              </a:rPr>
+              <a:t>INTRO 02 / SURFACES: WHERE YOU USE COPILOT</a:t>
+            </a:r>
+          </a:p>
+        </p:txBody>
+      </p:sp>
+      <p:sp>
+        <p:nvSpPr>
+          <p:cNvPr id="3" name="TextBox 2"/>
+          <p:cNvSpPr txBox="1"/>
+          <p:nvPr/>
+        </p:nvSpPr>
+        <p:spPr>
+          <a:xfrm>
+            <a:off x="539496" y="832104"/>
+            <a:ext cx="11064240" cy="1124712"/>
+          </a:xfrm>
+          <a:prstGeom prst="rect">
+            <a:avLst/>
+          </a:prstGeom>
+          <a:noFill/>
+        </p:spPr>
+        <p:txBody>
+          <a:bodyPr wrap="square" lIns="0" rIns="0" tIns="0" bIns="0">
+            <a:spAutoFit/>
+          </a:bodyPr>
+          <a:lstStyle/>
+          <a:p>
+            <a:pPr algn="l">
+              <a:lnSpc>
+                <a:spcPct val="109000"/>
+              </a:lnSpc>
+              <a:spcBef>
+                <a:spcPts val="0"/>
+              </a:spcBef>
+              <a:spcAft>
+                <a:spcPts val="400"/>
+              </a:spcAft>
+            </a:pPr>
+            <a:r>
+              <a:rPr sz="3200" b="1">
+                <a:solidFill>
+                  <a:srgbClr val="182236"/>
+                </a:solidFill>
+                <a:latin typeface="Arial"/>
+                <a:ea typeface="Apple SD Gothic Neo"/>
+              </a:rPr>
+              <a:t>필요한 작업을,</a:t>
+            </a:r>
+          </a:p>
+          <a:p>
+            <a:pPr algn="l">
+              <a:lnSpc>
+                <a:spcPct val="109000"/>
+              </a:lnSpc>
+              <a:spcBef>
+                <a:spcPts val="0"/>
+              </a:spcBef>
+              <a:spcAft>
+                <a:spcPts val="400"/>
+              </a:spcAft>
+            </a:pPr>
+            <a:r>
+              <a:rPr sz="3200" b="1">
+                <a:solidFill>
+                  <a:srgbClr val="182236"/>
+                </a:solidFill>
+                <a:latin typeface="Arial"/>
+                <a:ea typeface="Apple SD Gothic Neo"/>
+              </a:rPr>
+              <a:t>익숙한 접점에서 시작합니다.</a:t>
+            </a:r>
+          </a:p>
+        </p:txBody>
+      </p:sp>
+      <p:sp>
+        <p:nvSpPr>
+          <p:cNvPr id="4" name="TextBox 3"/>
+          <p:cNvSpPr txBox="1"/>
+          <p:nvPr/>
+        </p:nvSpPr>
+        <p:spPr>
+          <a:xfrm>
+            <a:off x="557784" y="1947672"/>
+            <a:ext cx="10972800" cy="411480"/>
+          </a:xfrm>
+          <a:prstGeom prst="rect">
+            <a:avLst/>
+          </a:prstGeom>
+          <a:noFill/>
+        </p:spPr>
+        <p:txBody>
+          <a:bodyPr wrap="square" lIns="0" rIns="0" tIns="0" bIns="0">
+            <a:spAutoFit/>
+          </a:bodyPr>
+          <a:lstStyle/>
+          <a:p>
+            <a:pPr algn="l">
+              <a:lnSpc>
+                <a:spcPct val="113000"/>
+              </a:lnSpc>
+              <a:spcBef>
+                <a:spcPts val="0"/>
+              </a:spcBef>
+              <a:spcAft>
+                <a:spcPts val="200"/>
+              </a:spcAft>
+            </a:pPr>
+            <a:r>
+              <a:rPr sz="1500" b="0">
+                <a:solidFill>
+                  <a:srgbClr val="78859A"/>
+                </a:solidFill>
+                <a:latin typeface="Arial"/>
+                <a:ea typeface="Apple SD Gothic Neo"/>
+              </a:rPr>
+              <a:t>서피스(Surface)는 Copilot을 사용하는 화면·도구입니다.</a:t>
+            </a:r>
+          </a:p>
+        </p:txBody>
+      </p:sp>
+      <p:cxnSp>
+        <p:nvCxnSpPr>
+          <p:cNvPr id="5" name="Connector 4"/>
+          <p:cNvCxnSpPr/>
+          <p:nvPr/>
+        </p:nvCxnSpPr>
+        <p:spPr>
+          <a:xfrm>
+            <a:off x="539496" y="6446520"/>
+            <a:ext cx="11100816" cy="0"/>
+          </a:xfrm>
+          <a:prstGeom prst="line">
+            <a:avLst/>
+          </a:prstGeom>
+          <a:ln w="8890">
+            <a:solidFill>
+              <a:srgbClr val="DCE2EC"/>
+            </a:solidFill>
+          </a:ln>
+        </p:spPr>
+        <p:style>
+          <a:lnRef idx="2">
+            <a:schemeClr val="accent1"/>
+          </a:lnRef>
+          <a:fillRef idx="0">
+            <a:schemeClr val="accent1"/>
+          </a:fillRef>
+          <a:effectRef idx="0">
+            <a:schemeClr val="accent1"/>
+          </a:effectRef>
+          <a:fontRef idx="minor">
+            <a:schemeClr val="tx1"/>
+          </a:fontRef>
+        </p:style>
+      </p:cxnSp>
+      <p:sp>
+        <p:nvSpPr>
+          <p:cNvPr id="6" name="TextBox 5"/>
+          <p:cNvSpPr txBox="1"/>
+          <p:nvPr/>
+        </p:nvSpPr>
+        <p:spPr>
+          <a:xfrm>
+            <a:off x="557784" y="6547104"/>
+            <a:ext cx="9875520" cy="173736"/>
+          </a:xfrm>
+          <a:prstGeom prst="rect">
+            <a:avLst/>
+          </a:prstGeom>
+          <a:noFill/>
+        </p:spPr>
+        <p:txBody>
+          <a:bodyPr wrap="square" lIns="0" rIns="0" tIns="0" bIns="0">
+            <a:spAutoFit/>
+          </a:bodyPr>
+          <a:lstStyle/>
+          <a:p>
+            <a:pPr algn="l">
+              <a:lnSpc>
+                <a:spcPct val="113000"/>
+              </a:lnSpc>
+              <a:spcBef>
+                <a:spcPts val="0"/>
+              </a:spcBef>
+              <a:spcAft>
+                <a:spcPts val="200"/>
+              </a:spcAft>
+            </a:pPr>
+            <a:r>
+              <a:rPr sz="850" b="0">
+                <a:solidFill>
+                  <a:srgbClr val="78859A"/>
+                </a:solidFill>
+                <a:latin typeface="Arial"/>
+                <a:ea typeface="Apple SD Gothic Neo"/>
+              </a:rPr>
+              <a:t>GitHub Copilot  /  CXO Briefing. Real execution. Human control.</a:t>
+            </a:r>
+          </a:p>
+        </p:txBody>
+      </p:sp>
+      <p:sp>
+        <p:nvSpPr>
+          <p:cNvPr id="7" name="TextBox 6"/>
+          <p:cNvSpPr txBox="1"/>
+          <p:nvPr/>
+        </p:nvSpPr>
+        <p:spPr>
+          <a:xfrm>
+            <a:off x="11045952" y="6510528"/>
+            <a:ext cx="576072" cy="237744"/>
+          </a:xfrm>
+          <a:prstGeom prst="rect">
+            <a:avLst/>
+          </a:prstGeom>
+          <a:noFill/>
+        </p:spPr>
+        <p:txBody>
+          <a:bodyPr wrap="square" lIns="0" rIns="0" tIns="0" bIns="0">
+            <a:spAutoFit/>
+          </a:bodyPr>
+          <a:lstStyle/>
+          <a:p>
+            <a:pPr algn="r">
+              <a:lnSpc>
+                <a:spcPct val="113000"/>
+              </a:lnSpc>
+              <a:spcBef>
+                <a:spcPts val="0"/>
+              </a:spcBef>
+              <a:spcAft>
+                <a:spcPts val="200"/>
+              </a:spcAft>
+            </a:pPr>
+            <a:r>
+              <a:rPr sz="1100" b="0">
+                <a:solidFill>
+                  <a:srgbClr val="78859A"/>
+                </a:solidFill>
+                <a:latin typeface="Arial"/>
+                <a:ea typeface="Apple SD Gothic Neo"/>
+              </a:rPr>
+              <a:t>03</a:t>
+            </a:r>
+          </a:p>
+        </p:txBody>
+      </p:sp>
+      <p:sp>
+        <p:nvSpPr>
+          <p:cNvPr id="8" name="Rounded Rectangle 7"/>
+          <p:cNvSpPr/>
+          <p:nvPr/>
+        </p:nvSpPr>
+        <p:spPr>
+          <a:xfrm>
+            <a:off x="594360" y="2587752"/>
+            <a:ext cx="2075688" cy="2916936"/>
+          </a:xfrm>
+          <a:prstGeom prst="roundRect">
+            <a:avLst>
+              <a:gd name="adj" fmla="val 12000"/>
+            </a:avLst>
+          </a:prstGeom>
+          <a:solidFill>
+            <a:srgbClr val="FFFFFF"/>
+          </a:solidFill>
+          <a:ln w="10160">
+            <a:solidFill>
+              <a:srgbClr val="DCE2EC"/>
+            </a:solidFill>
+          </a:ln>
+        </p:spPr>
+        <p:style>
+          <a:lnRef idx="1">
+            <a:schemeClr val="accent1"/>
+          </a:lnRef>
+          <a:fillRef idx="3">
+            <a:schemeClr val="accent1"/>
+          </a:fillRef>
+          <a:effectRef idx="0">
+            <a:schemeClr val="accent1"/>
+          </a:effectRef>
+          <a:fontRef idx="minor">
+            <a:schemeClr val="lt1"/>
+          </a:fontRef>
+        </p:style>
+        <p:txBody>
+          <a:bodyPr rtlCol="0" anchor="ctr"/>
+          <a:lstStyle/>
+          <a:p>
+            <a:pPr algn="ctr"/>
+          </a:p>
+        </p:txBody>
+      </p:sp>
+      <p:sp>
+        <p:nvSpPr>
+          <p:cNvPr id="9" name="TextBox 8"/>
+          <p:cNvSpPr txBox="1"/>
+          <p:nvPr/>
+        </p:nvSpPr>
+        <p:spPr>
+          <a:xfrm>
+            <a:off x="768096" y="2807208"/>
+            <a:ext cx="1709928" cy="310896"/>
+          </a:xfrm>
+          <a:prstGeom prst="rect">
+            <a:avLst/>
+          </a:prstGeom>
+          <a:noFill/>
+        </p:spPr>
+        <p:txBody>
+          <a:bodyPr wrap="square" lIns="0" rIns="0" tIns="0" bIns="0">
+            <a:spAutoFit/>
+          </a:bodyPr>
+          <a:lstStyle/>
+          <a:p>
+            <a:pPr algn="l">
+              <a:lnSpc>
+                <a:spcPct val="113000"/>
+              </a:lnSpc>
+              <a:spcBef>
+                <a:spcPts val="0"/>
+              </a:spcBef>
+              <a:spcAft>
+                <a:spcPts val="200"/>
+              </a:spcAft>
+            </a:pPr>
+            <a:r>
+              <a:rPr sz="1500" b="1">
+                <a:solidFill>
+                  <a:srgbClr val="A783D7"/>
+                </a:solidFill>
+                <a:latin typeface="Arial"/>
+                <a:ea typeface="Apple SD Gothic Neo"/>
+              </a:rPr>
+              <a:t>01</a:t>
+            </a:r>
+          </a:p>
+        </p:txBody>
+      </p:sp>
+      <p:sp>
+        <p:nvSpPr>
+          <p:cNvPr id="10" name="TextBox 9"/>
+          <p:cNvSpPr txBox="1"/>
+          <p:nvPr/>
+        </p:nvSpPr>
+        <p:spPr>
+          <a:xfrm>
+            <a:off x="768096" y="3310128"/>
+            <a:ext cx="1746504" cy="393192"/>
+          </a:xfrm>
+          <a:prstGeom prst="rect">
+            <a:avLst/>
+          </a:prstGeom>
+          <a:noFill/>
+        </p:spPr>
+        <p:txBody>
+          <a:bodyPr wrap="square" lIns="0" rIns="0" tIns="0" bIns="0">
+            <a:spAutoFit/>
+          </a:bodyPr>
+          <a:lstStyle/>
+          <a:p>
+            <a:pPr algn="l">
+              <a:lnSpc>
+                <a:spcPct val="113000"/>
+              </a:lnSpc>
+              <a:spcBef>
+                <a:spcPts val="0"/>
+              </a:spcBef>
+              <a:spcAft>
+                <a:spcPts val="400"/>
+              </a:spcAft>
+            </a:pPr>
+            <a:r>
+              <a:rPr sz="1900" b="1">
+                <a:solidFill>
+                  <a:srgbClr val="182236"/>
+                </a:solidFill>
+                <a:latin typeface="Arial"/>
+                <a:ea typeface="Apple SD Gothic Neo"/>
+              </a:rPr>
+              <a:t>IDE</a:t>
+            </a:r>
+          </a:p>
+        </p:txBody>
+      </p:sp>
+      <p:sp>
+        <p:nvSpPr>
+          <p:cNvPr id="11" name="TextBox 10"/>
+          <p:cNvSpPr txBox="1"/>
+          <p:nvPr/>
+        </p:nvSpPr>
+        <p:spPr>
+          <a:xfrm>
+            <a:off x="768096" y="3950208"/>
+            <a:ext cx="1728216" cy="932688"/>
+          </a:xfrm>
+          <a:prstGeom prst="rect">
+            <a:avLst/>
+          </a:prstGeom>
+          <a:noFill/>
+        </p:spPr>
+        <p:txBody>
+          <a:bodyPr wrap="square" lIns="0" rIns="0" tIns="0" bIns="0">
+            <a:spAutoFit/>
+          </a:bodyPr>
+          <a:lstStyle/>
+          <a:p>
+            <a:pPr algn="l">
+              <a:lnSpc>
+                <a:spcPct val="113000"/>
+              </a:lnSpc>
+              <a:spcBef>
+                <a:spcPts val="0"/>
+              </a:spcBef>
+              <a:spcAft>
+                <a:spcPts val="200"/>
+              </a:spcAft>
+            </a:pPr>
+            <a:r>
+              <a:rPr sz="1400" b="0">
+                <a:solidFill>
+                  <a:srgbClr val="78859A"/>
+                </a:solidFill>
+                <a:latin typeface="Arial"/>
+                <a:ea typeface="Apple SD Gothic Neo"/>
+              </a:rPr>
+              <a:t>작성·질문·수정</a:t>
+            </a:r>
+          </a:p>
+          <a:p>
+            <a:pPr algn="l">
+              <a:lnSpc>
+                <a:spcPct val="113000"/>
+              </a:lnSpc>
+              <a:spcBef>
+                <a:spcPts val="0"/>
+              </a:spcBef>
+              <a:spcAft>
+                <a:spcPts val="200"/>
+              </a:spcAft>
+            </a:pPr>
+            <a:r>
+              <a:rPr sz="1400" b="0">
+                <a:solidFill>
+                  <a:srgbClr val="78859A"/>
+                </a:solidFill>
+                <a:latin typeface="Arial"/>
+                <a:ea typeface="Apple SD Gothic Neo"/>
+              </a:rPr>
+              <a:t>열린 프로젝트와</a:t>
+            </a:r>
+          </a:p>
+          <a:p>
+            <a:pPr algn="l">
+              <a:lnSpc>
+                <a:spcPct val="113000"/>
+              </a:lnSpc>
+              <a:spcBef>
+                <a:spcPts val="0"/>
+              </a:spcBef>
+              <a:spcAft>
+                <a:spcPts val="200"/>
+              </a:spcAft>
+            </a:pPr>
+            <a:r>
+              <a:rPr sz="1400" b="0">
+                <a:solidFill>
+                  <a:srgbClr val="78859A"/>
+                </a:solidFill>
+                <a:latin typeface="Arial"/>
+                <a:ea typeface="Apple SD Gothic Neo"/>
+              </a:rPr>
+              <a:t>함께 작업</a:t>
+            </a:r>
+          </a:p>
+        </p:txBody>
+      </p:sp>
+      <p:sp>
+        <p:nvSpPr>
+          <p:cNvPr id="12" name="TextBox 11"/>
+          <p:cNvSpPr txBox="1"/>
+          <p:nvPr/>
+        </p:nvSpPr>
+        <p:spPr>
+          <a:xfrm>
+            <a:off x="768096" y="5056632"/>
+            <a:ext cx="1728216" cy="301752"/>
+          </a:xfrm>
+          <a:prstGeom prst="rect">
+            <a:avLst/>
+          </a:prstGeom>
+          <a:noFill/>
+        </p:spPr>
+        <p:txBody>
+          <a:bodyPr wrap="square" lIns="0" rIns="0" tIns="0" bIns="0">
+            <a:spAutoFit/>
+          </a:bodyPr>
+          <a:lstStyle/>
+          <a:p>
+            <a:pPr algn="l">
+              <a:lnSpc>
+                <a:spcPct val="113000"/>
+              </a:lnSpc>
+              <a:spcBef>
+                <a:spcPts val="0"/>
+              </a:spcBef>
+              <a:spcAft>
+                <a:spcPts val="200"/>
+              </a:spcAft>
+            </a:pPr>
+            <a:r>
+              <a:rPr sz="1050" b="1">
+                <a:solidFill>
+                  <a:srgbClr val="78859A"/>
+                </a:solidFill>
+                <a:latin typeface="Arial"/>
+                <a:ea typeface="Apple SD Gothic Neo"/>
+              </a:rPr>
+              <a:t>VS Code·VS·JetBrains 등</a:t>
+            </a:r>
+          </a:p>
+        </p:txBody>
+      </p:sp>
+      <p:sp>
+        <p:nvSpPr>
+          <p:cNvPr id="13" name="Rounded Rectangle 12"/>
+          <p:cNvSpPr/>
+          <p:nvPr/>
+        </p:nvSpPr>
+        <p:spPr>
+          <a:xfrm>
+            <a:off x="2825496" y="2587752"/>
+            <a:ext cx="2075688" cy="2916936"/>
+          </a:xfrm>
+          <a:prstGeom prst="roundRect">
+            <a:avLst>
+              <a:gd name="adj" fmla="val 12000"/>
+            </a:avLst>
+          </a:prstGeom>
+          <a:solidFill>
+            <a:srgbClr val="101727"/>
+          </a:solidFill>
+          <a:ln>
+            <a:noFill/>
+          </a:ln>
+        </p:spPr>
+        <p:style>
+          <a:lnRef idx="1">
+            <a:schemeClr val="accent1"/>
+          </a:lnRef>
+          <a:fillRef idx="3">
+            <a:schemeClr val="accent1"/>
+          </a:fillRef>
+          <a:effectRef idx="0">
+            <a:schemeClr val="accent1"/>
+          </a:effectRef>
+          <a:fontRef idx="minor">
+            <a:schemeClr val="lt1"/>
+          </a:fontRef>
+        </p:style>
+        <p:txBody>
+          <a:bodyPr rtlCol="0" anchor="ctr"/>
+          <a:lstStyle/>
+          <a:p>
+            <a:pPr algn="ctr"/>
+          </a:p>
+        </p:txBody>
+      </p:sp>
+      <p:sp>
+        <p:nvSpPr>
+          <p:cNvPr id="14" name="TextBox 13"/>
+          <p:cNvSpPr txBox="1"/>
+          <p:nvPr/>
+        </p:nvSpPr>
+        <p:spPr>
+          <a:xfrm>
+            <a:off x="2999232" y="2807208"/>
+            <a:ext cx="1709928" cy="310896"/>
+          </a:xfrm>
+          <a:prstGeom prst="rect">
+            <a:avLst/>
+          </a:prstGeom>
+          <a:noFill/>
+        </p:spPr>
+        <p:txBody>
+          <a:bodyPr wrap="square" lIns="0" rIns="0" tIns="0" bIns="0">
+            <a:spAutoFit/>
+          </a:bodyPr>
+          <a:lstStyle/>
+          <a:p>
+            <a:pPr algn="l">
+              <a:lnSpc>
+                <a:spcPct val="113000"/>
+              </a:lnSpc>
+              <a:spcBef>
+                <a:spcPts val="0"/>
+              </a:spcBef>
+              <a:spcAft>
+                <a:spcPts val="200"/>
+              </a:spcAft>
+            </a:pPr>
+            <a:r>
+              <a:rPr sz="1500" b="1">
+                <a:solidFill>
+                  <a:srgbClr val="64D5AF"/>
+                </a:solidFill>
+                <a:latin typeface="Arial"/>
+                <a:ea typeface="Apple SD Gothic Neo"/>
+              </a:rPr>
+              <a:t>02</a:t>
+            </a:r>
+          </a:p>
+        </p:txBody>
+      </p:sp>
+      <p:sp>
+        <p:nvSpPr>
+          <p:cNvPr id="15" name="TextBox 14"/>
+          <p:cNvSpPr txBox="1"/>
+          <p:nvPr/>
+        </p:nvSpPr>
+        <p:spPr>
+          <a:xfrm>
+            <a:off x="2999232" y="3310128"/>
+            <a:ext cx="1746504" cy="393192"/>
+          </a:xfrm>
+          <a:prstGeom prst="rect">
+            <a:avLst/>
+          </a:prstGeom>
+          <a:noFill/>
+        </p:spPr>
+        <p:txBody>
+          <a:bodyPr wrap="square" lIns="0" rIns="0" tIns="0" bIns="0">
+            <a:spAutoFit/>
+          </a:bodyPr>
+          <a:lstStyle/>
+          <a:p>
+            <a:pPr algn="l">
+              <a:lnSpc>
+                <a:spcPct val="113000"/>
+              </a:lnSpc>
+              <a:spcBef>
+                <a:spcPts val="0"/>
+              </a:spcBef>
+              <a:spcAft>
+                <a:spcPts val="400"/>
+              </a:spcAft>
+            </a:pPr>
+            <a:r>
+              <a:rPr sz="1900" b="1">
+                <a:solidFill>
+                  <a:srgbClr val="FFFFFF"/>
+                </a:solidFill>
+                <a:latin typeface="Arial"/>
+                <a:ea typeface="Apple SD Gothic Neo"/>
+              </a:rPr>
+              <a:t>CLI</a:t>
+            </a:r>
+          </a:p>
+        </p:txBody>
+      </p:sp>
+      <p:sp>
+        <p:nvSpPr>
+          <p:cNvPr id="16" name="TextBox 15"/>
+          <p:cNvSpPr txBox="1"/>
+          <p:nvPr/>
+        </p:nvSpPr>
+        <p:spPr>
+          <a:xfrm>
+            <a:off x="2999232" y="3950208"/>
+            <a:ext cx="1728216" cy="932688"/>
+          </a:xfrm>
+          <a:prstGeom prst="rect">
+            <a:avLst/>
+          </a:prstGeom>
+          <a:noFill/>
+        </p:spPr>
+        <p:txBody>
+          <a:bodyPr wrap="square" lIns="0" rIns="0" tIns="0" bIns="0">
+            <a:spAutoFit/>
+          </a:bodyPr>
+          <a:lstStyle/>
+          <a:p>
+            <a:pPr algn="l">
+              <a:lnSpc>
+                <a:spcPct val="113000"/>
+              </a:lnSpc>
+              <a:spcBef>
+                <a:spcPts val="0"/>
+              </a:spcBef>
+              <a:spcAft>
+                <a:spcPts val="200"/>
+              </a:spcAft>
+            </a:pPr>
+            <a:r>
+              <a:rPr sz="1400" b="0">
+                <a:solidFill>
+                  <a:srgbClr val="B1BED3"/>
+                </a:solidFill>
+                <a:latin typeface="Arial"/>
+                <a:ea typeface="Apple SD Gothic Neo"/>
+              </a:rPr>
+              <a:t>터미널에서</a:t>
+            </a:r>
+          </a:p>
+          <a:p>
+            <a:pPr algn="l">
+              <a:lnSpc>
+                <a:spcPct val="113000"/>
+              </a:lnSpc>
+              <a:spcBef>
+                <a:spcPts val="0"/>
+              </a:spcBef>
+              <a:spcAft>
+                <a:spcPts val="200"/>
+              </a:spcAft>
+            </a:pPr>
+            <a:r>
+              <a:rPr sz="1400" b="0">
+                <a:solidFill>
+                  <a:srgbClr val="B1BED3"/>
+                </a:solidFill>
+                <a:latin typeface="Arial"/>
+                <a:ea typeface="Apple SD Gothic Neo"/>
+              </a:rPr>
+              <a:t>계획·코드 수정</a:t>
+            </a:r>
+          </a:p>
+          <a:p>
+            <a:pPr algn="l">
+              <a:lnSpc>
+                <a:spcPct val="113000"/>
+              </a:lnSpc>
+              <a:spcBef>
+                <a:spcPts val="0"/>
+              </a:spcBef>
+              <a:spcAft>
+                <a:spcPts val="200"/>
+              </a:spcAft>
+            </a:pPr>
+            <a:r>
+              <a:rPr sz="1400" b="0">
+                <a:solidFill>
+                  <a:srgbClr val="B1BED3"/>
+                </a:solidFill>
+                <a:latin typeface="Arial"/>
+                <a:ea typeface="Apple SD Gothic Neo"/>
+              </a:rPr>
+              <a:t>도구 실행</a:t>
+            </a:r>
+          </a:p>
+        </p:txBody>
+      </p:sp>
+      <p:sp>
+        <p:nvSpPr>
+          <p:cNvPr id="17" name="TextBox 16"/>
+          <p:cNvSpPr txBox="1"/>
+          <p:nvPr/>
+        </p:nvSpPr>
+        <p:spPr>
+          <a:xfrm>
+            <a:off x="2999232" y="5056632"/>
+            <a:ext cx="1728216" cy="301752"/>
+          </a:xfrm>
+          <a:prstGeom prst="rect">
+            <a:avLst/>
+          </a:prstGeom>
+          <a:noFill/>
+        </p:spPr>
+        <p:txBody>
+          <a:bodyPr wrap="square" lIns="0" rIns="0" tIns="0" bIns="0">
+            <a:spAutoFit/>
+          </a:bodyPr>
+          <a:lstStyle/>
+          <a:p>
+            <a:pPr algn="l">
+              <a:lnSpc>
+                <a:spcPct val="113000"/>
+              </a:lnSpc>
+              <a:spcBef>
+                <a:spcPts val="0"/>
+              </a:spcBef>
+              <a:spcAft>
+                <a:spcPts val="200"/>
+              </a:spcAft>
+            </a:pPr>
+            <a:r>
+              <a:rPr sz="1050" b="1">
+                <a:solidFill>
+                  <a:srgbClr val="64D5AF"/>
+                </a:solidFill>
+                <a:latin typeface="Arial"/>
+                <a:ea typeface="Apple SD Gothic Neo"/>
+              </a:rPr>
+              <a:t>이번 데모의 접점</a:t>
+            </a:r>
+          </a:p>
+        </p:txBody>
+      </p:sp>
+      <p:sp>
+        <p:nvSpPr>
+          <p:cNvPr id="18" name="Rounded Rectangle 17"/>
+          <p:cNvSpPr/>
+          <p:nvPr/>
+        </p:nvSpPr>
+        <p:spPr>
+          <a:xfrm>
+            <a:off x="5056632" y="2587752"/>
+            <a:ext cx="2075688" cy="2916936"/>
+          </a:xfrm>
+          <a:prstGeom prst="roundRect">
+            <a:avLst>
+              <a:gd name="adj" fmla="val 12000"/>
+            </a:avLst>
+          </a:prstGeom>
+          <a:solidFill>
+            <a:srgbClr val="FFFFFF"/>
+          </a:solidFill>
+          <a:ln w="10160">
+            <a:solidFill>
+              <a:srgbClr val="DCE2EC"/>
+            </a:solidFill>
+          </a:ln>
+        </p:spPr>
+        <p:style>
+          <a:lnRef idx="1">
+            <a:schemeClr val="accent1"/>
+          </a:lnRef>
+          <a:fillRef idx="3">
+            <a:schemeClr val="accent1"/>
+          </a:fillRef>
+          <a:effectRef idx="0">
+            <a:schemeClr val="accent1"/>
+          </a:effectRef>
+          <a:fontRef idx="minor">
+            <a:schemeClr val="lt1"/>
+          </a:fontRef>
+        </p:style>
+        <p:txBody>
+          <a:bodyPr rtlCol="0" anchor="ctr"/>
+          <a:lstStyle/>
+          <a:p>
+            <a:pPr algn="ctr"/>
+          </a:p>
+        </p:txBody>
+      </p:sp>
+      <p:sp>
+        <p:nvSpPr>
+          <p:cNvPr id="19" name="TextBox 18"/>
+          <p:cNvSpPr txBox="1"/>
+          <p:nvPr/>
+        </p:nvSpPr>
+        <p:spPr>
+          <a:xfrm>
+            <a:off x="5230368" y="2807208"/>
+            <a:ext cx="1709928" cy="310896"/>
+          </a:xfrm>
+          <a:prstGeom prst="rect">
+            <a:avLst/>
+          </a:prstGeom>
+          <a:noFill/>
+        </p:spPr>
+        <p:txBody>
+          <a:bodyPr wrap="square" lIns="0" rIns="0" tIns="0" bIns="0">
+            <a:spAutoFit/>
+          </a:bodyPr>
+          <a:lstStyle/>
+          <a:p>
+            <a:pPr algn="l">
+              <a:lnSpc>
+                <a:spcPct val="113000"/>
+              </a:lnSpc>
+              <a:spcBef>
+                <a:spcPts val="0"/>
+              </a:spcBef>
+              <a:spcAft>
+                <a:spcPts val="200"/>
+              </a:spcAft>
+            </a:pPr>
+            <a:r>
+              <a:rPr sz="1500" b="1">
+                <a:solidFill>
+                  <a:srgbClr val="A783D7"/>
+                </a:solidFill>
+                <a:latin typeface="Arial"/>
+                <a:ea typeface="Apple SD Gothic Neo"/>
+              </a:rPr>
+              <a:t>03</a:t>
+            </a:r>
+          </a:p>
+        </p:txBody>
+      </p:sp>
+      <p:sp>
+        <p:nvSpPr>
+          <p:cNvPr id="20" name="TextBox 19"/>
+          <p:cNvSpPr txBox="1"/>
+          <p:nvPr/>
+        </p:nvSpPr>
+        <p:spPr>
+          <a:xfrm>
+            <a:off x="5230368" y="3310128"/>
+            <a:ext cx="1746504" cy="393192"/>
+          </a:xfrm>
+          <a:prstGeom prst="rect">
+            <a:avLst/>
+          </a:prstGeom>
+          <a:noFill/>
+        </p:spPr>
+        <p:txBody>
+          <a:bodyPr wrap="square" lIns="0" rIns="0" tIns="0" bIns="0">
+            <a:spAutoFit/>
+          </a:bodyPr>
+          <a:lstStyle/>
+          <a:p>
+            <a:pPr algn="l">
+              <a:lnSpc>
+                <a:spcPct val="113000"/>
+              </a:lnSpc>
+              <a:spcBef>
+                <a:spcPts val="0"/>
+              </a:spcBef>
+              <a:spcAft>
+                <a:spcPts val="400"/>
+              </a:spcAft>
+            </a:pPr>
+            <a:r>
+              <a:rPr sz="1900" b="1">
+                <a:solidFill>
+                  <a:srgbClr val="182236"/>
+                </a:solidFill>
+                <a:latin typeface="Arial"/>
+                <a:ea typeface="Apple SD Gothic Neo"/>
+              </a:rPr>
+              <a:t>GitHub.com</a:t>
+            </a:r>
+          </a:p>
+        </p:txBody>
+      </p:sp>
+      <p:sp>
+        <p:nvSpPr>
+          <p:cNvPr id="21" name="TextBox 20"/>
+          <p:cNvSpPr txBox="1"/>
+          <p:nvPr/>
+        </p:nvSpPr>
+        <p:spPr>
+          <a:xfrm>
+            <a:off x="5230368" y="3950208"/>
+            <a:ext cx="1728216" cy="932688"/>
+          </a:xfrm>
+          <a:prstGeom prst="rect">
+            <a:avLst/>
+          </a:prstGeom>
+          <a:noFill/>
+        </p:spPr>
+        <p:txBody>
+          <a:bodyPr wrap="square" lIns="0" rIns="0" tIns="0" bIns="0">
+            <a:spAutoFit/>
+          </a:bodyPr>
+          <a:lstStyle/>
+          <a:p>
+            <a:pPr algn="l">
+              <a:lnSpc>
+                <a:spcPct val="113000"/>
+              </a:lnSpc>
+              <a:spcBef>
+                <a:spcPts val="0"/>
+              </a:spcBef>
+              <a:spcAft>
+                <a:spcPts val="200"/>
+              </a:spcAft>
+            </a:pPr>
+            <a:r>
+              <a:rPr sz="1400" b="0">
+                <a:solidFill>
+                  <a:srgbClr val="78859A"/>
+                </a:solidFill>
+                <a:latin typeface="Arial"/>
+                <a:ea typeface="Apple SD Gothic Neo"/>
+              </a:rPr>
+              <a:t>저장소·이슈·PR에서</a:t>
+            </a:r>
+          </a:p>
+          <a:p>
+            <a:pPr algn="l">
+              <a:lnSpc>
+                <a:spcPct val="113000"/>
+              </a:lnSpc>
+              <a:spcBef>
+                <a:spcPts val="0"/>
+              </a:spcBef>
+              <a:spcAft>
+                <a:spcPts val="200"/>
+              </a:spcAft>
+            </a:pPr>
+            <a:r>
+              <a:rPr sz="1400" b="0">
+                <a:solidFill>
+                  <a:srgbClr val="78859A"/>
+                </a:solidFill>
+                <a:latin typeface="Arial"/>
+                <a:ea typeface="Apple SD Gothic Neo"/>
+              </a:rPr>
+              <a:t>질문·작업 위임</a:t>
+            </a:r>
+          </a:p>
+          <a:p>
+            <a:pPr algn="l">
+              <a:lnSpc>
+                <a:spcPct val="113000"/>
+              </a:lnSpc>
+              <a:spcBef>
+                <a:spcPts val="0"/>
+              </a:spcBef>
+              <a:spcAft>
+                <a:spcPts val="200"/>
+              </a:spcAft>
+            </a:pPr>
+            <a:r>
+              <a:rPr sz="1400" b="0">
+                <a:solidFill>
+                  <a:srgbClr val="78859A"/>
+                </a:solidFill>
+                <a:latin typeface="Arial"/>
+                <a:ea typeface="Apple SD Gothic Neo"/>
+              </a:rPr>
+              <a:t>변경 검토</a:t>
+            </a:r>
+          </a:p>
+        </p:txBody>
+      </p:sp>
+      <p:sp>
+        <p:nvSpPr>
+          <p:cNvPr id="22" name="TextBox 21"/>
+          <p:cNvSpPr txBox="1"/>
+          <p:nvPr/>
+        </p:nvSpPr>
+        <p:spPr>
+          <a:xfrm>
+            <a:off x="5230368" y="5056632"/>
+            <a:ext cx="1728216" cy="301752"/>
+          </a:xfrm>
+          <a:prstGeom prst="rect">
+            <a:avLst/>
+          </a:prstGeom>
+          <a:noFill/>
+        </p:spPr>
+        <p:txBody>
+          <a:bodyPr wrap="square" lIns="0" rIns="0" tIns="0" bIns="0">
+            <a:spAutoFit/>
+          </a:bodyPr>
+          <a:lstStyle/>
+          <a:p>
+            <a:pPr algn="l">
+              <a:lnSpc>
+                <a:spcPct val="113000"/>
+              </a:lnSpc>
+              <a:spcBef>
+                <a:spcPts val="0"/>
+              </a:spcBef>
+              <a:spcAft>
+                <a:spcPts val="200"/>
+              </a:spcAft>
+            </a:pPr>
+            <a:r>
+              <a:rPr sz="1050" b="1">
+                <a:solidFill>
+                  <a:srgbClr val="78859A"/>
+                </a:solidFill>
+                <a:latin typeface="Arial"/>
+                <a:ea typeface="Apple SD Gothic Neo"/>
+              </a:rPr>
+              <a:t>웹 기반 협업</a:t>
+            </a:r>
+          </a:p>
+        </p:txBody>
+      </p:sp>
+      <p:sp>
+        <p:nvSpPr>
+          <p:cNvPr id="23" name="Rounded Rectangle 22"/>
+          <p:cNvSpPr/>
+          <p:nvPr/>
+        </p:nvSpPr>
+        <p:spPr>
+          <a:xfrm>
+            <a:off x="7287768" y="2587752"/>
+            <a:ext cx="2075688" cy="2916936"/>
+          </a:xfrm>
+          <a:prstGeom prst="roundRect">
+            <a:avLst>
+              <a:gd name="adj" fmla="val 12000"/>
+            </a:avLst>
+          </a:prstGeom>
+          <a:solidFill>
+            <a:srgbClr val="FFFFFF"/>
+          </a:solidFill>
+          <a:ln w="10160">
+            <a:solidFill>
+              <a:srgbClr val="DCE2EC"/>
+            </a:solidFill>
+          </a:ln>
+        </p:spPr>
+        <p:style>
+          <a:lnRef idx="1">
+            <a:schemeClr val="accent1"/>
+          </a:lnRef>
+          <a:fillRef idx="3">
+            <a:schemeClr val="accent1"/>
+          </a:fillRef>
+          <a:effectRef idx="0">
+            <a:schemeClr val="accent1"/>
+          </a:effectRef>
+          <a:fontRef idx="minor">
+            <a:schemeClr val="lt1"/>
+          </a:fontRef>
+        </p:style>
+        <p:txBody>
+          <a:bodyPr rtlCol="0" anchor="ctr"/>
+          <a:lstStyle/>
+          <a:p>
+            <a:pPr algn="ctr"/>
+          </a:p>
+        </p:txBody>
+      </p:sp>
+      <p:sp>
+        <p:nvSpPr>
+          <p:cNvPr id="24" name="TextBox 23"/>
+          <p:cNvSpPr txBox="1"/>
+          <p:nvPr/>
+        </p:nvSpPr>
+        <p:spPr>
+          <a:xfrm>
+            <a:off x="7461504" y="2807208"/>
+            <a:ext cx="1709928" cy="310896"/>
+          </a:xfrm>
+          <a:prstGeom prst="rect">
+            <a:avLst/>
+          </a:prstGeom>
+          <a:noFill/>
+        </p:spPr>
+        <p:txBody>
+          <a:bodyPr wrap="square" lIns="0" rIns="0" tIns="0" bIns="0">
+            <a:spAutoFit/>
+          </a:bodyPr>
+          <a:lstStyle/>
+          <a:p>
+            <a:pPr algn="l">
+              <a:lnSpc>
+                <a:spcPct val="113000"/>
+              </a:lnSpc>
+              <a:spcBef>
+                <a:spcPts val="0"/>
+              </a:spcBef>
+              <a:spcAft>
+                <a:spcPts val="200"/>
+              </a:spcAft>
+            </a:pPr>
+            <a:r>
+              <a:rPr sz="1500" b="1">
+                <a:solidFill>
+                  <a:srgbClr val="A783D7"/>
+                </a:solidFill>
+                <a:latin typeface="Arial"/>
+                <a:ea typeface="Apple SD Gothic Neo"/>
+              </a:rPr>
+              <a:t>04</a:t>
+            </a:r>
+          </a:p>
+        </p:txBody>
+      </p:sp>
+      <p:sp>
+        <p:nvSpPr>
+          <p:cNvPr id="25" name="TextBox 24"/>
+          <p:cNvSpPr txBox="1"/>
+          <p:nvPr/>
+        </p:nvSpPr>
+        <p:spPr>
+          <a:xfrm>
+            <a:off x="7461504" y="3310128"/>
+            <a:ext cx="1746504" cy="393192"/>
+          </a:xfrm>
+          <a:prstGeom prst="rect">
+            <a:avLst/>
+          </a:prstGeom>
+          <a:noFill/>
+        </p:spPr>
+        <p:txBody>
+          <a:bodyPr wrap="square" lIns="0" rIns="0" tIns="0" bIns="0">
+            <a:spAutoFit/>
+          </a:bodyPr>
+          <a:lstStyle/>
+          <a:p>
+            <a:pPr algn="l">
+              <a:lnSpc>
+                <a:spcPct val="113000"/>
+              </a:lnSpc>
+              <a:spcBef>
+                <a:spcPts val="0"/>
+              </a:spcBef>
+              <a:spcAft>
+                <a:spcPts val="400"/>
+              </a:spcAft>
+            </a:pPr>
+            <a:r>
+              <a:rPr sz="1900" b="1">
+                <a:solidFill>
+                  <a:srgbClr val="182236"/>
+                </a:solidFill>
+                <a:latin typeface="Arial"/>
+                <a:ea typeface="Apple SD Gothic Neo"/>
+              </a:rPr>
+              <a:t>Copilot app</a:t>
+            </a:r>
+          </a:p>
+        </p:txBody>
+      </p:sp>
+      <p:sp>
+        <p:nvSpPr>
+          <p:cNvPr id="26" name="TextBox 25"/>
+          <p:cNvSpPr txBox="1"/>
+          <p:nvPr/>
+        </p:nvSpPr>
+        <p:spPr>
+          <a:xfrm>
+            <a:off x="7461504" y="3950208"/>
+            <a:ext cx="1728216" cy="932688"/>
+          </a:xfrm>
+          <a:prstGeom prst="rect">
+            <a:avLst/>
+          </a:prstGeom>
+          <a:noFill/>
+        </p:spPr>
+        <p:txBody>
+          <a:bodyPr wrap="square" lIns="0" rIns="0" tIns="0" bIns="0">
+            <a:spAutoFit/>
+          </a:bodyPr>
+          <a:lstStyle/>
+          <a:p>
+            <a:pPr algn="l">
+              <a:lnSpc>
+                <a:spcPct val="113000"/>
+              </a:lnSpc>
+              <a:spcBef>
+                <a:spcPts val="0"/>
+              </a:spcBef>
+              <a:spcAft>
+                <a:spcPts val="200"/>
+              </a:spcAft>
+            </a:pPr>
+            <a:r>
+              <a:rPr sz="1400" b="0">
+                <a:solidFill>
+                  <a:srgbClr val="78859A"/>
+                </a:solidFill>
+                <a:latin typeface="Arial"/>
+                <a:ea typeface="Apple SD Gothic Neo"/>
+              </a:rPr>
+              <a:t>전용 데스크톱 앱</a:t>
+            </a:r>
+          </a:p>
+          <a:p>
+            <a:pPr algn="l">
+              <a:lnSpc>
+                <a:spcPct val="113000"/>
+              </a:lnSpc>
+              <a:spcBef>
+                <a:spcPts val="0"/>
+              </a:spcBef>
+              <a:spcAft>
+                <a:spcPts val="200"/>
+              </a:spcAft>
+            </a:pPr>
+            <a:r>
+              <a:rPr sz="1400" b="0">
+                <a:solidFill>
+                  <a:srgbClr val="78859A"/>
+                </a:solidFill>
+                <a:latin typeface="Arial"/>
+                <a:ea typeface="Apple SD Gothic Neo"/>
+              </a:rPr>
+              <a:t>프로젝트·에이전트</a:t>
+            </a:r>
+          </a:p>
+          <a:p>
+            <a:pPr algn="l">
+              <a:lnSpc>
+                <a:spcPct val="113000"/>
+              </a:lnSpc>
+              <a:spcBef>
+                <a:spcPts val="0"/>
+              </a:spcBef>
+              <a:spcAft>
+                <a:spcPts val="200"/>
+              </a:spcAft>
+            </a:pPr>
+            <a:r>
+              <a:rPr sz="1400" b="0">
+                <a:solidFill>
+                  <a:srgbClr val="78859A"/>
+                </a:solidFill>
+                <a:latin typeface="Arial"/>
+                <a:ea typeface="Apple SD Gothic Neo"/>
+              </a:rPr>
+              <a:t>세션 관리</a:t>
+            </a:r>
+          </a:p>
+        </p:txBody>
+      </p:sp>
+      <p:sp>
+        <p:nvSpPr>
+          <p:cNvPr id="27" name="TextBox 26"/>
+          <p:cNvSpPr txBox="1"/>
+          <p:nvPr/>
+        </p:nvSpPr>
+        <p:spPr>
+          <a:xfrm>
+            <a:off x="7461504" y="5056632"/>
+            <a:ext cx="1728216" cy="301752"/>
+          </a:xfrm>
+          <a:prstGeom prst="rect">
+            <a:avLst/>
+          </a:prstGeom>
+          <a:noFill/>
+        </p:spPr>
+        <p:txBody>
+          <a:bodyPr wrap="square" lIns="0" rIns="0" tIns="0" bIns="0">
+            <a:spAutoFit/>
+          </a:bodyPr>
+          <a:lstStyle/>
+          <a:p>
+            <a:pPr algn="l">
+              <a:lnSpc>
+                <a:spcPct val="113000"/>
+              </a:lnSpc>
+              <a:spcBef>
+                <a:spcPts val="0"/>
+              </a:spcBef>
+              <a:spcAft>
+                <a:spcPts val="200"/>
+              </a:spcAft>
+            </a:pPr>
+            <a:r>
+              <a:rPr sz="1050" b="1">
+                <a:solidFill>
+                  <a:srgbClr val="78859A"/>
+                </a:solidFill>
+                <a:latin typeface="Arial"/>
+                <a:ea typeface="Apple SD Gothic Neo"/>
+              </a:rPr>
+              <a:t>에이전트 작업 공간</a:t>
+            </a:r>
+          </a:p>
+        </p:txBody>
+      </p:sp>
+      <p:sp>
+        <p:nvSpPr>
+          <p:cNvPr id="28" name="Rounded Rectangle 27"/>
+          <p:cNvSpPr/>
+          <p:nvPr/>
+        </p:nvSpPr>
+        <p:spPr>
+          <a:xfrm>
+            <a:off x="9518904" y="2587752"/>
+            <a:ext cx="2075688" cy="2916936"/>
+          </a:xfrm>
+          <a:prstGeom prst="roundRect">
+            <a:avLst>
+              <a:gd name="adj" fmla="val 12000"/>
+            </a:avLst>
+          </a:prstGeom>
+          <a:solidFill>
+            <a:srgbClr val="FFFFFF"/>
+          </a:solidFill>
+          <a:ln w="10160">
+            <a:solidFill>
+              <a:srgbClr val="DCE2EC"/>
+            </a:solidFill>
+          </a:ln>
+        </p:spPr>
+        <p:style>
+          <a:lnRef idx="1">
+            <a:schemeClr val="accent1"/>
+          </a:lnRef>
+          <a:fillRef idx="3">
+            <a:schemeClr val="accent1"/>
+          </a:fillRef>
+          <a:effectRef idx="0">
+            <a:schemeClr val="accent1"/>
+          </a:effectRef>
+          <a:fontRef idx="minor">
+            <a:schemeClr val="lt1"/>
+          </a:fontRef>
+        </p:style>
+        <p:txBody>
+          <a:bodyPr rtlCol="0" anchor="ctr"/>
+          <a:lstStyle/>
+          <a:p>
+            <a:pPr algn="ctr"/>
+          </a:p>
+        </p:txBody>
+      </p:sp>
+      <p:sp>
+        <p:nvSpPr>
+          <p:cNvPr id="29" name="TextBox 28"/>
+          <p:cNvSpPr txBox="1"/>
+          <p:nvPr/>
+        </p:nvSpPr>
+        <p:spPr>
+          <a:xfrm>
+            <a:off x="9692640" y="2807208"/>
+            <a:ext cx="1709928" cy="310896"/>
+          </a:xfrm>
+          <a:prstGeom prst="rect">
+            <a:avLst/>
+          </a:prstGeom>
+          <a:noFill/>
+        </p:spPr>
+        <p:txBody>
+          <a:bodyPr wrap="square" lIns="0" rIns="0" tIns="0" bIns="0">
+            <a:spAutoFit/>
+          </a:bodyPr>
+          <a:lstStyle/>
+          <a:p>
+            <a:pPr algn="l">
+              <a:lnSpc>
+                <a:spcPct val="113000"/>
+              </a:lnSpc>
+              <a:spcBef>
+                <a:spcPts val="0"/>
+              </a:spcBef>
+              <a:spcAft>
+                <a:spcPts val="200"/>
+              </a:spcAft>
+            </a:pPr>
+            <a:r>
+              <a:rPr sz="1500" b="1">
+                <a:solidFill>
+                  <a:srgbClr val="A783D7"/>
+                </a:solidFill>
+                <a:latin typeface="Arial"/>
+                <a:ea typeface="Apple SD Gothic Neo"/>
+              </a:rPr>
+              <a:t>05</a:t>
+            </a:r>
+          </a:p>
+        </p:txBody>
+      </p:sp>
+      <p:sp>
+        <p:nvSpPr>
+          <p:cNvPr id="30" name="TextBox 29"/>
+          <p:cNvSpPr txBox="1"/>
+          <p:nvPr/>
+        </p:nvSpPr>
+        <p:spPr>
+          <a:xfrm>
+            <a:off x="9692640" y="3310128"/>
+            <a:ext cx="1746504" cy="393192"/>
+          </a:xfrm>
+          <a:prstGeom prst="rect">
+            <a:avLst/>
+          </a:prstGeom>
+          <a:noFill/>
+        </p:spPr>
+        <p:txBody>
+          <a:bodyPr wrap="square" lIns="0" rIns="0" tIns="0" bIns="0">
+            <a:spAutoFit/>
+          </a:bodyPr>
+          <a:lstStyle/>
+          <a:p>
+            <a:pPr algn="l">
+              <a:lnSpc>
+                <a:spcPct val="113000"/>
+              </a:lnSpc>
+              <a:spcBef>
+                <a:spcPts val="0"/>
+              </a:spcBef>
+              <a:spcAft>
+                <a:spcPts val="400"/>
+              </a:spcAft>
+            </a:pPr>
+            <a:r>
+              <a:rPr sz="1900" b="1">
+                <a:solidFill>
+                  <a:srgbClr val="182236"/>
+                </a:solidFill>
+                <a:latin typeface="Arial"/>
+                <a:ea typeface="Apple SD Gothic Neo"/>
+              </a:rPr>
+              <a:t>GitHub Mobile</a:t>
+            </a:r>
+          </a:p>
+        </p:txBody>
+      </p:sp>
+      <p:sp>
+        <p:nvSpPr>
+          <p:cNvPr id="31" name="TextBox 30"/>
+          <p:cNvSpPr txBox="1"/>
+          <p:nvPr/>
+        </p:nvSpPr>
+        <p:spPr>
+          <a:xfrm>
+            <a:off x="9692640" y="3950208"/>
+            <a:ext cx="1728216" cy="932688"/>
+          </a:xfrm>
+          <a:prstGeom prst="rect">
+            <a:avLst/>
+          </a:prstGeom>
+          <a:noFill/>
+        </p:spPr>
+        <p:txBody>
+          <a:bodyPr wrap="square" lIns="0" rIns="0" tIns="0" bIns="0">
+            <a:spAutoFit/>
+          </a:bodyPr>
+          <a:lstStyle/>
+          <a:p>
+            <a:pPr algn="l">
+              <a:lnSpc>
+                <a:spcPct val="113000"/>
+              </a:lnSpc>
+              <a:spcBef>
+                <a:spcPts val="0"/>
+              </a:spcBef>
+              <a:spcAft>
+                <a:spcPts val="200"/>
+              </a:spcAft>
+            </a:pPr>
+            <a:r>
+              <a:rPr sz="1400" b="0">
+                <a:solidFill>
+                  <a:srgbClr val="78859A"/>
+                </a:solidFill>
+                <a:latin typeface="Arial"/>
+                <a:ea typeface="Apple SD Gothic Neo"/>
+              </a:rPr>
+              <a:t>이동 중 저장소 탐색</a:t>
+            </a:r>
+          </a:p>
+          <a:p>
+            <a:pPr algn="l">
+              <a:lnSpc>
+                <a:spcPct val="113000"/>
+              </a:lnSpc>
+              <a:spcBef>
+                <a:spcPts val="0"/>
+              </a:spcBef>
+              <a:spcAft>
+                <a:spcPts val="200"/>
+              </a:spcAft>
+            </a:pPr>
+            <a:r>
+              <a:rPr sz="1400" b="0">
+                <a:solidFill>
+                  <a:srgbClr val="78859A"/>
+                </a:solidFill>
+                <a:latin typeface="Arial"/>
+                <a:ea typeface="Apple SD Gothic Neo"/>
+              </a:rPr>
+              <a:t>코드·PR 질문</a:t>
+            </a:r>
+          </a:p>
+          <a:p>
+            <a:pPr algn="l">
+              <a:lnSpc>
+                <a:spcPct val="113000"/>
+              </a:lnSpc>
+              <a:spcBef>
+                <a:spcPts val="0"/>
+              </a:spcBef>
+              <a:spcAft>
+                <a:spcPts val="200"/>
+              </a:spcAft>
+            </a:pPr>
+            <a:r>
+              <a:rPr sz="1400" b="0">
+                <a:solidFill>
+                  <a:srgbClr val="78859A"/>
+                </a:solidFill>
+                <a:latin typeface="Arial"/>
+                <a:ea typeface="Apple SD Gothic Neo"/>
+              </a:rPr>
+              <a:t>검토 지원</a:t>
+            </a:r>
+          </a:p>
+        </p:txBody>
+      </p:sp>
+      <p:sp>
+        <p:nvSpPr>
+          <p:cNvPr id="32" name="TextBox 31"/>
+          <p:cNvSpPr txBox="1"/>
+          <p:nvPr/>
+        </p:nvSpPr>
+        <p:spPr>
+          <a:xfrm>
+            <a:off x="9692640" y="5056632"/>
+            <a:ext cx="1728216" cy="301752"/>
+          </a:xfrm>
+          <a:prstGeom prst="rect">
+            <a:avLst/>
+          </a:prstGeom>
+          <a:noFill/>
+        </p:spPr>
+        <p:txBody>
+          <a:bodyPr wrap="square" lIns="0" rIns="0" tIns="0" bIns="0">
+            <a:spAutoFit/>
+          </a:bodyPr>
+          <a:lstStyle/>
+          <a:p>
+            <a:pPr algn="l">
+              <a:lnSpc>
+                <a:spcPct val="113000"/>
+              </a:lnSpc>
+              <a:spcBef>
+                <a:spcPts val="0"/>
+              </a:spcBef>
+              <a:spcAft>
+                <a:spcPts val="200"/>
+              </a:spcAft>
+            </a:pPr>
+            <a:r>
+              <a:rPr sz="1050" b="1">
+                <a:solidFill>
+                  <a:srgbClr val="78859A"/>
+                </a:solidFill>
+                <a:latin typeface="Arial"/>
+                <a:ea typeface="Apple SD Gothic Neo"/>
+              </a:rPr>
+              <a:t>모바일 접점</a:t>
+            </a:r>
+          </a:p>
+        </p:txBody>
+      </p:sp>
+      <p:sp>
+        <p:nvSpPr>
+          <p:cNvPr id="33" name="TextBox 32"/>
+          <p:cNvSpPr txBox="1"/>
+          <p:nvPr/>
+        </p:nvSpPr>
+        <p:spPr>
+          <a:xfrm>
+            <a:off x="612648" y="5870448"/>
+            <a:ext cx="10972800" cy="347472"/>
+          </a:xfrm>
+          <a:prstGeom prst="rect">
+            <a:avLst/>
+          </a:prstGeom>
+          <a:noFill/>
+        </p:spPr>
+        <p:txBody>
+          <a:bodyPr wrap="square" lIns="0" rIns="0" tIns="0" bIns="0">
+            <a:spAutoFit/>
+          </a:bodyPr>
+          <a:lstStyle/>
+          <a:p>
+            <a:pPr algn="l">
+              <a:lnSpc>
+                <a:spcPct val="113000"/>
+              </a:lnSpc>
+              <a:spcBef>
+                <a:spcPts val="0"/>
+              </a:spcBef>
+              <a:spcAft>
+                <a:spcPts val="200"/>
+              </a:spcAft>
+            </a:pPr>
+            <a:r>
+              <a:rPr sz="1400" b="1">
+                <a:solidFill>
+                  <a:srgbClr val="182236"/>
+                </a:solidFill>
+                <a:latin typeface="Arial"/>
+                <a:ea typeface="Apple SD Gothic Neo"/>
+              </a:rPr>
+              <a:t>CLI는 여러 접점 중 하나입니다. 지원 기능은 클라이언트·버전·플랜·조직 정책에 따라 다릅니다.</a:t>
+            </a:r>
+          </a:p>
+        </p:txBody>
+      </p:sp>
+    </p:spTree>
+  </p:cSld>
+  <p:clrMapOvr>
+    <a:masterClrMapping/>
+  </p:clrMapOvr>
+</p:sld>
+</file>
+
+<file path=ppt/slides/slide21.xml><?xml version="1.0" encoding="utf-8"?>
+<p:sld xmlns:a="http://schemas.openxmlformats.org/drawingml/2006/main" xmlns:p="http://schemas.openxmlformats.org/presentationml/2006/main" xmlns:r="http://schemas.openxmlformats.org/officeDocument/2006/relationships">
+  <p:cSld>
+    <p:bg>
+      <p:bgPr>
+        <a:solidFill>
+          <a:srgbClr val="F7F8FC"/>
+        </a:solidFill>
+        <a:effectLst/>
+      </p:bgPr>
+    </p:bg>
+    <p:spTree>
+      <p:nvGrpSpPr>
+        <p:cNvPr id="1" name=""/>
+        <p:cNvGrpSpPr/>
+        <p:nvPr/>
+      </p:nvGrpSpPr>
+      <p:grpSpPr/>
+      <p:sp>
+        <p:nvSpPr>
+          <p:cNvPr id="2" name="TextBox 1"/>
+          <p:cNvSpPr txBox="1"/>
+          <p:nvPr/>
+        </p:nvSpPr>
+        <p:spPr>
+          <a:xfrm>
+            <a:off x="539496" y="310896"/>
+            <a:ext cx="10972800" cy="237744"/>
+          </a:xfrm>
+          <a:prstGeom prst="rect">
+            <a:avLst/>
+          </a:prstGeom>
+          <a:noFill/>
+        </p:spPr>
+        <p:txBody>
+          <a:bodyPr wrap="square" lIns="0" rIns="0" tIns="0" bIns="0">
+            <a:spAutoFit/>
+          </a:bodyPr>
+          <a:lstStyle/>
+          <a:p>
+            <a:pPr algn="l">
+              <a:lnSpc>
+                <a:spcPct val="113000"/>
+              </a:lnSpc>
+              <a:spcBef>
+                <a:spcPts val="0"/>
+              </a:spcBef>
+              <a:spcAft>
+                <a:spcPts val="200"/>
+              </a:spcAft>
+            </a:pPr>
+            <a:r>
+              <a:rPr sz="1000" b="1">
+                <a:solidFill>
+                  <a:srgbClr val="A783D7"/>
+                </a:solidFill>
+                <a:latin typeface="Arial"/>
+                <a:ea typeface="Apple SD Gothic Neo"/>
+              </a:rPr>
+              <a:t>INTRO 03 / MODES: HOW YOU WORK</a:t>
+            </a:r>
+          </a:p>
+        </p:txBody>
+      </p:sp>
+      <p:sp>
+        <p:nvSpPr>
+          <p:cNvPr id="3" name="TextBox 2"/>
+          <p:cNvSpPr txBox="1"/>
+          <p:nvPr/>
+        </p:nvSpPr>
+        <p:spPr>
+          <a:xfrm>
+            <a:off x="539496" y="832104"/>
+            <a:ext cx="11064240" cy="1124712"/>
+          </a:xfrm>
+          <a:prstGeom prst="rect">
+            <a:avLst/>
+          </a:prstGeom>
+          <a:noFill/>
+        </p:spPr>
+        <p:txBody>
+          <a:bodyPr wrap="square" lIns="0" rIns="0" tIns="0" bIns="0">
+            <a:spAutoFit/>
+          </a:bodyPr>
+          <a:lstStyle/>
+          <a:p>
+            <a:pPr algn="l">
+              <a:lnSpc>
+                <a:spcPct val="109000"/>
+              </a:lnSpc>
+              <a:spcBef>
+                <a:spcPts val="0"/>
+              </a:spcBef>
+              <a:spcAft>
+                <a:spcPts val="400"/>
+              </a:spcAft>
+            </a:pPr>
+            <a:r>
+              <a:rPr sz="3200" b="1">
+                <a:solidFill>
+                  <a:srgbClr val="182236"/>
+                </a:solidFill>
+                <a:latin typeface="Arial"/>
+                <a:ea typeface="Apple SD Gothic Neo"/>
+              </a:rPr>
+              <a:t>작업에 맞게,</a:t>
+            </a:r>
+          </a:p>
+          <a:p>
+            <a:pPr algn="l">
+              <a:lnSpc>
+                <a:spcPct val="109000"/>
+              </a:lnSpc>
+              <a:spcBef>
+                <a:spcPts val="0"/>
+              </a:spcBef>
+              <a:spcAft>
+                <a:spcPts val="400"/>
+              </a:spcAft>
+            </a:pPr>
+            <a:r>
+              <a:rPr sz="3200" b="1">
+                <a:solidFill>
+                  <a:srgbClr val="182236"/>
+                </a:solidFill>
+                <a:latin typeface="Arial"/>
+                <a:ea typeface="Apple SD Gothic Neo"/>
+              </a:rPr>
+              <a:t>질문·계획·수정·실행을 선택합니다.</a:t>
+            </a:r>
+          </a:p>
+        </p:txBody>
+      </p:sp>
+      <p:cxnSp>
+        <p:nvCxnSpPr>
+          <p:cNvPr id="4" name="Connector 3"/>
+          <p:cNvCxnSpPr/>
+          <p:nvPr/>
+        </p:nvCxnSpPr>
+        <p:spPr>
+          <a:xfrm>
+            <a:off x="539496" y="6446520"/>
+            <a:ext cx="11100816" cy="0"/>
+          </a:xfrm>
+          <a:prstGeom prst="line">
+            <a:avLst/>
+          </a:prstGeom>
+          <a:ln w="8890">
+            <a:solidFill>
+              <a:srgbClr val="DCE2EC"/>
+            </a:solidFill>
+          </a:ln>
+        </p:spPr>
+        <p:style>
+          <a:lnRef idx="2">
+            <a:schemeClr val="accent1"/>
+          </a:lnRef>
+          <a:fillRef idx="0">
+            <a:schemeClr val="accent1"/>
+          </a:fillRef>
+          <a:effectRef idx="0">
+            <a:schemeClr val="accent1"/>
+          </a:effectRef>
+          <a:fontRef idx="minor">
+            <a:schemeClr val="tx1"/>
+          </a:fontRef>
+        </p:style>
+      </p:cxnSp>
+      <p:sp>
+        <p:nvSpPr>
+          <p:cNvPr id="5" name="TextBox 4"/>
+          <p:cNvSpPr txBox="1"/>
+          <p:nvPr/>
+        </p:nvSpPr>
+        <p:spPr>
+          <a:xfrm>
+            <a:off x="557784" y="6547104"/>
+            <a:ext cx="9875520" cy="173736"/>
+          </a:xfrm>
+          <a:prstGeom prst="rect">
+            <a:avLst/>
+          </a:prstGeom>
+          <a:noFill/>
+        </p:spPr>
+        <p:txBody>
+          <a:bodyPr wrap="square" lIns="0" rIns="0" tIns="0" bIns="0">
+            <a:spAutoFit/>
+          </a:bodyPr>
+          <a:lstStyle/>
+          <a:p>
+            <a:pPr algn="l">
+              <a:lnSpc>
+                <a:spcPct val="113000"/>
+              </a:lnSpc>
+              <a:spcBef>
+                <a:spcPts val="0"/>
+              </a:spcBef>
+              <a:spcAft>
+                <a:spcPts val="200"/>
+              </a:spcAft>
+            </a:pPr>
+            <a:r>
+              <a:rPr sz="850" b="0">
+                <a:solidFill>
+                  <a:srgbClr val="78859A"/>
+                </a:solidFill>
+                <a:latin typeface="Arial"/>
+                <a:ea typeface="Apple SD Gothic Neo"/>
+              </a:rPr>
+              <a:t>GitHub Copilot  /  CXO Briefing. Real execution. Human control.</a:t>
+            </a:r>
+          </a:p>
+        </p:txBody>
+      </p:sp>
+      <p:sp>
+        <p:nvSpPr>
+          <p:cNvPr id="6" name="TextBox 5"/>
+          <p:cNvSpPr txBox="1"/>
+          <p:nvPr/>
+        </p:nvSpPr>
+        <p:spPr>
+          <a:xfrm>
+            <a:off x="11045952" y="6510528"/>
+            <a:ext cx="576072" cy="237744"/>
+          </a:xfrm>
+          <a:prstGeom prst="rect">
+            <a:avLst/>
+          </a:prstGeom>
+          <a:noFill/>
+        </p:spPr>
+        <p:txBody>
+          <a:bodyPr wrap="square" lIns="0" rIns="0" tIns="0" bIns="0">
+            <a:spAutoFit/>
+          </a:bodyPr>
+          <a:lstStyle/>
+          <a:p>
+            <a:pPr algn="r">
+              <a:lnSpc>
+                <a:spcPct val="113000"/>
+              </a:lnSpc>
+              <a:spcBef>
+                <a:spcPts val="0"/>
+              </a:spcBef>
+              <a:spcAft>
+                <a:spcPts val="200"/>
+              </a:spcAft>
+            </a:pPr>
+            <a:r>
+              <a:rPr sz="1100" b="0">
+                <a:solidFill>
+                  <a:srgbClr val="78859A"/>
+                </a:solidFill>
+                <a:latin typeface="Arial"/>
+                <a:ea typeface="Apple SD Gothic Neo"/>
+              </a:rPr>
+              <a:t>04</a:t>
+            </a:r>
+          </a:p>
+        </p:txBody>
+      </p:sp>
+      <p:sp>
+        <p:nvSpPr>
+          <p:cNvPr id="7" name="Rounded Rectangle 6"/>
+          <p:cNvSpPr/>
+          <p:nvPr/>
+        </p:nvSpPr>
+        <p:spPr>
+          <a:xfrm>
+            <a:off x="594360" y="2468880"/>
+            <a:ext cx="2542032" cy="1920240"/>
+          </a:xfrm>
+          <a:prstGeom prst="roundRect">
+            <a:avLst>
+              <a:gd name="adj" fmla="val 12000"/>
+            </a:avLst>
+          </a:prstGeom>
+          <a:solidFill>
+            <a:srgbClr val="FFFFFF"/>
+          </a:solidFill>
+          <a:ln w="10160">
+            <a:solidFill>
+              <a:srgbClr val="DCE2EC"/>
+            </a:solidFill>
+          </a:ln>
+        </p:spPr>
+        <p:style>
+          <a:lnRef idx="1">
+            <a:schemeClr val="accent1"/>
+          </a:lnRef>
+          <a:fillRef idx="3">
+            <a:schemeClr val="accent1"/>
+          </a:fillRef>
+          <a:effectRef idx="0">
+            <a:schemeClr val="accent1"/>
+          </a:effectRef>
+          <a:fontRef idx="minor">
+            <a:schemeClr val="lt1"/>
+          </a:fontRef>
+        </p:style>
+        <p:txBody>
+          <a:bodyPr rtlCol="0" anchor="ctr"/>
+          <a:lstStyle/>
+          <a:p>
+            <a:pPr algn="ctr"/>
+          </a:p>
+        </p:txBody>
+      </p:sp>
+      <p:sp>
+        <p:nvSpPr>
+          <p:cNvPr id="8" name="TextBox 7"/>
+          <p:cNvSpPr txBox="1"/>
+          <p:nvPr/>
+        </p:nvSpPr>
+        <p:spPr>
+          <a:xfrm>
+            <a:off x="786384" y="2679192"/>
+            <a:ext cx="2148840" cy="393192"/>
+          </a:xfrm>
+          <a:prstGeom prst="rect">
+            <a:avLst/>
+          </a:prstGeom>
+          <a:noFill/>
+        </p:spPr>
+        <p:txBody>
+          <a:bodyPr wrap="square" lIns="0" rIns="0" tIns="0" bIns="0">
+            <a:spAutoFit/>
+          </a:bodyPr>
+          <a:lstStyle/>
+          <a:p>
+            <a:pPr algn="l">
+              <a:lnSpc>
+                <a:spcPct val="113000"/>
+              </a:lnSpc>
+              <a:spcBef>
+                <a:spcPts val="0"/>
+              </a:spcBef>
+              <a:spcAft>
+                <a:spcPts val="400"/>
+              </a:spcAft>
+            </a:pPr>
+            <a:r>
+              <a:rPr sz="2300" b="1">
+                <a:solidFill>
+                  <a:srgbClr val="A783D7"/>
+                </a:solidFill>
+                <a:latin typeface="Arial"/>
+                <a:ea typeface="Apple SD Gothic Neo"/>
+              </a:rPr>
+              <a:t>Ask</a:t>
+            </a:r>
+          </a:p>
+        </p:txBody>
+      </p:sp>
+      <p:sp>
+        <p:nvSpPr>
+          <p:cNvPr id="9" name="TextBox 8"/>
+          <p:cNvSpPr txBox="1"/>
+          <p:nvPr/>
+        </p:nvSpPr>
+        <p:spPr>
+          <a:xfrm>
+            <a:off x="786384" y="3227832"/>
+            <a:ext cx="2148840" cy="347472"/>
+          </a:xfrm>
+          <a:prstGeom prst="rect">
+            <a:avLst/>
+          </a:prstGeom>
+          <a:noFill/>
+        </p:spPr>
+        <p:txBody>
+          <a:bodyPr wrap="square" lIns="0" rIns="0" tIns="0" bIns="0">
+            <a:spAutoFit/>
+          </a:bodyPr>
+          <a:lstStyle/>
+          <a:p>
+            <a:pPr algn="l">
+              <a:lnSpc>
+                <a:spcPct val="113000"/>
+              </a:lnSpc>
+              <a:spcBef>
+                <a:spcPts val="0"/>
+              </a:spcBef>
+              <a:spcAft>
+                <a:spcPts val="400"/>
+              </a:spcAft>
+            </a:pPr>
+            <a:r>
+              <a:rPr sz="1800" b="1">
+                <a:solidFill>
+                  <a:srgbClr val="182236"/>
+                </a:solidFill>
+                <a:latin typeface="Arial"/>
+                <a:ea typeface="Apple SD Gothic Neo"/>
+              </a:rPr>
+              <a:t>질문과 이해</a:t>
+            </a:r>
+          </a:p>
+        </p:txBody>
+      </p:sp>
+      <p:sp>
+        <p:nvSpPr>
+          <p:cNvPr id="10" name="TextBox 9"/>
+          <p:cNvSpPr txBox="1"/>
+          <p:nvPr/>
+        </p:nvSpPr>
+        <p:spPr>
+          <a:xfrm>
+            <a:off x="786384" y="3730752"/>
+            <a:ext cx="2148840" cy="566928"/>
+          </a:xfrm>
+          <a:prstGeom prst="rect">
+            <a:avLst/>
+          </a:prstGeom>
+          <a:noFill/>
+        </p:spPr>
+        <p:txBody>
+          <a:bodyPr wrap="square" lIns="0" rIns="0" tIns="0" bIns="0">
+            <a:spAutoFit/>
+          </a:bodyPr>
+          <a:lstStyle/>
+          <a:p>
+            <a:pPr algn="l">
+              <a:lnSpc>
+                <a:spcPct val="113000"/>
+              </a:lnSpc>
+              <a:spcBef>
+                <a:spcPts val="0"/>
+              </a:spcBef>
+              <a:spcAft>
+                <a:spcPts val="200"/>
+              </a:spcAft>
+            </a:pPr>
+            <a:r>
+              <a:rPr sz="1400" b="0">
+                <a:solidFill>
+                  <a:srgbClr val="78859A"/>
+                </a:solidFill>
+                <a:latin typeface="Arial"/>
+                <a:ea typeface="Apple SD Gothic Neo"/>
+              </a:rPr>
+              <a:t>코드 설명·탐색</a:t>
+            </a:r>
+          </a:p>
+          <a:p>
+            <a:pPr algn="l">
+              <a:lnSpc>
+                <a:spcPct val="113000"/>
+              </a:lnSpc>
+              <a:spcBef>
+                <a:spcPts val="0"/>
+              </a:spcBef>
+              <a:spcAft>
+                <a:spcPts val="200"/>
+              </a:spcAft>
+            </a:pPr>
+            <a:r>
+              <a:rPr sz="1400" b="0">
+                <a:solidFill>
+                  <a:srgbClr val="78859A"/>
+                </a:solidFill>
+                <a:latin typeface="Arial"/>
+                <a:ea typeface="Apple SD Gothic Neo"/>
+              </a:rPr>
+              <a:t>접근 방법 상담</a:t>
+            </a:r>
+          </a:p>
+        </p:txBody>
+      </p:sp>
+      <p:sp>
+        <p:nvSpPr>
+          <p:cNvPr id="11" name="Rounded Rectangle 10"/>
+          <p:cNvSpPr/>
+          <p:nvPr/>
+        </p:nvSpPr>
+        <p:spPr>
+          <a:xfrm>
+            <a:off x="3429000" y="2468880"/>
+            <a:ext cx="2542032" cy="1920240"/>
+          </a:xfrm>
+          <a:prstGeom prst="roundRect">
+            <a:avLst>
+              <a:gd name="adj" fmla="val 12000"/>
+            </a:avLst>
+          </a:prstGeom>
+          <a:solidFill>
+            <a:srgbClr val="FFFFFF"/>
+          </a:solidFill>
+          <a:ln w="10160">
+            <a:solidFill>
+              <a:srgbClr val="DCE2EC"/>
+            </a:solidFill>
+          </a:ln>
+        </p:spPr>
+        <p:style>
+          <a:lnRef idx="1">
+            <a:schemeClr val="accent1"/>
+          </a:lnRef>
+          <a:fillRef idx="3">
+            <a:schemeClr val="accent1"/>
+          </a:fillRef>
+          <a:effectRef idx="0">
+            <a:schemeClr val="accent1"/>
+          </a:effectRef>
+          <a:fontRef idx="minor">
+            <a:schemeClr val="lt1"/>
+          </a:fontRef>
+        </p:style>
+        <p:txBody>
+          <a:bodyPr rtlCol="0" anchor="ctr"/>
+          <a:lstStyle/>
+          <a:p>
+            <a:pPr algn="ctr"/>
+          </a:p>
+        </p:txBody>
+      </p:sp>
+      <p:sp>
+        <p:nvSpPr>
+          <p:cNvPr id="12" name="TextBox 11"/>
+          <p:cNvSpPr txBox="1"/>
+          <p:nvPr/>
+        </p:nvSpPr>
+        <p:spPr>
+          <a:xfrm>
+            <a:off x="3621024" y="2679192"/>
+            <a:ext cx="2148840" cy="393192"/>
+          </a:xfrm>
+          <a:prstGeom prst="rect">
+            <a:avLst/>
+          </a:prstGeom>
+          <a:noFill/>
+        </p:spPr>
+        <p:txBody>
+          <a:bodyPr wrap="square" lIns="0" rIns="0" tIns="0" bIns="0">
+            <a:spAutoFit/>
+          </a:bodyPr>
+          <a:lstStyle/>
+          <a:p>
+            <a:pPr algn="l">
+              <a:lnSpc>
+                <a:spcPct val="113000"/>
+              </a:lnSpc>
+              <a:spcBef>
+                <a:spcPts val="0"/>
+              </a:spcBef>
+              <a:spcAft>
+                <a:spcPts val="400"/>
+              </a:spcAft>
+            </a:pPr>
+            <a:r>
+              <a:rPr sz="2300" b="1">
+                <a:solidFill>
+                  <a:srgbClr val="267F62"/>
+                </a:solidFill>
+                <a:latin typeface="Arial"/>
+                <a:ea typeface="Apple SD Gothic Neo"/>
+              </a:rPr>
+              <a:t>Plan</a:t>
+            </a:r>
+          </a:p>
+        </p:txBody>
+      </p:sp>
+      <p:sp>
+        <p:nvSpPr>
+          <p:cNvPr id="13" name="TextBox 12"/>
+          <p:cNvSpPr txBox="1"/>
+          <p:nvPr/>
+        </p:nvSpPr>
+        <p:spPr>
+          <a:xfrm>
+            <a:off x="3621024" y="3227832"/>
+            <a:ext cx="2148840" cy="347472"/>
+          </a:xfrm>
+          <a:prstGeom prst="rect">
+            <a:avLst/>
+          </a:prstGeom>
+          <a:noFill/>
+        </p:spPr>
+        <p:txBody>
+          <a:bodyPr wrap="square" lIns="0" rIns="0" tIns="0" bIns="0">
+            <a:spAutoFit/>
+          </a:bodyPr>
+          <a:lstStyle/>
+          <a:p>
+            <a:pPr algn="l">
+              <a:lnSpc>
+                <a:spcPct val="113000"/>
+              </a:lnSpc>
+              <a:spcBef>
+                <a:spcPts val="0"/>
+              </a:spcBef>
+              <a:spcAft>
+                <a:spcPts val="400"/>
+              </a:spcAft>
+            </a:pPr>
+            <a:r>
+              <a:rPr sz="1800" b="1">
+                <a:solidFill>
+                  <a:srgbClr val="182236"/>
+                </a:solidFill>
+                <a:latin typeface="Arial"/>
+                <a:ea typeface="Apple SD Gothic Neo"/>
+              </a:rPr>
+              <a:t>구현 전 계획</a:t>
+            </a:r>
+          </a:p>
+        </p:txBody>
+      </p:sp>
+      <p:sp>
+        <p:nvSpPr>
+          <p:cNvPr id="14" name="TextBox 13"/>
+          <p:cNvSpPr txBox="1"/>
+          <p:nvPr/>
+        </p:nvSpPr>
+        <p:spPr>
+          <a:xfrm>
+            <a:off x="3621024" y="3730752"/>
+            <a:ext cx="2148840" cy="566928"/>
+          </a:xfrm>
+          <a:prstGeom prst="rect">
+            <a:avLst/>
+          </a:prstGeom>
+          <a:noFill/>
+        </p:spPr>
+        <p:txBody>
+          <a:bodyPr wrap="square" lIns="0" rIns="0" tIns="0" bIns="0">
+            <a:spAutoFit/>
+          </a:bodyPr>
+          <a:lstStyle/>
+          <a:p>
+            <a:pPr algn="l">
+              <a:lnSpc>
+                <a:spcPct val="113000"/>
+              </a:lnSpc>
+              <a:spcBef>
+                <a:spcPts val="0"/>
+              </a:spcBef>
+              <a:spcAft>
+                <a:spcPts val="200"/>
+              </a:spcAft>
+            </a:pPr>
+            <a:r>
+              <a:rPr sz="1400" b="0">
+                <a:solidFill>
+                  <a:srgbClr val="78859A"/>
+                </a:solidFill>
+                <a:latin typeface="Arial"/>
+                <a:ea typeface="Apple SD Gothic Neo"/>
+              </a:rPr>
+              <a:t>요구·범위·단계 정리</a:t>
+            </a:r>
+          </a:p>
+          <a:p>
+            <a:pPr algn="l">
+              <a:lnSpc>
+                <a:spcPct val="113000"/>
+              </a:lnSpc>
+              <a:spcBef>
+                <a:spcPts val="0"/>
+              </a:spcBef>
+              <a:spcAft>
+                <a:spcPts val="200"/>
+              </a:spcAft>
+            </a:pPr>
+            <a:r>
+              <a:rPr sz="1400" b="0">
+                <a:solidFill>
+                  <a:srgbClr val="78859A"/>
+                </a:solidFill>
+                <a:latin typeface="Arial"/>
+                <a:ea typeface="Apple SD Gothic Neo"/>
+              </a:rPr>
+              <a:t>계획을 보고 구현 결정</a:t>
+            </a:r>
+          </a:p>
+        </p:txBody>
+      </p:sp>
+      <p:sp>
+        <p:nvSpPr>
+          <p:cNvPr id="15" name="Rounded Rectangle 14"/>
+          <p:cNvSpPr/>
+          <p:nvPr/>
+        </p:nvSpPr>
+        <p:spPr>
+          <a:xfrm>
+            <a:off x="6263640" y="2468880"/>
+            <a:ext cx="2542032" cy="1920240"/>
+          </a:xfrm>
+          <a:prstGeom prst="roundRect">
+            <a:avLst>
+              <a:gd name="adj" fmla="val 12000"/>
+            </a:avLst>
+          </a:prstGeom>
+          <a:solidFill>
+            <a:srgbClr val="FFFFFF"/>
+          </a:solidFill>
+          <a:ln w="10160">
+            <a:solidFill>
+              <a:srgbClr val="DCE2EC"/>
+            </a:solidFill>
+          </a:ln>
+        </p:spPr>
+        <p:style>
+          <a:lnRef idx="1">
+            <a:schemeClr val="accent1"/>
+          </a:lnRef>
+          <a:fillRef idx="3">
+            <a:schemeClr val="accent1"/>
+          </a:fillRef>
+          <a:effectRef idx="0">
+            <a:schemeClr val="accent1"/>
+          </a:effectRef>
+          <a:fontRef idx="minor">
+            <a:schemeClr val="lt1"/>
+          </a:fontRef>
+        </p:style>
+        <p:txBody>
+          <a:bodyPr rtlCol="0" anchor="ctr"/>
+          <a:lstStyle/>
+          <a:p>
+            <a:pPr algn="ctr"/>
+          </a:p>
+        </p:txBody>
+      </p:sp>
+      <p:sp>
+        <p:nvSpPr>
+          <p:cNvPr id="16" name="TextBox 15"/>
+          <p:cNvSpPr txBox="1"/>
+          <p:nvPr/>
+        </p:nvSpPr>
+        <p:spPr>
+          <a:xfrm>
+            <a:off x="6455664" y="2679192"/>
+            <a:ext cx="2148840" cy="393192"/>
+          </a:xfrm>
+          <a:prstGeom prst="rect">
+            <a:avLst/>
+          </a:prstGeom>
+          <a:noFill/>
+        </p:spPr>
+        <p:txBody>
+          <a:bodyPr wrap="square" lIns="0" rIns="0" tIns="0" bIns="0">
+            <a:spAutoFit/>
+          </a:bodyPr>
+          <a:lstStyle/>
+          <a:p>
+            <a:pPr algn="l">
+              <a:lnSpc>
+                <a:spcPct val="113000"/>
+              </a:lnSpc>
+              <a:spcBef>
+                <a:spcPts val="0"/>
+              </a:spcBef>
+              <a:spcAft>
+                <a:spcPts val="400"/>
+              </a:spcAft>
+            </a:pPr>
+            <a:r>
+              <a:rPr sz="2300" b="1">
+                <a:solidFill>
+                  <a:srgbClr val="A783D7"/>
+                </a:solidFill>
+                <a:latin typeface="Arial"/>
+                <a:ea typeface="Apple SD Gothic Neo"/>
+              </a:rPr>
+              <a:t>Agent</a:t>
+            </a:r>
+          </a:p>
+        </p:txBody>
+      </p:sp>
+      <p:sp>
+        <p:nvSpPr>
+          <p:cNvPr id="17" name="TextBox 16"/>
+          <p:cNvSpPr txBox="1"/>
+          <p:nvPr/>
+        </p:nvSpPr>
+        <p:spPr>
+          <a:xfrm>
+            <a:off x="6455664" y="3227832"/>
+            <a:ext cx="2148840" cy="347472"/>
+          </a:xfrm>
+          <a:prstGeom prst="rect">
+            <a:avLst/>
+          </a:prstGeom>
+          <a:noFill/>
+        </p:spPr>
+        <p:txBody>
+          <a:bodyPr wrap="square" lIns="0" rIns="0" tIns="0" bIns="0">
+            <a:spAutoFit/>
+          </a:bodyPr>
+          <a:lstStyle/>
+          <a:p>
+            <a:pPr algn="l">
+              <a:lnSpc>
+                <a:spcPct val="113000"/>
+              </a:lnSpc>
+              <a:spcBef>
+                <a:spcPts val="0"/>
+              </a:spcBef>
+              <a:spcAft>
+                <a:spcPts val="400"/>
+              </a:spcAft>
+            </a:pPr>
+            <a:r>
+              <a:rPr sz="1800" b="1">
+                <a:solidFill>
+                  <a:srgbClr val="182236"/>
+                </a:solidFill>
+                <a:latin typeface="Arial"/>
+                <a:ea typeface="Apple SD Gothic Neo"/>
+              </a:rPr>
+              <a:t>목표 기반 실행</a:t>
+            </a:r>
+          </a:p>
+        </p:txBody>
+      </p:sp>
+      <p:sp>
+        <p:nvSpPr>
+          <p:cNvPr id="18" name="TextBox 17"/>
+          <p:cNvSpPr txBox="1"/>
+          <p:nvPr/>
+        </p:nvSpPr>
+        <p:spPr>
+          <a:xfrm>
+            <a:off x="6455664" y="3730752"/>
+            <a:ext cx="2148840" cy="566928"/>
+          </a:xfrm>
+          <a:prstGeom prst="rect">
+            <a:avLst/>
+          </a:prstGeom>
+          <a:noFill/>
+        </p:spPr>
+        <p:txBody>
+          <a:bodyPr wrap="square" lIns="0" rIns="0" tIns="0" bIns="0">
+            <a:spAutoFit/>
+          </a:bodyPr>
+          <a:lstStyle/>
+          <a:p>
+            <a:pPr algn="l">
+              <a:lnSpc>
+                <a:spcPct val="113000"/>
+              </a:lnSpc>
+              <a:spcBef>
+                <a:spcPts val="0"/>
+              </a:spcBef>
+              <a:spcAft>
+                <a:spcPts val="200"/>
+              </a:spcAft>
+            </a:pPr>
+            <a:r>
+              <a:rPr sz="1400" b="0">
+                <a:solidFill>
+                  <a:srgbClr val="78859A"/>
+                </a:solidFill>
+                <a:latin typeface="Arial"/>
+                <a:ea typeface="Apple SD Gothic Neo"/>
+              </a:rPr>
+              <a:t>파일 수정·명령 실행</a:t>
+            </a:r>
+          </a:p>
+          <a:p>
+            <a:pPr algn="l">
+              <a:lnSpc>
+                <a:spcPct val="113000"/>
+              </a:lnSpc>
+              <a:spcBef>
+                <a:spcPts val="0"/>
+              </a:spcBef>
+              <a:spcAft>
+                <a:spcPts val="200"/>
+              </a:spcAft>
+            </a:pPr>
+            <a:r>
+              <a:rPr sz="1400" b="0">
+                <a:solidFill>
+                  <a:srgbClr val="78859A"/>
+                </a:solidFill>
+                <a:latin typeface="Arial"/>
+                <a:ea typeface="Apple SD Gothic Neo"/>
+              </a:rPr>
+              <a:t>결과를 보고 반복</a:t>
+            </a:r>
+          </a:p>
+        </p:txBody>
+      </p:sp>
+      <p:sp>
+        <p:nvSpPr>
+          <p:cNvPr id="19" name="Rounded Rectangle 18"/>
+          <p:cNvSpPr/>
+          <p:nvPr/>
+        </p:nvSpPr>
+        <p:spPr>
+          <a:xfrm>
+            <a:off x="9098280" y="2468880"/>
+            <a:ext cx="2542032" cy="1920240"/>
+          </a:xfrm>
+          <a:prstGeom prst="roundRect">
+            <a:avLst>
+              <a:gd name="adj" fmla="val 12000"/>
+            </a:avLst>
+          </a:prstGeom>
+          <a:solidFill>
+            <a:srgbClr val="FFFFFF"/>
+          </a:solidFill>
+          <a:ln w="10160">
+            <a:solidFill>
+              <a:srgbClr val="DCE2EC"/>
+            </a:solidFill>
+          </a:ln>
+        </p:spPr>
+        <p:style>
+          <a:lnRef idx="1">
+            <a:schemeClr val="accent1"/>
+          </a:lnRef>
+          <a:fillRef idx="3">
+            <a:schemeClr val="accent1"/>
+          </a:fillRef>
+          <a:effectRef idx="0">
+            <a:schemeClr val="accent1"/>
+          </a:effectRef>
+          <a:fontRef idx="minor">
+            <a:schemeClr val="lt1"/>
+          </a:fontRef>
+        </p:style>
+        <p:txBody>
+          <a:bodyPr rtlCol="0" anchor="ctr"/>
+          <a:lstStyle/>
+          <a:p>
+            <a:pPr algn="ctr"/>
+          </a:p>
+        </p:txBody>
+      </p:sp>
+      <p:sp>
+        <p:nvSpPr>
+          <p:cNvPr id="20" name="TextBox 19"/>
+          <p:cNvSpPr txBox="1"/>
+          <p:nvPr/>
+        </p:nvSpPr>
+        <p:spPr>
+          <a:xfrm>
+            <a:off x="9290304" y="2679192"/>
+            <a:ext cx="2148840" cy="393192"/>
+          </a:xfrm>
+          <a:prstGeom prst="rect">
+            <a:avLst/>
+          </a:prstGeom>
+          <a:noFill/>
+        </p:spPr>
+        <p:txBody>
+          <a:bodyPr wrap="square" lIns="0" rIns="0" tIns="0" bIns="0">
+            <a:spAutoFit/>
+          </a:bodyPr>
+          <a:lstStyle/>
+          <a:p>
+            <a:pPr algn="l">
+              <a:lnSpc>
+                <a:spcPct val="113000"/>
+              </a:lnSpc>
+              <a:spcBef>
+                <a:spcPts val="0"/>
+              </a:spcBef>
+              <a:spcAft>
+                <a:spcPts val="400"/>
+              </a:spcAft>
+            </a:pPr>
+            <a:r>
+              <a:rPr sz="2300" b="1">
+                <a:solidFill>
+                  <a:srgbClr val="78859A"/>
+                </a:solidFill>
+                <a:latin typeface="Arial"/>
+                <a:ea typeface="Apple SD Gothic Neo"/>
+              </a:rPr>
+              <a:t>Edit*</a:t>
+            </a:r>
+          </a:p>
+        </p:txBody>
+      </p:sp>
+      <p:sp>
+        <p:nvSpPr>
+          <p:cNvPr id="21" name="TextBox 20"/>
+          <p:cNvSpPr txBox="1"/>
+          <p:nvPr/>
+        </p:nvSpPr>
+        <p:spPr>
+          <a:xfrm>
+            <a:off x="9290304" y="3227832"/>
+            <a:ext cx="2148840" cy="347472"/>
+          </a:xfrm>
+          <a:prstGeom prst="rect">
+            <a:avLst/>
+          </a:prstGeom>
+          <a:noFill/>
+        </p:spPr>
+        <p:txBody>
+          <a:bodyPr wrap="square" lIns="0" rIns="0" tIns="0" bIns="0">
+            <a:spAutoFit/>
+          </a:bodyPr>
+          <a:lstStyle/>
+          <a:p>
+            <a:pPr algn="l">
+              <a:lnSpc>
+                <a:spcPct val="113000"/>
+              </a:lnSpc>
+              <a:spcBef>
+                <a:spcPts val="0"/>
+              </a:spcBef>
+              <a:spcAft>
+                <a:spcPts val="400"/>
+              </a:spcAft>
+            </a:pPr>
+            <a:r>
+              <a:rPr sz="1800" b="1">
+                <a:solidFill>
+                  <a:srgbClr val="182236"/>
+                </a:solidFill>
+                <a:latin typeface="Arial"/>
+                <a:ea typeface="Apple SD Gothic Neo"/>
+              </a:rPr>
+              <a:t>선택 범위 수정</a:t>
+            </a:r>
+          </a:p>
+        </p:txBody>
+      </p:sp>
+      <p:sp>
+        <p:nvSpPr>
+          <p:cNvPr id="22" name="TextBox 21"/>
+          <p:cNvSpPr txBox="1"/>
+          <p:nvPr/>
+        </p:nvSpPr>
+        <p:spPr>
+          <a:xfrm>
+            <a:off x="9290304" y="3730752"/>
+            <a:ext cx="2148840" cy="566928"/>
+          </a:xfrm>
+          <a:prstGeom prst="rect">
+            <a:avLst/>
+          </a:prstGeom>
+          <a:noFill/>
+        </p:spPr>
+        <p:txBody>
+          <a:bodyPr wrap="square" lIns="0" rIns="0" tIns="0" bIns="0">
+            <a:spAutoFit/>
+          </a:bodyPr>
+          <a:lstStyle/>
+          <a:p>
+            <a:pPr algn="l">
+              <a:lnSpc>
+                <a:spcPct val="113000"/>
+              </a:lnSpc>
+              <a:spcBef>
+                <a:spcPts val="0"/>
+              </a:spcBef>
+              <a:spcAft>
+                <a:spcPts val="200"/>
+              </a:spcAft>
+            </a:pPr>
+            <a:r>
+              <a:rPr sz="1400" b="0">
+                <a:solidFill>
+                  <a:srgbClr val="78859A"/>
+                </a:solidFill>
+                <a:latin typeface="Arial"/>
+                <a:ea typeface="Apple SD Gothic Neo"/>
+              </a:rPr>
+              <a:t>지정한 파일을 중심으로</a:t>
+            </a:r>
+          </a:p>
+          <a:p>
+            <a:pPr algn="l">
+              <a:lnSpc>
+                <a:spcPct val="113000"/>
+              </a:lnSpc>
+              <a:spcBef>
+                <a:spcPts val="0"/>
+              </a:spcBef>
+              <a:spcAft>
+                <a:spcPts val="200"/>
+              </a:spcAft>
+            </a:pPr>
+            <a:r>
+              <a:rPr sz="1400" b="0">
+                <a:solidFill>
+                  <a:srgbClr val="78859A"/>
+                </a:solidFill>
+                <a:latin typeface="Arial"/>
+                <a:ea typeface="Apple SD Gothic Neo"/>
+              </a:rPr>
+              <a:t>변경안을 제안·적용</a:t>
+            </a:r>
+          </a:p>
+        </p:txBody>
+      </p:sp>
+      <p:sp>
+        <p:nvSpPr>
+          <p:cNvPr id="23" name="TextBox 22"/>
+          <p:cNvSpPr txBox="1"/>
+          <p:nvPr/>
+        </p:nvSpPr>
+        <p:spPr>
+          <a:xfrm>
+            <a:off x="649224" y="4745736"/>
+            <a:ext cx="795528" cy="393192"/>
+          </a:xfrm>
+          <a:prstGeom prst="rect">
+            <a:avLst/>
+          </a:prstGeom>
+          <a:noFill/>
+        </p:spPr>
+        <p:txBody>
+          <a:bodyPr wrap="square" lIns="0" rIns="0" tIns="0" bIns="0">
+            <a:spAutoFit/>
+          </a:bodyPr>
+          <a:lstStyle/>
+          <a:p>
+            <a:pPr algn="l">
+              <a:lnSpc>
+                <a:spcPct val="113000"/>
+              </a:lnSpc>
+              <a:spcBef>
+                <a:spcPts val="0"/>
+              </a:spcBef>
+              <a:spcAft>
+                <a:spcPts val="400"/>
+              </a:spcAft>
+            </a:pPr>
+            <a:r>
+              <a:rPr sz="2200" b="1">
+                <a:solidFill>
+                  <a:srgbClr val="A783D7"/>
+                </a:solidFill>
+                <a:latin typeface="Arial"/>
+                <a:ea typeface="Apple SD Gothic Neo"/>
+              </a:rPr>
+              <a:t>CLI</a:t>
+            </a:r>
+          </a:p>
+        </p:txBody>
+      </p:sp>
+      <p:sp>
+        <p:nvSpPr>
+          <p:cNvPr id="24" name="Rounded Rectangle 23"/>
+          <p:cNvSpPr/>
+          <p:nvPr/>
+        </p:nvSpPr>
+        <p:spPr>
+          <a:xfrm>
+            <a:off x="1673352" y="4590288"/>
+            <a:ext cx="3145536" cy="877824"/>
+          </a:xfrm>
+          <a:prstGeom prst="roundRect">
+            <a:avLst>
+              <a:gd name="adj" fmla="val 12000"/>
+            </a:avLst>
+          </a:prstGeom>
+          <a:solidFill>
+            <a:srgbClr val="EEE7F7"/>
+          </a:solidFill>
+          <a:ln>
+            <a:noFill/>
+          </a:ln>
+        </p:spPr>
+        <p:style>
+          <a:lnRef idx="1">
+            <a:schemeClr val="accent1"/>
+          </a:lnRef>
+          <a:fillRef idx="3">
+            <a:schemeClr val="accent1"/>
+          </a:fillRef>
+          <a:effectRef idx="0">
+            <a:schemeClr val="accent1"/>
+          </a:effectRef>
+          <a:fontRef idx="minor">
+            <a:schemeClr val="lt1"/>
+          </a:fontRef>
+        </p:style>
+        <p:txBody>
+          <a:bodyPr rtlCol="0" anchor="ctr"/>
+          <a:lstStyle/>
+          <a:p>
+            <a:pPr algn="ctr"/>
+          </a:p>
+        </p:txBody>
+      </p:sp>
+      <p:sp>
+        <p:nvSpPr>
+          <p:cNvPr id="25" name="TextBox 24"/>
+          <p:cNvSpPr txBox="1"/>
+          <p:nvPr/>
+        </p:nvSpPr>
+        <p:spPr>
+          <a:xfrm>
+            <a:off x="1828800" y="4709160"/>
+            <a:ext cx="2816352" cy="310896"/>
+          </a:xfrm>
+          <a:prstGeom prst="rect">
+            <a:avLst/>
+          </a:prstGeom>
+          <a:noFill/>
+        </p:spPr>
+        <p:txBody>
+          <a:bodyPr wrap="square" lIns="0" rIns="0" tIns="0" bIns="0">
+            <a:spAutoFit/>
+          </a:bodyPr>
+          <a:lstStyle/>
+          <a:p>
+            <a:pPr algn="l">
+              <a:lnSpc>
+                <a:spcPct val="113000"/>
+              </a:lnSpc>
+              <a:spcBef>
+                <a:spcPts val="0"/>
+              </a:spcBef>
+              <a:spcAft>
+                <a:spcPts val="400"/>
+              </a:spcAft>
+            </a:pPr>
+            <a:r>
+              <a:rPr sz="1700" b="1">
+                <a:solidFill>
+                  <a:srgbClr val="182236"/>
+                </a:solidFill>
+                <a:latin typeface="Arial"/>
+                <a:ea typeface="Apple SD Gothic Neo"/>
+              </a:rPr>
+              <a:t>Interactive</a:t>
+            </a:r>
+          </a:p>
+        </p:txBody>
+      </p:sp>
+      <p:sp>
+        <p:nvSpPr>
+          <p:cNvPr id="26" name="TextBox 25"/>
+          <p:cNvSpPr txBox="1"/>
+          <p:nvPr/>
+        </p:nvSpPr>
+        <p:spPr>
+          <a:xfrm>
+            <a:off x="1828800" y="5120640"/>
+            <a:ext cx="2816352" cy="228600"/>
+          </a:xfrm>
+          <a:prstGeom prst="rect">
+            <a:avLst/>
+          </a:prstGeom>
+          <a:noFill/>
+        </p:spPr>
+        <p:txBody>
+          <a:bodyPr wrap="square" lIns="0" rIns="0" tIns="0" bIns="0">
+            <a:spAutoFit/>
+          </a:bodyPr>
+          <a:lstStyle/>
+          <a:p>
+            <a:pPr algn="l">
+              <a:lnSpc>
+                <a:spcPct val="113000"/>
+              </a:lnSpc>
+              <a:spcBef>
+                <a:spcPts val="0"/>
+              </a:spcBef>
+              <a:spcAft>
+                <a:spcPts val="200"/>
+              </a:spcAft>
+            </a:pPr>
+            <a:r>
+              <a:rPr sz="1250" b="0">
+                <a:solidFill>
+                  <a:srgbClr val="78859A"/>
+                </a:solidFill>
+                <a:latin typeface="Arial"/>
+                <a:ea typeface="Apple SD Gothic Neo"/>
+              </a:rPr>
+              <a:t>대화하며 실행</a:t>
+            </a:r>
+          </a:p>
+        </p:txBody>
+      </p:sp>
+      <p:sp>
+        <p:nvSpPr>
+          <p:cNvPr id="27" name="Rounded Rectangle 26"/>
+          <p:cNvSpPr/>
+          <p:nvPr/>
+        </p:nvSpPr>
+        <p:spPr>
+          <a:xfrm>
+            <a:off x="5020056" y="4590288"/>
+            <a:ext cx="3145536" cy="877824"/>
+          </a:xfrm>
+          <a:prstGeom prst="roundRect">
+            <a:avLst>
+              <a:gd name="adj" fmla="val 12000"/>
+            </a:avLst>
+          </a:prstGeom>
+          <a:solidFill>
+            <a:srgbClr val="EEE7F7"/>
+          </a:solidFill>
+          <a:ln>
+            <a:noFill/>
+          </a:ln>
+        </p:spPr>
+        <p:style>
+          <a:lnRef idx="1">
+            <a:schemeClr val="accent1"/>
+          </a:lnRef>
+          <a:fillRef idx="3">
+            <a:schemeClr val="accent1"/>
+          </a:fillRef>
+          <a:effectRef idx="0">
+            <a:schemeClr val="accent1"/>
+          </a:effectRef>
+          <a:fontRef idx="minor">
+            <a:schemeClr val="lt1"/>
+          </a:fontRef>
+        </p:style>
+        <p:txBody>
+          <a:bodyPr rtlCol="0" anchor="ctr"/>
+          <a:lstStyle/>
+          <a:p>
+            <a:pPr algn="ctr"/>
+          </a:p>
+        </p:txBody>
+      </p:sp>
+      <p:sp>
+        <p:nvSpPr>
+          <p:cNvPr id="28" name="TextBox 27"/>
+          <p:cNvSpPr txBox="1"/>
+          <p:nvPr/>
+        </p:nvSpPr>
+        <p:spPr>
+          <a:xfrm>
+            <a:off x="5175504" y="4709160"/>
+            <a:ext cx="2816352" cy="310896"/>
+          </a:xfrm>
+          <a:prstGeom prst="rect">
+            <a:avLst/>
+          </a:prstGeom>
+          <a:noFill/>
+        </p:spPr>
+        <p:txBody>
+          <a:bodyPr wrap="square" lIns="0" rIns="0" tIns="0" bIns="0">
+            <a:spAutoFit/>
+          </a:bodyPr>
+          <a:lstStyle/>
+          <a:p>
+            <a:pPr algn="l">
+              <a:lnSpc>
+                <a:spcPct val="113000"/>
+              </a:lnSpc>
+              <a:spcBef>
+                <a:spcPts val="0"/>
+              </a:spcBef>
+              <a:spcAft>
+                <a:spcPts val="400"/>
+              </a:spcAft>
+            </a:pPr>
+            <a:r>
+              <a:rPr sz="1700" b="1">
+                <a:solidFill>
+                  <a:srgbClr val="182236"/>
+                </a:solidFill>
+                <a:latin typeface="Arial"/>
+                <a:ea typeface="Apple SD Gothic Neo"/>
+              </a:rPr>
+              <a:t>Plan</a:t>
+            </a:r>
+          </a:p>
+        </p:txBody>
+      </p:sp>
+      <p:sp>
+        <p:nvSpPr>
+          <p:cNvPr id="29" name="TextBox 28"/>
+          <p:cNvSpPr txBox="1"/>
+          <p:nvPr/>
+        </p:nvSpPr>
+        <p:spPr>
+          <a:xfrm>
+            <a:off x="5175504" y="5120640"/>
+            <a:ext cx="2816352" cy="228600"/>
+          </a:xfrm>
+          <a:prstGeom prst="rect">
+            <a:avLst/>
+          </a:prstGeom>
+          <a:noFill/>
+        </p:spPr>
+        <p:txBody>
+          <a:bodyPr wrap="square" lIns="0" rIns="0" tIns="0" bIns="0">
+            <a:spAutoFit/>
+          </a:bodyPr>
+          <a:lstStyle/>
+          <a:p>
+            <a:pPr algn="l">
+              <a:lnSpc>
+                <a:spcPct val="113000"/>
+              </a:lnSpc>
+              <a:spcBef>
+                <a:spcPts val="0"/>
+              </a:spcBef>
+              <a:spcAft>
+                <a:spcPts val="200"/>
+              </a:spcAft>
+            </a:pPr>
+            <a:r>
+              <a:rPr sz="1250" b="0">
+                <a:solidFill>
+                  <a:srgbClr val="78859A"/>
+                </a:solidFill>
+                <a:latin typeface="Arial"/>
+                <a:ea typeface="Apple SD Gothic Neo"/>
+              </a:rPr>
+              <a:t>구현 전에 계획</a:t>
+            </a:r>
+          </a:p>
+        </p:txBody>
+      </p:sp>
+      <p:sp>
+        <p:nvSpPr>
+          <p:cNvPr id="30" name="Rounded Rectangle 29"/>
+          <p:cNvSpPr/>
+          <p:nvPr/>
+        </p:nvSpPr>
+        <p:spPr>
+          <a:xfrm>
+            <a:off x="8366760" y="4590288"/>
+            <a:ext cx="3145536" cy="877824"/>
+          </a:xfrm>
+          <a:prstGeom prst="roundRect">
+            <a:avLst>
+              <a:gd name="adj" fmla="val 12000"/>
+            </a:avLst>
+          </a:prstGeom>
+          <a:solidFill>
+            <a:srgbClr val="EEE7F7"/>
+          </a:solidFill>
+          <a:ln>
+            <a:noFill/>
+          </a:ln>
+        </p:spPr>
+        <p:style>
+          <a:lnRef idx="1">
+            <a:schemeClr val="accent1"/>
+          </a:lnRef>
+          <a:fillRef idx="3">
+            <a:schemeClr val="accent1"/>
+          </a:fillRef>
+          <a:effectRef idx="0">
+            <a:schemeClr val="accent1"/>
+          </a:effectRef>
+          <a:fontRef idx="minor">
+            <a:schemeClr val="lt1"/>
+          </a:fontRef>
+        </p:style>
+        <p:txBody>
+          <a:bodyPr rtlCol="0" anchor="ctr"/>
+          <a:lstStyle/>
+          <a:p>
+            <a:pPr algn="ctr"/>
+          </a:p>
+        </p:txBody>
+      </p:sp>
+      <p:sp>
+        <p:nvSpPr>
+          <p:cNvPr id="31" name="TextBox 30"/>
+          <p:cNvSpPr txBox="1"/>
+          <p:nvPr/>
+        </p:nvSpPr>
+        <p:spPr>
+          <a:xfrm>
+            <a:off x="8522208" y="4709160"/>
+            <a:ext cx="2816352" cy="310896"/>
+          </a:xfrm>
+          <a:prstGeom prst="rect">
+            <a:avLst/>
+          </a:prstGeom>
+          <a:noFill/>
+        </p:spPr>
+        <p:txBody>
+          <a:bodyPr wrap="square" lIns="0" rIns="0" tIns="0" bIns="0">
+            <a:spAutoFit/>
+          </a:bodyPr>
+          <a:lstStyle/>
+          <a:p>
+            <a:pPr algn="l">
+              <a:lnSpc>
+                <a:spcPct val="113000"/>
+              </a:lnSpc>
+              <a:spcBef>
+                <a:spcPts val="0"/>
+              </a:spcBef>
+              <a:spcAft>
+                <a:spcPts val="400"/>
+              </a:spcAft>
+            </a:pPr>
+            <a:r>
+              <a:rPr sz="1700" b="1">
+                <a:solidFill>
+                  <a:srgbClr val="182236"/>
+                </a:solidFill>
+                <a:latin typeface="Arial"/>
+                <a:ea typeface="Apple SD Gothic Neo"/>
+              </a:rPr>
+              <a:t>Autopilot</a:t>
+            </a:r>
+          </a:p>
+        </p:txBody>
+      </p:sp>
+      <p:sp>
+        <p:nvSpPr>
+          <p:cNvPr id="32" name="TextBox 31"/>
+          <p:cNvSpPr txBox="1"/>
+          <p:nvPr/>
+        </p:nvSpPr>
+        <p:spPr>
+          <a:xfrm>
+            <a:off x="8522208" y="5120640"/>
+            <a:ext cx="2816352" cy="228600"/>
+          </a:xfrm>
+          <a:prstGeom prst="rect">
+            <a:avLst/>
+          </a:prstGeom>
+          <a:noFill/>
+        </p:spPr>
+        <p:txBody>
+          <a:bodyPr wrap="square" lIns="0" rIns="0" tIns="0" bIns="0">
+            <a:spAutoFit/>
+          </a:bodyPr>
+          <a:lstStyle/>
+          <a:p>
+            <a:pPr algn="l">
+              <a:lnSpc>
+                <a:spcPct val="113000"/>
+              </a:lnSpc>
+              <a:spcBef>
+                <a:spcPts val="0"/>
+              </a:spcBef>
+              <a:spcAft>
+                <a:spcPts val="200"/>
+              </a:spcAft>
+            </a:pPr>
+            <a:r>
+              <a:rPr sz="1250" b="0">
+                <a:solidFill>
+                  <a:srgbClr val="78859A"/>
+                </a:solidFill>
+                <a:latin typeface="Arial"/>
+                <a:ea typeface="Apple SD Gothic Neo"/>
+              </a:rPr>
+              <a:t>여러 단계를 연속 진행</a:t>
+            </a:r>
+          </a:p>
+        </p:txBody>
+      </p:sp>
+      <p:sp>
+        <p:nvSpPr>
+          <p:cNvPr id="33" name="TextBox 32"/>
+          <p:cNvSpPr txBox="1"/>
+          <p:nvPr/>
+        </p:nvSpPr>
+        <p:spPr>
+          <a:xfrm>
+            <a:off x="630936" y="5669280"/>
+            <a:ext cx="10972800" cy="274320"/>
+          </a:xfrm>
+          <a:prstGeom prst="rect">
+            <a:avLst/>
+          </a:prstGeom>
+          <a:noFill/>
+        </p:spPr>
+        <p:txBody>
+          <a:bodyPr wrap="square" lIns="0" rIns="0" tIns="0" bIns="0">
+            <a:spAutoFit/>
+          </a:bodyPr>
+          <a:lstStyle/>
+          <a:p>
+            <a:pPr algn="l">
+              <a:lnSpc>
+                <a:spcPct val="113000"/>
+              </a:lnSpc>
+              <a:spcBef>
+                <a:spcPts val="0"/>
+              </a:spcBef>
+              <a:spcAft>
+                <a:spcPts val="200"/>
+              </a:spcAft>
+            </a:pPr>
+            <a:r>
+              <a:rPr sz="1250" b="0">
+                <a:solidFill>
+                  <a:srgbClr val="78859A"/>
+                </a:solidFill>
+                <a:latin typeface="Arial"/>
+                <a:ea typeface="Apple SD Gothic Neo"/>
+              </a:rPr>
+              <a:t>모드명·제공 범위는 클라이언트별로 다릅니다. Edit*은 지원 IDE·버전에 한정됩니다.</a:t>
+            </a:r>
+          </a:p>
+        </p:txBody>
+      </p:sp>
+      <p:sp>
+        <p:nvSpPr>
+          <p:cNvPr id="34" name="TextBox 33"/>
+          <p:cNvSpPr txBox="1"/>
+          <p:nvPr/>
+        </p:nvSpPr>
+        <p:spPr>
+          <a:xfrm>
+            <a:off x="630936" y="6007608"/>
+            <a:ext cx="10972800" cy="274320"/>
+          </a:xfrm>
+          <a:prstGeom prst="rect">
+            <a:avLst/>
+          </a:prstGeom>
+          <a:noFill/>
+        </p:spPr>
+        <p:txBody>
+          <a:bodyPr wrap="square" lIns="0" rIns="0" tIns="0" bIns="0">
+            <a:spAutoFit/>
+          </a:bodyPr>
+          <a:lstStyle/>
+          <a:p>
+            <a:pPr algn="l">
+              <a:lnSpc>
+                <a:spcPct val="113000"/>
+              </a:lnSpc>
+              <a:spcBef>
+                <a:spcPts val="0"/>
+              </a:spcBef>
+              <a:spcAft>
+                <a:spcPts val="200"/>
+              </a:spcAft>
+            </a:pPr>
+            <a:r>
+              <a:rPr sz="1300" b="1">
+                <a:solidFill>
+                  <a:srgbClr val="182236"/>
+                </a:solidFill>
+                <a:latin typeface="Arial"/>
+                <a:ea typeface="Apple SD Gothic Neo"/>
+              </a:rPr>
+              <a:t>연속 진행과 도구 권한은 별도입니다. 이번 녹화는 Interactive + 수동 편집 승인입니다.</a:t>
+            </a:r>
+          </a:p>
+        </p:txBody>
+      </p:sp>
+    </p:spTree>
+  </p:cSld>
+  <p:clrMapOvr>
+    <a:masterClrMapping/>
+  </p:clrMapOvr>
+</p:sld>
+</file>
+
+<file path=ppt/slides/slide22.xml><?xml version="1.0" encoding="utf-8"?>
+<p:sld xmlns:a="http://schemas.openxmlformats.org/drawingml/2006/main" xmlns:p="http://schemas.openxmlformats.org/presentationml/2006/main" xmlns:r="http://schemas.openxmlformats.org/officeDocument/2006/relationships">
+  <p:cSld>
+    <p:bg>
+      <p:bgPr>
+        <a:solidFill>
+          <a:srgbClr val="101727"/>
+        </a:solidFill>
+        <a:effectLst/>
+      </p:bgPr>
+    </p:bg>
+    <p:spTree>
+      <p:nvGrpSpPr>
+        <p:cNvPr id="1" name=""/>
+        <p:cNvGrpSpPr/>
+        <p:nvPr/>
+      </p:nvGrpSpPr>
+      <p:grpSpPr/>
+      <p:sp>
+        <p:nvSpPr>
+          <p:cNvPr id="2" name="TextBox 1"/>
+          <p:cNvSpPr txBox="1"/>
+          <p:nvPr/>
+        </p:nvSpPr>
+        <p:spPr>
+          <a:xfrm>
+            <a:off x="539496" y="310896"/>
+            <a:ext cx="10972800" cy="237744"/>
+          </a:xfrm>
+          <a:prstGeom prst="rect">
+            <a:avLst/>
+          </a:prstGeom>
+          <a:noFill/>
+        </p:spPr>
+        <p:txBody>
+          <a:bodyPr wrap="square" lIns="0" rIns="0" tIns="0" bIns="0">
+            <a:spAutoFit/>
+          </a:bodyPr>
+          <a:lstStyle/>
+          <a:p>
+            <a:pPr algn="l">
+              <a:lnSpc>
+                <a:spcPct val="113000"/>
+              </a:lnSpc>
+              <a:spcBef>
+                <a:spcPts val="0"/>
+              </a:spcBef>
+              <a:spcAft>
+                <a:spcPts val="200"/>
+              </a:spcAft>
+            </a:pPr>
+            <a:r>
+              <a:rPr sz="1000" b="1">
+                <a:solidFill>
+                  <a:srgbClr val="D6C1F0"/>
+                </a:solidFill>
+                <a:latin typeface="Arial"/>
+                <a:ea typeface="Apple SD Gothic Neo"/>
+              </a:rPr>
+              <a:t>INTRO 04 / AGENT-POWERED WORK</a:t>
+            </a:r>
+          </a:p>
+        </p:txBody>
+      </p:sp>
+      <p:sp>
+        <p:nvSpPr>
+          <p:cNvPr id="3" name="TextBox 2"/>
+          <p:cNvSpPr txBox="1"/>
+          <p:nvPr/>
+        </p:nvSpPr>
+        <p:spPr>
+          <a:xfrm>
+            <a:off x="539496" y="832104"/>
+            <a:ext cx="11064240" cy="1124712"/>
+          </a:xfrm>
+          <a:prstGeom prst="rect">
+            <a:avLst/>
+          </a:prstGeom>
+          <a:noFill/>
+        </p:spPr>
+        <p:txBody>
+          <a:bodyPr wrap="square" lIns="0" rIns="0" tIns="0" bIns="0">
+            <a:spAutoFit/>
+          </a:bodyPr>
+          <a:lstStyle/>
+          <a:p>
+            <a:pPr algn="l">
+              <a:lnSpc>
+                <a:spcPct val="109000"/>
+              </a:lnSpc>
+              <a:spcBef>
+                <a:spcPts val="0"/>
+              </a:spcBef>
+              <a:spcAft>
+                <a:spcPts val="400"/>
+              </a:spcAft>
+            </a:pPr>
+            <a:r>
+              <a:rPr sz="3200" b="1">
+                <a:solidFill>
+                  <a:srgbClr val="FFFFFF"/>
+                </a:solidFill>
+                <a:latin typeface="Arial"/>
+                <a:ea typeface="Apple SD Gothic Neo"/>
+              </a:rPr>
+              <a:t>에이전트는 목표를 받아,</a:t>
+            </a:r>
+          </a:p>
+          <a:p>
+            <a:pPr algn="l">
+              <a:lnSpc>
+                <a:spcPct val="109000"/>
+              </a:lnSpc>
+              <a:spcBef>
+                <a:spcPts val="0"/>
+              </a:spcBef>
+              <a:spcAft>
+                <a:spcPts val="400"/>
+              </a:spcAft>
+            </a:pPr>
+            <a:r>
+              <a:rPr sz="3200" b="1">
+                <a:solidFill>
+                  <a:srgbClr val="FFFFFF"/>
+                </a:solidFill>
+                <a:latin typeface="Arial"/>
+                <a:ea typeface="Apple SD Gothic Neo"/>
+              </a:rPr>
+              <a:t>개발 작업을 여러 단계로 수행합니다.</a:t>
+            </a:r>
+          </a:p>
+        </p:txBody>
+      </p:sp>
+      <p:cxnSp>
+        <p:nvCxnSpPr>
+          <p:cNvPr id="4" name="Connector 3"/>
+          <p:cNvCxnSpPr/>
+          <p:nvPr/>
+        </p:nvCxnSpPr>
+        <p:spPr>
+          <a:xfrm>
+            <a:off x="539496" y="6446520"/>
+            <a:ext cx="11100816" cy="0"/>
+          </a:xfrm>
+          <a:prstGeom prst="line">
+            <a:avLst/>
+          </a:prstGeom>
+          <a:ln w="8890">
+            <a:solidFill>
+              <a:srgbClr val="1A2439"/>
+            </a:solidFill>
+          </a:ln>
+        </p:spPr>
+        <p:style>
+          <a:lnRef idx="2">
+            <a:schemeClr val="accent1"/>
+          </a:lnRef>
+          <a:fillRef idx="0">
+            <a:schemeClr val="accent1"/>
+          </a:fillRef>
+          <a:effectRef idx="0">
+            <a:schemeClr val="accent1"/>
+          </a:effectRef>
+          <a:fontRef idx="minor">
+            <a:schemeClr val="tx1"/>
+          </a:fontRef>
+        </p:style>
+      </p:cxnSp>
+      <p:sp>
+        <p:nvSpPr>
+          <p:cNvPr id="5" name="TextBox 4"/>
+          <p:cNvSpPr txBox="1"/>
+          <p:nvPr/>
+        </p:nvSpPr>
+        <p:spPr>
+          <a:xfrm>
+            <a:off x="557784" y="6547104"/>
+            <a:ext cx="9875520" cy="173736"/>
+          </a:xfrm>
+          <a:prstGeom prst="rect">
+            <a:avLst/>
+          </a:prstGeom>
+          <a:noFill/>
+        </p:spPr>
+        <p:txBody>
+          <a:bodyPr wrap="square" lIns="0" rIns="0" tIns="0" bIns="0">
+            <a:spAutoFit/>
+          </a:bodyPr>
+          <a:lstStyle/>
+          <a:p>
+            <a:pPr algn="l">
+              <a:lnSpc>
+                <a:spcPct val="113000"/>
+              </a:lnSpc>
+              <a:spcBef>
+                <a:spcPts val="0"/>
+              </a:spcBef>
+              <a:spcAft>
+                <a:spcPts val="200"/>
+              </a:spcAft>
+            </a:pPr>
+            <a:r>
+              <a:rPr sz="850" b="0">
+                <a:solidFill>
+                  <a:srgbClr val="78859A"/>
+                </a:solidFill>
+                <a:latin typeface="Arial"/>
+                <a:ea typeface="Apple SD Gothic Neo"/>
+              </a:rPr>
+              <a:t>GitHub Copilot  /  CXO Briefing. Real execution. Human control.</a:t>
+            </a:r>
+          </a:p>
+        </p:txBody>
+      </p:sp>
+      <p:sp>
+        <p:nvSpPr>
+          <p:cNvPr id="6" name="TextBox 5"/>
+          <p:cNvSpPr txBox="1"/>
+          <p:nvPr/>
+        </p:nvSpPr>
+        <p:spPr>
+          <a:xfrm>
+            <a:off x="11045952" y="6510528"/>
+            <a:ext cx="576072" cy="237744"/>
+          </a:xfrm>
+          <a:prstGeom prst="rect">
+            <a:avLst/>
+          </a:prstGeom>
+          <a:noFill/>
+        </p:spPr>
+        <p:txBody>
+          <a:bodyPr wrap="square" lIns="0" rIns="0" tIns="0" bIns="0">
+            <a:spAutoFit/>
+          </a:bodyPr>
+          <a:lstStyle/>
+          <a:p>
+            <a:pPr algn="r">
+              <a:lnSpc>
+                <a:spcPct val="113000"/>
+              </a:lnSpc>
+              <a:spcBef>
+                <a:spcPts val="0"/>
+              </a:spcBef>
+              <a:spcAft>
+                <a:spcPts val="200"/>
+              </a:spcAft>
+            </a:pPr>
+            <a:r>
+              <a:rPr sz="1100" b="0">
+                <a:solidFill>
+                  <a:srgbClr val="78859A"/>
+                </a:solidFill>
+                <a:latin typeface="Arial"/>
+                <a:ea typeface="Apple SD Gothic Neo"/>
+              </a:rPr>
+              <a:t>05</a:t>
+            </a:r>
+          </a:p>
+        </p:txBody>
+      </p:sp>
+      <p:sp>
+        <p:nvSpPr>
+          <p:cNvPr id="7" name="Rounded Rectangle 6"/>
+          <p:cNvSpPr/>
+          <p:nvPr/>
+        </p:nvSpPr>
+        <p:spPr>
+          <a:xfrm>
+            <a:off x="566928" y="2542032"/>
+            <a:ext cx="3547872" cy="2816352"/>
+          </a:xfrm>
+          <a:prstGeom prst="roundRect">
+            <a:avLst>
+              <a:gd name="adj" fmla="val 12000"/>
+            </a:avLst>
+          </a:prstGeom>
+          <a:solidFill>
+            <a:srgbClr val="1A2439"/>
+          </a:solidFill>
+          <a:ln>
+            <a:noFill/>
+          </a:ln>
+        </p:spPr>
+        <p:style>
+          <a:lnRef idx="1">
+            <a:schemeClr val="accent1"/>
+          </a:lnRef>
+          <a:fillRef idx="3">
+            <a:schemeClr val="accent1"/>
+          </a:fillRef>
+          <a:effectRef idx="0">
+            <a:schemeClr val="accent1"/>
+          </a:effectRef>
+          <a:fontRef idx="minor">
+            <a:schemeClr val="lt1"/>
+          </a:fontRef>
+        </p:style>
+        <p:txBody>
+          <a:bodyPr rtlCol="0" anchor="ctr"/>
+          <a:lstStyle/>
+          <a:p>
+            <a:pPr algn="ctr"/>
+          </a:p>
+        </p:txBody>
+      </p:sp>
+      <p:sp>
+        <p:nvSpPr>
+          <p:cNvPr id="8" name="Rounded Rectangle 7"/>
+          <p:cNvSpPr/>
+          <p:nvPr/>
+        </p:nvSpPr>
+        <p:spPr>
+          <a:xfrm>
+            <a:off x="786384" y="2761487"/>
+            <a:ext cx="3099816" cy="310896"/>
+          </a:xfrm>
+          <a:prstGeom prst="roundRect">
+            <a:avLst>
+              <a:gd name="adj" fmla="val 12000"/>
+            </a:avLst>
+          </a:prstGeom>
+          <a:solidFill>
+            <a:srgbClr val="1A2439"/>
+          </a:solidFill>
+          <a:ln>
+            <a:noFill/>
+          </a:ln>
+        </p:spPr>
+        <p:style>
+          <a:lnRef idx="1">
+            <a:schemeClr val="accent1"/>
+          </a:lnRef>
+          <a:fillRef idx="3">
+            <a:schemeClr val="accent1"/>
+          </a:fillRef>
+          <a:effectRef idx="0">
+            <a:schemeClr val="accent1"/>
+          </a:effectRef>
+          <a:fontRef idx="minor">
+            <a:schemeClr val="lt1"/>
+          </a:fontRef>
+        </p:style>
+        <p:txBody>
+          <a:bodyPr rtlCol="0" anchor="ctr"/>
+          <a:lstStyle/>
+          <a:p>
+            <a:pPr algn="ctr"/>
+          </a:p>
+        </p:txBody>
+      </p:sp>
+      <p:sp>
+        <p:nvSpPr>
+          <p:cNvPr id="9" name="TextBox 8"/>
+          <p:cNvSpPr txBox="1"/>
+          <p:nvPr/>
+        </p:nvSpPr>
+        <p:spPr>
+          <a:xfrm>
+            <a:off x="859536" y="2802635"/>
+            <a:ext cx="2953512" cy="228600"/>
+          </a:xfrm>
+          <a:prstGeom prst="rect">
+            <a:avLst/>
+          </a:prstGeom>
+          <a:noFill/>
+        </p:spPr>
+        <p:txBody>
+          <a:bodyPr wrap="square" lIns="0" rIns="0" tIns="0" bIns="0">
+            <a:spAutoFit/>
+          </a:bodyPr>
+          <a:lstStyle/>
+          <a:p>
+            <a:pPr algn="ctr">
+              <a:lnSpc>
+                <a:spcPct val="113000"/>
+              </a:lnSpc>
+              <a:spcBef>
+                <a:spcPts val="0"/>
+              </a:spcBef>
+              <a:spcAft>
+                <a:spcPts val="200"/>
+              </a:spcAft>
+            </a:pPr>
+            <a:r>
+              <a:rPr sz="1000" b="1">
+                <a:solidFill>
+                  <a:srgbClr val="D6C1F0"/>
+                </a:solidFill>
+                <a:latin typeface="Arial"/>
+                <a:ea typeface="Apple SD Gothic Neo"/>
+              </a:rPr>
+              <a:t>AGENT MODE / CLI</a:t>
+            </a:r>
+          </a:p>
+        </p:txBody>
+      </p:sp>
+      <p:sp>
+        <p:nvSpPr>
+          <p:cNvPr id="10" name="TextBox 9"/>
+          <p:cNvSpPr txBox="1"/>
+          <p:nvPr/>
+        </p:nvSpPr>
+        <p:spPr>
+          <a:xfrm>
+            <a:off x="795528" y="3429000"/>
+            <a:ext cx="3072384" cy="749808"/>
+          </a:xfrm>
+          <a:prstGeom prst="rect">
+            <a:avLst/>
+          </a:prstGeom>
+          <a:noFill/>
+        </p:spPr>
+        <p:txBody>
+          <a:bodyPr wrap="square" lIns="0" rIns="0" tIns="0" bIns="0">
+            <a:spAutoFit/>
+          </a:bodyPr>
+          <a:lstStyle/>
+          <a:p>
+            <a:pPr algn="l">
+              <a:lnSpc>
+                <a:spcPct val="113000"/>
+              </a:lnSpc>
+              <a:spcBef>
+                <a:spcPts val="0"/>
+              </a:spcBef>
+              <a:spcAft>
+                <a:spcPts val="400"/>
+              </a:spcAft>
+            </a:pPr>
+            <a:r>
+              <a:rPr sz="2400" b="1">
+                <a:solidFill>
+                  <a:srgbClr val="FFFFFF"/>
+                </a:solidFill>
+                <a:latin typeface="Arial"/>
+                <a:ea typeface="Apple SD Gothic Neo"/>
+              </a:rPr>
+              <a:t>구현·검증을 위임</a:t>
+            </a:r>
+          </a:p>
+        </p:txBody>
+      </p:sp>
+      <p:sp>
+        <p:nvSpPr>
+          <p:cNvPr id="11" name="TextBox 10"/>
+          <p:cNvSpPr txBox="1"/>
+          <p:nvPr/>
+        </p:nvSpPr>
+        <p:spPr>
+          <a:xfrm>
+            <a:off x="795528" y="4379975"/>
+            <a:ext cx="3072384" cy="932688"/>
+          </a:xfrm>
+          <a:prstGeom prst="rect">
+            <a:avLst/>
+          </a:prstGeom>
+          <a:noFill/>
+        </p:spPr>
+        <p:txBody>
+          <a:bodyPr wrap="square" lIns="0" rIns="0" tIns="0" bIns="0">
+            <a:spAutoFit/>
+          </a:bodyPr>
+          <a:lstStyle/>
+          <a:p>
+            <a:pPr algn="l">
+              <a:lnSpc>
+                <a:spcPct val="113000"/>
+              </a:lnSpc>
+              <a:spcBef>
+                <a:spcPts val="0"/>
+              </a:spcBef>
+              <a:spcAft>
+                <a:spcPts val="400"/>
+              </a:spcAft>
+            </a:pPr>
+            <a:r>
+              <a:rPr sz="1700" b="0">
+                <a:solidFill>
+                  <a:srgbClr val="B1BED3"/>
+                </a:solidFill>
+                <a:latin typeface="Arial"/>
+                <a:ea typeface="Apple SD Gothic Neo"/>
+              </a:rPr>
+              <a:t>소스 탐색·여러 파일 수정</a:t>
+            </a:r>
+          </a:p>
+          <a:p>
+            <a:pPr algn="l">
+              <a:lnSpc>
+                <a:spcPct val="113000"/>
+              </a:lnSpc>
+              <a:spcBef>
+                <a:spcPts val="0"/>
+              </a:spcBef>
+              <a:spcAft>
+                <a:spcPts val="400"/>
+              </a:spcAft>
+            </a:pPr>
+            <a:r>
+              <a:rPr sz="1700" b="0">
+                <a:solidFill>
+                  <a:srgbClr val="B1BED3"/>
+                </a:solidFill>
+                <a:latin typeface="Arial"/>
+                <a:ea typeface="Apple SD Gothic Neo"/>
+              </a:rPr>
+              <a:t>도구 실행·테스트와 재시도</a:t>
+            </a:r>
+          </a:p>
+        </p:txBody>
+      </p:sp>
+      <p:sp>
+        <p:nvSpPr>
+          <p:cNvPr id="12" name="Rounded Rectangle 11"/>
+          <p:cNvSpPr/>
+          <p:nvPr/>
+        </p:nvSpPr>
+        <p:spPr>
+          <a:xfrm>
+            <a:off x="4361688" y="2542032"/>
+            <a:ext cx="3547872" cy="2816352"/>
+          </a:xfrm>
+          <a:prstGeom prst="roundRect">
+            <a:avLst>
+              <a:gd name="adj" fmla="val 12000"/>
+            </a:avLst>
+          </a:prstGeom>
+          <a:solidFill>
+            <a:srgbClr val="1A2439"/>
+          </a:solidFill>
+          <a:ln>
+            <a:noFill/>
+          </a:ln>
+        </p:spPr>
+        <p:style>
+          <a:lnRef idx="1">
+            <a:schemeClr val="accent1"/>
+          </a:lnRef>
+          <a:fillRef idx="3">
+            <a:schemeClr val="accent1"/>
+          </a:fillRef>
+          <a:effectRef idx="0">
+            <a:schemeClr val="accent1"/>
+          </a:effectRef>
+          <a:fontRef idx="minor">
+            <a:schemeClr val="lt1"/>
+          </a:fontRef>
+        </p:style>
+        <p:txBody>
+          <a:bodyPr rtlCol="0" anchor="ctr"/>
+          <a:lstStyle/>
+          <a:p>
+            <a:pPr algn="ctr"/>
+          </a:p>
+        </p:txBody>
+      </p:sp>
+      <p:sp>
+        <p:nvSpPr>
+          <p:cNvPr id="13" name="Rounded Rectangle 12"/>
+          <p:cNvSpPr/>
+          <p:nvPr/>
+        </p:nvSpPr>
+        <p:spPr>
+          <a:xfrm>
+            <a:off x="4581144" y="2761487"/>
+            <a:ext cx="3099816" cy="310896"/>
+          </a:xfrm>
+          <a:prstGeom prst="roundRect">
+            <a:avLst>
+              <a:gd name="adj" fmla="val 12000"/>
+            </a:avLst>
+          </a:prstGeom>
+          <a:solidFill>
+            <a:srgbClr val="1A2439"/>
+          </a:solidFill>
+          <a:ln>
+            <a:noFill/>
+          </a:ln>
+        </p:spPr>
+        <p:style>
+          <a:lnRef idx="1">
+            <a:schemeClr val="accent1"/>
+          </a:lnRef>
+          <a:fillRef idx="3">
+            <a:schemeClr val="accent1"/>
+          </a:fillRef>
+          <a:effectRef idx="0">
+            <a:schemeClr val="accent1"/>
+          </a:effectRef>
+          <a:fontRef idx="minor">
+            <a:schemeClr val="lt1"/>
+          </a:fontRef>
+        </p:style>
+        <p:txBody>
+          <a:bodyPr rtlCol="0" anchor="ctr"/>
+          <a:lstStyle/>
+          <a:p>
+            <a:pPr algn="ctr"/>
+          </a:p>
+        </p:txBody>
+      </p:sp>
+      <p:sp>
+        <p:nvSpPr>
+          <p:cNvPr id="14" name="TextBox 13"/>
+          <p:cNvSpPr txBox="1"/>
+          <p:nvPr/>
+        </p:nvSpPr>
+        <p:spPr>
+          <a:xfrm>
+            <a:off x="4654296" y="2802635"/>
+            <a:ext cx="2953512" cy="228600"/>
+          </a:xfrm>
+          <a:prstGeom prst="rect">
+            <a:avLst/>
+          </a:prstGeom>
+          <a:noFill/>
+        </p:spPr>
+        <p:txBody>
+          <a:bodyPr wrap="square" lIns="0" rIns="0" tIns="0" bIns="0">
+            <a:spAutoFit/>
+          </a:bodyPr>
+          <a:lstStyle/>
+          <a:p>
+            <a:pPr algn="ctr">
+              <a:lnSpc>
+                <a:spcPct val="113000"/>
+              </a:lnSpc>
+              <a:spcBef>
+                <a:spcPts val="0"/>
+              </a:spcBef>
+              <a:spcAft>
+                <a:spcPts val="200"/>
+              </a:spcAft>
+            </a:pPr>
+            <a:r>
+              <a:rPr sz="1000" b="1">
+                <a:solidFill>
+                  <a:srgbClr val="64D5AF"/>
+                </a:solidFill>
+                <a:latin typeface="Arial"/>
+                <a:ea typeface="Apple SD Gothic Neo"/>
+              </a:rPr>
+              <a:t>CLOUD AGENT</a:t>
+            </a:r>
+          </a:p>
+        </p:txBody>
+      </p:sp>
+      <p:sp>
+        <p:nvSpPr>
+          <p:cNvPr id="15" name="TextBox 14"/>
+          <p:cNvSpPr txBox="1"/>
+          <p:nvPr/>
+        </p:nvSpPr>
+        <p:spPr>
+          <a:xfrm>
+            <a:off x="4590288" y="3429000"/>
+            <a:ext cx="3072384" cy="749808"/>
+          </a:xfrm>
+          <a:prstGeom prst="rect">
+            <a:avLst/>
+          </a:prstGeom>
+          <a:noFill/>
+        </p:spPr>
+        <p:txBody>
+          <a:bodyPr wrap="square" lIns="0" rIns="0" tIns="0" bIns="0">
+            <a:spAutoFit/>
+          </a:bodyPr>
+          <a:lstStyle/>
+          <a:p>
+            <a:pPr algn="l">
+              <a:lnSpc>
+                <a:spcPct val="113000"/>
+              </a:lnSpc>
+              <a:spcBef>
+                <a:spcPts val="0"/>
+              </a:spcBef>
+              <a:spcAft>
+                <a:spcPts val="400"/>
+              </a:spcAft>
+            </a:pPr>
+            <a:r>
+              <a:rPr sz="2400" b="1">
+                <a:solidFill>
+                  <a:srgbClr val="FFFFFF"/>
+                </a:solidFill>
+                <a:latin typeface="Arial"/>
+                <a:ea typeface="Apple SD Gothic Neo"/>
+              </a:rPr>
+              <a:t>백그라운드에 위임</a:t>
+            </a:r>
+          </a:p>
+        </p:txBody>
+      </p:sp>
+      <p:sp>
+        <p:nvSpPr>
+          <p:cNvPr id="16" name="TextBox 15"/>
+          <p:cNvSpPr txBox="1"/>
+          <p:nvPr/>
+        </p:nvSpPr>
+        <p:spPr>
+          <a:xfrm>
+            <a:off x="4590288" y="4379975"/>
+            <a:ext cx="3072384" cy="932688"/>
+          </a:xfrm>
+          <a:prstGeom prst="rect">
+            <a:avLst/>
+          </a:prstGeom>
+          <a:noFill/>
+        </p:spPr>
+        <p:txBody>
+          <a:bodyPr wrap="square" lIns="0" rIns="0" tIns="0" bIns="0">
+            <a:spAutoFit/>
+          </a:bodyPr>
+          <a:lstStyle/>
+          <a:p>
+            <a:pPr algn="l">
+              <a:lnSpc>
+                <a:spcPct val="113000"/>
+              </a:lnSpc>
+              <a:spcBef>
+                <a:spcPts val="0"/>
+              </a:spcBef>
+              <a:spcAft>
+                <a:spcPts val="400"/>
+              </a:spcAft>
+            </a:pPr>
+            <a:r>
+              <a:rPr sz="1700" b="0">
+                <a:solidFill>
+                  <a:srgbClr val="B1BED3"/>
+                </a:solidFill>
+                <a:latin typeface="Arial"/>
+                <a:ea typeface="Apple SD Gothic Neo"/>
+              </a:rPr>
+              <a:t>GitHub에서 조사·계획·변경</a:t>
+            </a:r>
+          </a:p>
+          <a:p>
+            <a:pPr algn="l">
+              <a:lnSpc>
+                <a:spcPct val="113000"/>
+              </a:lnSpc>
+              <a:spcBef>
+                <a:spcPts val="0"/>
+              </a:spcBef>
+              <a:spcAft>
+                <a:spcPts val="400"/>
+              </a:spcAft>
+            </a:pPr>
+            <a:r>
+              <a:rPr sz="1700" b="0">
+                <a:solidFill>
+                  <a:srgbClr val="B1BED3"/>
+                </a:solidFill>
+                <a:latin typeface="Arial"/>
+                <a:ea typeface="Apple SD Gothic Neo"/>
+              </a:rPr>
+              <a:t>필요하면 PR로 전달</a:t>
+            </a:r>
+          </a:p>
+        </p:txBody>
+      </p:sp>
+      <p:sp>
+        <p:nvSpPr>
+          <p:cNvPr id="17" name="Rounded Rectangle 16"/>
+          <p:cNvSpPr/>
+          <p:nvPr/>
+        </p:nvSpPr>
+        <p:spPr>
+          <a:xfrm>
+            <a:off x="8156448" y="2542032"/>
+            <a:ext cx="3547872" cy="2816352"/>
+          </a:xfrm>
+          <a:prstGeom prst="roundRect">
+            <a:avLst>
+              <a:gd name="adj" fmla="val 12000"/>
+            </a:avLst>
+          </a:prstGeom>
+          <a:solidFill>
+            <a:srgbClr val="1A2439"/>
+          </a:solidFill>
+          <a:ln>
+            <a:noFill/>
+          </a:ln>
+        </p:spPr>
+        <p:style>
+          <a:lnRef idx="1">
+            <a:schemeClr val="accent1"/>
+          </a:lnRef>
+          <a:fillRef idx="3">
+            <a:schemeClr val="accent1"/>
+          </a:fillRef>
+          <a:effectRef idx="0">
+            <a:schemeClr val="accent1"/>
+          </a:effectRef>
+          <a:fontRef idx="minor">
+            <a:schemeClr val="lt1"/>
+          </a:fontRef>
+        </p:style>
+        <p:txBody>
+          <a:bodyPr rtlCol="0" anchor="ctr"/>
+          <a:lstStyle/>
+          <a:p>
+            <a:pPr algn="ctr"/>
+          </a:p>
+        </p:txBody>
+      </p:sp>
+      <p:sp>
+        <p:nvSpPr>
+          <p:cNvPr id="18" name="Rounded Rectangle 17"/>
+          <p:cNvSpPr/>
+          <p:nvPr/>
+        </p:nvSpPr>
+        <p:spPr>
+          <a:xfrm>
+            <a:off x="8375904" y="2761487"/>
+            <a:ext cx="3099816" cy="310896"/>
+          </a:xfrm>
+          <a:prstGeom prst="roundRect">
+            <a:avLst>
+              <a:gd name="adj" fmla="val 12000"/>
+            </a:avLst>
+          </a:prstGeom>
+          <a:solidFill>
+            <a:srgbClr val="1A2439"/>
+          </a:solidFill>
+          <a:ln>
+            <a:noFill/>
+          </a:ln>
+        </p:spPr>
+        <p:style>
+          <a:lnRef idx="1">
+            <a:schemeClr val="accent1"/>
+          </a:lnRef>
+          <a:fillRef idx="3">
+            <a:schemeClr val="accent1"/>
+          </a:fillRef>
+          <a:effectRef idx="0">
+            <a:schemeClr val="accent1"/>
+          </a:effectRef>
+          <a:fontRef idx="minor">
+            <a:schemeClr val="lt1"/>
+          </a:fontRef>
+        </p:style>
+        <p:txBody>
+          <a:bodyPr rtlCol="0" anchor="ctr"/>
+          <a:lstStyle/>
+          <a:p>
+            <a:pPr algn="ctr"/>
+          </a:p>
+        </p:txBody>
+      </p:sp>
+      <p:sp>
+        <p:nvSpPr>
+          <p:cNvPr id="19" name="TextBox 18"/>
+          <p:cNvSpPr txBox="1"/>
+          <p:nvPr/>
+        </p:nvSpPr>
+        <p:spPr>
+          <a:xfrm>
+            <a:off x="8449056" y="2802635"/>
+            <a:ext cx="2953512" cy="228600"/>
+          </a:xfrm>
+          <a:prstGeom prst="rect">
+            <a:avLst/>
+          </a:prstGeom>
+          <a:noFill/>
+        </p:spPr>
+        <p:txBody>
+          <a:bodyPr wrap="square" lIns="0" rIns="0" tIns="0" bIns="0">
+            <a:spAutoFit/>
+          </a:bodyPr>
+          <a:lstStyle/>
+          <a:p>
+            <a:pPr algn="ctr">
+              <a:lnSpc>
+                <a:spcPct val="113000"/>
+              </a:lnSpc>
+              <a:spcBef>
+                <a:spcPts val="0"/>
+              </a:spcBef>
+              <a:spcAft>
+                <a:spcPts val="200"/>
+              </a:spcAft>
+            </a:pPr>
+            <a:r>
+              <a:rPr sz="1000" b="1">
+                <a:solidFill>
+                  <a:srgbClr val="D6C1F0"/>
+                </a:solidFill>
+                <a:latin typeface="Arial"/>
+                <a:ea typeface="Apple SD Gothic Neo"/>
+              </a:rPr>
+              <a:t>COPILOT CODE REVIEW</a:t>
+            </a:r>
+          </a:p>
+        </p:txBody>
+      </p:sp>
+      <p:sp>
+        <p:nvSpPr>
+          <p:cNvPr id="20" name="TextBox 19"/>
+          <p:cNvSpPr txBox="1"/>
+          <p:nvPr/>
+        </p:nvSpPr>
+        <p:spPr>
+          <a:xfrm>
+            <a:off x="8385048" y="3429000"/>
+            <a:ext cx="3072384" cy="749808"/>
+          </a:xfrm>
+          <a:prstGeom prst="rect">
+            <a:avLst/>
+          </a:prstGeom>
+          <a:noFill/>
+        </p:spPr>
+        <p:txBody>
+          <a:bodyPr wrap="square" lIns="0" rIns="0" tIns="0" bIns="0">
+            <a:spAutoFit/>
+          </a:bodyPr>
+          <a:lstStyle/>
+          <a:p>
+            <a:pPr algn="l">
+              <a:lnSpc>
+                <a:spcPct val="113000"/>
+              </a:lnSpc>
+              <a:spcBef>
+                <a:spcPts val="0"/>
+              </a:spcBef>
+              <a:spcAft>
+                <a:spcPts val="400"/>
+              </a:spcAft>
+            </a:pPr>
+            <a:r>
+              <a:rPr sz="2400" b="1">
+                <a:solidFill>
+                  <a:srgbClr val="FFFFFF"/>
+                </a:solidFill>
+                <a:latin typeface="Arial"/>
+                <a:ea typeface="Apple SD Gothic Neo"/>
+              </a:rPr>
+              <a:t>변경을 다시 검토</a:t>
+            </a:r>
+          </a:p>
+        </p:txBody>
+      </p:sp>
+      <p:sp>
+        <p:nvSpPr>
+          <p:cNvPr id="21" name="TextBox 20"/>
+          <p:cNvSpPr txBox="1"/>
+          <p:nvPr/>
+        </p:nvSpPr>
+        <p:spPr>
+          <a:xfrm>
+            <a:off x="8385048" y="4379975"/>
+            <a:ext cx="3072384" cy="932688"/>
+          </a:xfrm>
+          <a:prstGeom prst="rect">
+            <a:avLst/>
+          </a:prstGeom>
+          <a:noFill/>
+        </p:spPr>
+        <p:txBody>
+          <a:bodyPr wrap="square" lIns="0" rIns="0" tIns="0" bIns="0">
+            <a:spAutoFit/>
+          </a:bodyPr>
+          <a:lstStyle/>
+          <a:p>
+            <a:pPr algn="l">
+              <a:lnSpc>
+                <a:spcPct val="113000"/>
+              </a:lnSpc>
+              <a:spcBef>
+                <a:spcPts val="0"/>
+              </a:spcBef>
+              <a:spcAft>
+                <a:spcPts val="400"/>
+              </a:spcAft>
+            </a:pPr>
+            <a:r>
+              <a:rPr sz="1700" b="0">
+                <a:solidFill>
+                  <a:srgbClr val="B1BED3"/>
+                </a:solidFill>
+                <a:latin typeface="Arial"/>
+                <a:ea typeface="Apple SD Gothic Neo"/>
+              </a:rPr>
+              <a:t>IDE·PR의 변경을 검토</a:t>
+            </a:r>
+          </a:p>
+          <a:p>
+            <a:pPr algn="l">
+              <a:lnSpc>
+                <a:spcPct val="113000"/>
+              </a:lnSpc>
+              <a:spcBef>
+                <a:spcPts val="0"/>
+              </a:spcBef>
+              <a:spcAft>
+                <a:spcPts val="400"/>
+              </a:spcAft>
+            </a:pPr>
+            <a:r>
+              <a:rPr sz="1700" b="0">
+                <a:solidFill>
+                  <a:srgbClr val="B1BED3"/>
+                </a:solidFill>
+                <a:latin typeface="Arial"/>
+                <a:ea typeface="Apple SD Gothic Neo"/>
+              </a:rPr>
+              <a:t>문제와 개선안 제안</a:t>
+            </a:r>
+          </a:p>
+        </p:txBody>
+      </p:sp>
+      <p:sp>
+        <p:nvSpPr>
+          <p:cNvPr id="22" name="TextBox 21"/>
+          <p:cNvSpPr txBox="1"/>
+          <p:nvPr/>
+        </p:nvSpPr>
+        <p:spPr>
+          <a:xfrm>
+            <a:off x="630936" y="5596128"/>
+            <a:ext cx="10972800" cy="310896"/>
+          </a:xfrm>
+          <a:prstGeom prst="rect">
+            <a:avLst/>
+          </a:prstGeom>
+          <a:noFill/>
+        </p:spPr>
+        <p:txBody>
+          <a:bodyPr wrap="square" lIns="0" rIns="0" tIns="0" bIns="0">
+            <a:spAutoFit/>
+          </a:bodyPr>
+          <a:lstStyle/>
+          <a:p>
+            <a:pPr algn="l">
+              <a:lnSpc>
+                <a:spcPct val="113000"/>
+              </a:lnSpc>
+              <a:spcBef>
+                <a:spcPts val="0"/>
+              </a:spcBef>
+              <a:spcAft>
+                <a:spcPts val="200"/>
+              </a:spcAft>
+            </a:pPr>
+            <a:r>
+              <a:rPr sz="1400" b="1">
+                <a:solidFill>
+                  <a:srgbClr val="FFFFFF"/>
+                </a:solidFill>
+                <a:latin typeface="Arial"/>
+                <a:ea typeface="Apple SD Gothic Neo"/>
+              </a:rPr>
+              <a:t>IDE의 Agent mode와 Cloud agent는 별개입니다. AI의 검토 의견은 출시 승인이 아닙니다.</a:t>
+            </a:r>
+          </a:p>
+        </p:txBody>
+      </p:sp>
+      <p:sp>
+        <p:nvSpPr>
+          <p:cNvPr id="23" name="TextBox 22"/>
+          <p:cNvSpPr txBox="1"/>
+          <p:nvPr/>
+        </p:nvSpPr>
+        <p:spPr>
+          <a:xfrm>
+            <a:off x="630936" y="6016752"/>
+            <a:ext cx="10972800" cy="274320"/>
+          </a:xfrm>
+          <a:prstGeom prst="rect">
+            <a:avLst/>
+          </a:prstGeom>
+          <a:noFill/>
+        </p:spPr>
+        <p:txBody>
+          <a:bodyPr wrap="square" lIns="0" rIns="0" tIns="0" bIns="0">
+            <a:spAutoFit/>
+          </a:bodyPr>
+          <a:lstStyle/>
+          <a:p>
+            <a:pPr algn="l">
+              <a:lnSpc>
+                <a:spcPct val="113000"/>
+              </a:lnSpc>
+              <a:spcBef>
+                <a:spcPts val="0"/>
+              </a:spcBef>
+              <a:spcAft>
+                <a:spcPts val="200"/>
+              </a:spcAft>
+            </a:pPr>
+            <a:r>
+              <a:rPr sz="1250" b="0">
+                <a:solidFill>
+                  <a:srgbClr val="B1BED3"/>
+                </a:solidFill>
+                <a:latin typeface="Arial"/>
+                <a:ea typeface="Apple SD Gothic Neo"/>
+              </a:rPr>
+              <a:t>이번 시연: CLI의 Custom agent + 로컬 테스트. Cloud 위임·PR 리뷰 서비스는 소개만 합니다.</a:t>
+            </a:r>
+          </a:p>
+        </p:txBody>
+      </p:sp>
+    </p:spTree>
+  </p:cSld>
+  <p:clrMapOvr>
+    <a:masterClrMapping/>
+  </p:clrMapOvr>
+</p:sld>
+</file>
+
+<file path=ppt/slides/slide23.xml><?xml version="1.0" encoding="utf-8"?>
+<p:sld xmlns:a="http://schemas.openxmlformats.org/drawingml/2006/main" xmlns:p="http://schemas.openxmlformats.org/presentationml/2006/main" xmlns:r="http://schemas.openxmlformats.org/officeDocument/2006/relationships">
+  <p:cSld>
+    <p:bg>
+      <p:bgPr>
+        <a:solidFill>
+          <a:srgbClr val="F7F8FC"/>
+        </a:solidFill>
+        <a:effectLst/>
+      </p:bgPr>
+    </p:bg>
+    <p:spTree>
+      <p:nvGrpSpPr>
+        <p:cNvPr id="1" name=""/>
+        <p:cNvGrpSpPr/>
+        <p:nvPr/>
+      </p:nvGrpSpPr>
+      <p:grpSpPr/>
+      <p:sp>
+        <p:nvSpPr>
+          <p:cNvPr id="2" name="TextBox 1"/>
+          <p:cNvSpPr txBox="1"/>
+          <p:nvPr/>
+        </p:nvSpPr>
+        <p:spPr>
+          <a:xfrm>
+            <a:off x="539496" y="310896"/>
+            <a:ext cx="10972800" cy="237744"/>
+          </a:xfrm>
+          <a:prstGeom prst="rect">
+            <a:avLst/>
+          </a:prstGeom>
+          <a:noFill/>
+        </p:spPr>
+        <p:txBody>
+          <a:bodyPr wrap="square" lIns="0" rIns="0" tIns="0" bIns="0">
+            <a:spAutoFit/>
+          </a:bodyPr>
+          <a:lstStyle/>
+          <a:p>
+            <a:pPr algn="l">
+              <a:lnSpc>
+                <a:spcPct val="113000"/>
+              </a:lnSpc>
+              <a:spcBef>
+                <a:spcPts val="0"/>
+              </a:spcBef>
+              <a:spcAft>
+                <a:spcPts val="200"/>
+              </a:spcAft>
+            </a:pPr>
+            <a:r>
+              <a:rPr sz="1000" b="1">
+                <a:solidFill>
+                  <a:srgbClr val="A783D7"/>
+                </a:solidFill>
+                <a:latin typeface="Arial"/>
+                <a:ea typeface="Apple SD Gothic Neo"/>
+              </a:rPr>
+              <a:t>INTRO 05 / TEAM-READY AGENT FEATURES</a:t>
+            </a:r>
+          </a:p>
+        </p:txBody>
+      </p:sp>
+      <p:sp>
+        <p:nvSpPr>
+          <p:cNvPr id="3" name="TextBox 2"/>
+          <p:cNvSpPr txBox="1"/>
+          <p:nvPr/>
+        </p:nvSpPr>
+        <p:spPr>
+          <a:xfrm>
+            <a:off x="539496" y="832104"/>
+            <a:ext cx="11064240" cy="1124712"/>
+          </a:xfrm>
+          <a:prstGeom prst="rect">
+            <a:avLst/>
+          </a:prstGeom>
+          <a:noFill/>
+        </p:spPr>
+        <p:txBody>
+          <a:bodyPr wrap="square" lIns="0" rIns="0" tIns="0" bIns="0">
+            <a:spAutoFit/>
+          </a:bodyPr>
+          <a:lstStyle/>
+          <a:p>
+            <a:pPr algn="l">
+              <a:lnSpc>
+                <a:spcPct val="109000"/>
+              </a:lnSpc>
+              <a:spcBef>
+                <a:spcPts val="0"/>
+              </a:spcBef>
+              <a:spcAft>
+                <a:spcPts val="400"/>
+              </a:spcAft>
+            </a:pPr>
+            <a:r>
+              <a:rPr sz="3200" b="1">
+                <a:solidFill>
+                  <a:srgbClr val="182236"/>
+                </a:solidFill>
+                <a:latin typeface="Arial"/>
+                <a:ea typeface="Apple SD Gothic Neo"/>
+              </a:rPr>
+              <a:t>우리 팀의 역할·도구·절차에 맞춰</a:t>
+            </a:r>
+          </a:p>
+          <a:p>
+            <a:pPr algn="l">
+              <a:lnSpc>
+                <a:spcPct val="109000"/>
+              </a:lnSpc>
+              <a:spcBef>
+                <a:spcPts val="0"/>
+              </a:spcBef>
+              <a:spcAft>
+                <a:spcPts val="400"/>
+              </a:spcAft>
+            </a:pPr>
+            <a:r>
+              <a:rPr sz="3200" b="1">
+                <a:solidFill>
+                  <a:srgbClr val="182236"/>
+                </a:solidFill>
+                <a:latin typeface="Arial"/>
+                <a:ea typeface="Apple SD Gothic Neo"/>
+              </a:rPr>
+              <a:t>에이전트를 확장할 수 있습니다.</a:t>
+            </a:r>
+          </a:p>
+        </p:txBody>
+      </p:sp>
+      <p:cxnSp>
+        <p:nvCxnSpPr>
+          <p:cNvPr id="4" name="Connector 3"/>
+          <p:cNvCxnSpPr/>
+          <p:nvPr/>
+        </p:nvCxnSpPr>
+        <p:spPr>
+          <a:xfrm>
+            <a:off x="539496" y="6446520"/>
+            <a:ext cx="11100816" cy="0"/>
+          </a:xfrm>
+          <a:prstGeom prst="line">
+            <a:avLst/>
+          </a:prstGeom>
+          <a:ln w="8890">
+            <a:solidFill>
+              <a:srgbClr val="DCE2EC"/>
+            </a:solidFill>
+          </a:ln>
+        </p:spPr>
+        <p:style>
+          <a:lnRef idx="2">
+            <a:schemeClr val="accent1"/>
+          </a:lnRef>
+          <a:fillRef idx="0">
+            <a:schemeClr val="accent1"/>
+          </a:fillRef>
+          <a:effectRef idx="0">
+            <a:schemeClr val="accent1"/>
+          </a:effectRef>
+          <a:fontRef idx="minor">
+            <a:schemeClr val="tx1"/>
+          </a:fontRef>
+        </p:style>
+      </p:cxnSp>
+      <p:sp>
+        <p:nvSpPr>
+          <p:cNvPr id="5" name="TextBox 4"/>
+          <p:cNvSpPr txBox="1"/>
+          <p:nvPr/>
+        </p:nvSpPr>
+        <p:spPr>
+          <a:xfrm>
+            <a:off x="557784" y="6547104"/>
+            <a:ext cx="9875520" cy="173736"/>
+          </a:xfrm>
+          <a:prstGeom prst="rect">
+            <a:avLst/>
+          </a:prstGeom>
+          <a:noFill/>
+        </p:spPr>
+        <p:txBody>
+          <a:bodyPr wrap="square" lIns="0" rIns="0" tIns="0" bIns="0">
+            <a:spAutoFit/>
+          </a:bodyPr>
+          <a:lstStyle/>
+          <a:p>
+            <a:pPr algn="l">
+              <a:lnSpc>
+                <a:spcPct val="113000"/>
+              </a:lnSpc>
+              <a:spcBef>
+                <a:spcPts val="0"/>
+              </a:spcBef>
+              <a:spcAft>
+                <a:spcPts val="200"/>
+              </a:spcAft>
+            </a:pPr>
+            <a:r>
+              <a:rPr sz="850" b="0">
+                <a:solidFill>
+                  <a:srgbClr val="78859A"/>
+                </a:solidFill>
+                <a:latin typeface="Arial"/>
+                <a:ea typeface="Apple SD Gothic Neo"/>
+              </a:rPr>
+              <a:t>GitHub Copilot  /  CXO Briefing. Real execution. Human control.</a:t>
+            </a:r>
+          </a:p>
+        </p:txBody>
+      </p:sp>
+      <p:sp>
+        <p:nvSpPr>
+          <p:cNvPr id="6" name="TextBox 5"/>
+          <p:cNvSpPr txBox="1"/>
+          <p:nvPr/>
+        </p:nvSpPr>
+        <p:spPr>
+          <a:xfrm>
+            <a:off x="11045952" y="6510528"/>
+            <a:ext cx="576072" cy="237744"/>
+          </a:xfrm>
+          <a:prstGeom prst="rect">
+            <a:avLst/>
+          </a:prstGeom>
+          <a:noFill/>
+        </p:spPr>
+        <p:txBody>
+          <a:bodyPr wrap="square" lIns="0" rIns="0" tIns="0" bIns="0">
+            <a:spAutoFit/>
+          </a:bodyPr>
+          <a:lstStyle/>
+          <a:p>
+            <a:pPr algn="r">
+              <a:lnSpc>
+                <a:spcPct val="113000"/>
+              </a:lnSpc>
+              <a:spcBef>
+                <a:spcPts val="0"/>
+              </a:spcBef>
+              <a:spcAft>
+                <a:spcPts val="200"/>
+              </a:spcAft>
+            </a:pPr>
+            <a:r>
+              <a:rPr sz="1100" b="0">
+                <a:solidFill>
+                  <a:srgbClr val="78859A"/>
+                </a:solidFill>
+                <a:latin typeface="Arial"/>
+                <a:ea typeface="Apple SD Gothic Neo"/>
+              </a:rPr>
+              <a:t>06</a:t>
+            </a:r>
+          </a:p>
+        </p:txBody>
+      </p:sp>
+      <p:sp>
+        <p:nvSpPr>
+          <p:cNvPr id="7" name="Rounded Rectangle 6"/>
+          <p:cNvSpPr/>
+          <p:nvPr/>
+        </p:nvSpPr>
+        <p:spPr>
+          <a:xfrm>
+            <a:off x="594360" y="2423160"/>
+            <a:ext cx="3529584" cy="1353312"/>
+          </a:xfrm>
+          <a:prstGeom prst="roundRect">
+            <a:avLst>
+              <a:gd name="adj" fmla="val 12000"/>
+            </a:avLst>
+          </a:prstGeom>
+          <a:solidFill>
+            <a:srgbClr val="FFFFFF"/>
+          </a:solidFill>
+          <a:ln w="10160">
+            <a:solidFill>
+              <a:srgbClr val="DCE2EC"/>
+            </a:solidFill>
+          </a:ln>
+        </p:spPr>
+        <p:style>
+          <a:lnRef idx="1">
+            <a:schemeClr val="accent1"/>
+          </a:lnRef>
+          <a:fillRef idx="3">
+            <a:schemeClr val="accent1"/>
+          </a:fillRef>
+          <a:effectRef idx="0">
+            <a:schemeClr val="accent1"/>
+          </a:effectRef>
+          <a:fontRef idx="minor">
+            <a:schemeClr val="lt1"/>
+          </a:fontRef>
+        </p:style>
+        <p:txBody>
+          <a:bodyPr rtlCol="0" anchor="ctr"/>
+          <a:lstStyle/>
+          <a:p>
+            <a:pPr algn="ctr"/>
+          </a:p>
+        </p:txBody>
+      </p:sp>
+      <p:sp>
+        <p:nvSpPr>
+          <p:cNvPr id="8" name="TextBox 7"/>
+          <p:cNvSpPr txBox="1"/>
+          <p:nvPr/>
+        </p:nvSpPr>
+        <p:spPr>
+          <a:xfrm>
+            <a:off x="804672" y="2587752"/>
+            <a:ext cx="3081528" cy="374904"/>
+          </a:xfrm>
+          <a:prstGeom prst="rect">
+            <a:avLst/>
+          </a:prstGeom>
+          <a:noFill/>
+        </p:spPr>
+        <p:txBody>
+          <a:bodyPr wrap="square" lIns="0" rIns="0" tIns="0" bIns="0">
+            <a:spAutoFit/>
+          </a:bodyPr>
+          <a:lstStyle/>
+          <a:p>
+            <a:pPr algn="l">
+              <a:lnSpc>
+                <a:spcPct val="113000"/>
+              </a:lnSpc>
+              <a:spcBef>
+                <a:spcPts val="0"/>
+              </a:spcBef>
+              <a:spcAft>
+                <a:spcPts val="400"/>
+              </a:spcAft>
+            </a:pPr>
+            <a:r>
+              <a:rPr sz="2000" b="1">
+                <a:solidFill>
+                  <a:srgbClr val="182236"/>
+                </a:solidFill>
+                <a:latin typeface="Arial"/>
+                <a:ea typeface="Apple SD Gothic Neo"/>
+              </a:rPr>
+              <a:t>팀의 기준을 공유</a:t>
+            </a:r>
+          </a:p>
+        </p:txBody>
+      </p:sp>
+      <p:sp>
+        <p:nvSpPr>
+          <p:cNvPr id="9" name="TextBox 8"/>
+          <p:cNvSpPr txBox="1"/>
+          <p:nvPr/>
+        </p:nvSpPr>
+        <p:spPr>
+          <a:xfrm>
+            <a:off x="813816" y="3081528"/>
+            <a:ext cx="3072384" cy="246888"/>
+          </a:xfrm>
+          <a:prstGeom prst="rect">
+            <a:avLst/>
+          </a:prstGeom>
+          <a:noFill/>
+        </p:spPr>
+        <p:txBody>
+          <a:bodyPr wrap="square" lIns="0" rIns="0" tIns="0" bIns="0">
+            <a:spAutoFit/>
+          </a:bodyPr>
+          <a:lstStyle/>
+          <a:p>
+            <a:pPr algn="l">
+              <a:lnSpc>
+                <a:spcPct val="113000"/>
+              </a:lnSpc>
+              <a:spcBef>
+                <a:spcPts val="0"/>
+              </a:spcBef>
+              <a:spcAft>
+                <a:spcPts val="200"/>
+              </a:spcAft>
+            </a:pPr>
+            <a:r>
+              <a:rPr sz="1200" b="1">
+                <a:solidFill>
+                  <a:srgbClr val="A783D7"/>
+                </a:solidFill>
+                <a:latin typeface="Arial"/>
+                <a:ea typeface="Apple SD Gothic Neo"/>
+              </a:rPr>
+              <a:t>Instructions / Prompt files</a:t>
+            </a:r>
+          </a:p>
+        </p:txBody>
+      </p:sp>
+      <p:sp>
+        <p:nvSpPr>
+          <p:cNvPr id="10" name="TextBox 9"/>
+          <p:cNvSpPr txBox="1"/>
+          <p:nvPr/>
+        </p:nvSpPr>
+        <p:spPr>
+          <a:xfrm>
+            <a:off x="813816" y="3447288"/>
+            <a:ext cx="3072384" cy="237744"/>
+          </a:xfrm>
+          <a:prstGeom prst="rect">
+            <a:avLst/>
+          </a:prstGeom>
+          <a:noFill/>
+        </p:spPr>
+        <p:txBody>
+          <a:bodyPr wrap="square" lIns="0" rIns="0" tIns="0" bIns="0">
+            <a:spAutoFit/>
+          </a:bodyPr>
+          <a:lstStyle/>
+          <a:p>
+            <a:pPr algn="l">
+              <a:lnSpc>
+                <a:spcPct val="113000"/>
+              </a:lnSpc>
+              <a:spcBef>
+                <a:spcPts val="0"/>
+              </a:spcBef>
+              <a:spcAft>
+                <a:spcPts val="200"/>
+              </a:spcAft>
+            </a:pPr>
+            <a:r>
+              <a:rPr sz="1250" b="0">
+                <a:solidFill>
+                  <a:srgbClr val="78859A"/>
+                </a:solidFill>
+                <a:latin typeface="Arial"/>
+                <a:ea typeface="Apple SD Gothic Neo"/>
+              </a:rPr>
+              <a:t>규칙과 반복 요청을 재사용</a:t>
+            </a:r>
+          </a:p>
+        </p:txBody>
+      </p:sp>
+      <p:sp>
+        <p:nvSpPr>
+          <p:cNvPr id="11" name="Rounded Rectangle 10"/>
+          <p:cNvSpPr/>
+          <p:nvPr/>
+        </p:nvSpPr>
+        <p:spPr>
+          <a:xfrm>
+            <a:off x="4389120" y="2423160"/>
+            <a:ext cx="3529584" cy="1353312"/>
+          </a:xfrm>
+          <a:prstGeom prst="roundRect">
+            <a:avLst>
+              <a:gd name="adj" fmla="val 12000"/>
+            </a:avLst>
+          </a:prstGeom>
+          <a:solidFill>
+            <a:srgbClr val="FFFFFF"/>
+          </a:solidFill>
+          <a:ln w="10160">
+            <a:solidFill>
+              <a:srgbClr val="DCE2EC"/>
+            </a:solidFill>
+          </a:ln>
+        </p:spPr>
+        <p:style>
+          <a:lnRef idx="1">
+            <a:schemeClr val="accent1"/>
+          </a:lnRef>
+          <a:fillRef idx="3">
+            <a:schemeClr val="accent1"/>
+          </a:fillRef>
+          <a:effectRef idx="0">
+            <a:schemeClr val="accent1"/>
+          </a:effectRef>
+          <a:fontRef idx="minor">
+            <a:schemeClr val="lt1"/>
+          </a:fontRef>
+        </p:style>
+        <p:txBody>
+          <a:bodyPr rtlCol="0" anchor="ctr"/>
+          <a:lstStyle/>
+          <a:p>
+            <a:pPr algn="ctr"/>
+          </a:p>
+        </p:txBody>
+      </p:sp>
+      <p:sp>
+        <p:nvSpPr>
+          <p:cNvPr id="12" name="TextBox 11"/>
+          <p:cNvSpPr txBox="1"/>
+          <p:nvPr/>
+        </p:nvSpPr>
+        <p:spPr>
+          <a:xfrm>
+            <a:off x="4599432" y="2587752"/>
+            <a:ext cx="3081528" cy="374904"/>
+          </a:xfrm>
+          <a:prstGeom prst="rect">
+            <a:avLst/>
+          </a:prstGeom>
+          <a:noFill/>
+        </p:spPr>
+        <p:txBody>
+          <a:bodyPr wrap="square" lIns="0" rIns="0" tIns="0" bIns="0">
+            <a:spAutoFit/>
+          </a:bodyPr>
+          <a:lstStyle/>
+          <a:p>
+            <a:pPr algn="l">
+              <a:lnSpc>
+                <a:spcPct val="113000"/>
+              </a:lnSpc>
+              <a:spcBef>
+                <a:spcPts val="0"/>
+              </a:spcBef>
+              <a:spcAft>
+                <a:spcPts val="400"/>
+              </a:spcAft>
+            </a:pPr>
+            <a:r>
+              <a:rPr sz="2000" b="1">
+                <a:solidFill>
+                  <a:srgbClr val="182236"/>
+                </a:solidFill>
+                <a:latin typeface="Arial"/>
+                <a:ea typeface="Apple SD Gothic Neo"/>
+              </a:rPr>
+              <a:t>역할을 전문화</a:t>
+            </a:r>
+          </a:p>
+        </p:txBody>
+      </p:sp>
+      <p:sp>
+        <p:nvSpPr>
+          <p:cNvPr id="13" name="TextBox 12"/>
+          <p:cNvSpPr txBox="1"/>
+          <p:nvPr/>
+        </p:nvSpPr>
+        <p:spPr>
+          <a:xfrm>
+            <a:off x="4608576" y="3081528"/>
+            <a:ext cx="3072384" cy="246888"/>
+          </a:xfrm>
+          <a:prstGeom prst="rect">
+            <a:avLst/>
+          </a:prstGeom>
+          <a:noFill/>
+        </p:spPr>
+        <p:txBody>
+          <a:bodyPr wrap="square" lIns="0" rIns="0" tIns="0" bIns="0">
+            <a:spAutoFit/>
+          </a:bodyPr>
+          <a:lstStyle/>
+          <a:p>
+            <a:pPr algn="l">
+              <a:lnSpc>
+                <a:spcPct val="113000"/>
+              </a:lnSpc>
+              <a:spcBef>
+                <a:spcPts val="0"/>
+              </a:spcBef>
+              <a:spcAft>
+                <a:spcPts val="200"/>
+              </a:spcAft>
+            </a:pPr>
+            <a:r>
+              <a:rPr sz="1200" b="1">
+                <a:solidFill>
+                  <a:srgbClr val="A783D7"/>
+                </a:solidFill>
+                <a:latin typeface="Arial"/>
+                <a:ea typeface="Apple SD Gothic Neo"/>
+              </a:rPr>
+              <a:t>Custom agents</a:t>
+            </a:r>
+          </a:p>
+        </p:txBody>
+      </p:sp>
+      <p:sp>
+        <p:nvSpPr>
+          <p:cNvPr id="14" name="TextBox 13"/>
+          <p:cNvSpPr txBox="1"/>
+          <p:nvPr/>
+        </p:nvSpPr>
+        <p:spPr>
+          <a:xfrm>
+            <a:off x="4608576" y="3447288"/>
+            <a:ext cx="3072384" cy="237744"/>
+          </a:xfrm>
+          <a:prstGeom prst="rect">
+            <a:avLst/>
+          </a:prstGeom>
+          <a:noFill/>
+        </p:spPr>
+        <p:txBody>
+          <a:bodyPr wrap="square" lIns="0" rIns="0" tIns="0" bIns="0">
+            <a:spAutoFit/>
+          </a:bodyPr>
+          <a:lstStyle/>
+          <a:p>
+            <a:pPr algn="l">
+              <a:lnSpc>
+                <a:spcPct val="113000"/>
+              </a:lnSpc>
+              <a:spcBef>
+                <a:spcPts val="0"/>
+              </a:spcBef>
+              <a:spcAft>
+                <a:spcPts val="200"/>
+              </a:spcAft>
+            </a:pPr>
+            <a:r>
+              <a:rPr sz="1250" b="0">
+                <a:solidFill>
+                  <a:srgbClr val="78859A"/>
+                </a:solidFill>
+                <a:latin typeface="Arial"/>
+                <a:ea typeface="Apple SD Gothic Neo"/>
+              </a:rPr>
+              <a:t>담당 역할·지침·도구를 구성</a:t>
+            </a:r>
+          </a:p>
+        </p:txBody>
+      </p:sp>
+      <p:sp>
+        <p:nvSpPr>
+          <p:cNvPr id="15" name="Rounded Rectangle 14"/>
+          <p:cNvSpPr/>
+          <p:nvPr/>
+        </p:nvSpPr>
+        <p:spPr>
+          <a:xfrm>
+            <a:off x="8183880" y="2423160"/>
+            <a:ext cx="3529584" cy="1353312"/>
+          </a:xfrm>
+          <a:prstGeom prst="roundRect">
+            <a:avLst>
+              <a:gd name="adj" fmla="val 12000"/>
+            </a:avLst>
+          </a:prstGeom>
+          <a:solidFill>
+            <a:srgbClr val="FFFFFF"/>
+          </a:solidFill>
+          <a:ln w="10160">
+            <a:solidFill>
+              <a:srgbClr val="DCE2EC"/>
+            </a:solidFill>
+          </a:ln>
+        </p:spPr>
+        <p:style>
+          <a:lnRef idx="1">
+            <a:schemeClr val="accent1"/>
+          </a:lnRef>
+          <a:fillRef idx="3">
+            <a:schemeClr val="accent1"/>
+          </a:fillRef>
+          <a:effectRef idx="0">
+            <a:schemeClr val="accent1"/>
+          </a:effectRef>
+          <a:fontRef idx="minor">
+            <a:schemeClr val="lt1"/>
+          </a:fontRef>
+        </p:style>
+        <p:txBody>
+          <a:bodyPr rtlCol="0" anchor="ctr"/>
+          <a:lstStyle/>
+          <a:p>
+            <a:pPr algn="ctr"/>
+          </a:p>
+        </p:txBody>
+      </p:sp>
+      <p:sp>
+        <p:nvSpPr>
+          <p:cNvPr id="16" name="TextBox 15"/>
+          <p:cNvSpPr txBox="1"/>
+          <p:nvPr/>
+        </p:nvSpPr>
+        <p:spPr>
+          <a:xfrm>
+            <a:off x="8394192" y="2587752"/>
+            <a:ext cx="3081528" cy="374904"/>
+          </a:xfrm>
+          <a:prstGeom prst="rect">
+            <a:avLst/>
+          </a:prstGeom>
+          <a:noFill/>
+        </p:spPr>
+        <p:txBody>
+          <a:bodyPr wrap="square" lIns="0" rIns="0" tIns="0" bIns="0">
+            <a:spAutoFit/>
+          </a:bodyPr>
+          <a:lstStyle/>
+          <a:p>
+            <a:pPr algn="l">
+              <a:lnSpc>
+                <a:spcPct val="113000"/>
+              </a:lnSpc>
+              <a:spcBef>
+                <a:spcPts val="0"/>
+              </a:spcBef>
+              <a:spcAft>
+                <a:spcPts val="400"/>
+              </a:spcAft>
+            </a:pPr>
+            <a:r>
+              <a:rPr sz="2000" b="1">
+                <a:solidFill>
+                  <a:srgbClr val="182236"/>
+                </a:solidFill>
+                <a:latin typeface="Arial"/>
+                <a:ea typeface="Apple SD Gothic Neo"/>
+              </a:rPr>
+              <a:t>작업을 나눠 수행</a:t>
+            </a:r>
+          </a:p>
+        </p:txBody>
+      </p:sp>
+      <p:sp>
+        <p:nvSpPr>
+          <p:cNvPr id="17" name="TextBox 16"/>
+          <p:cNvSpPr txBox="1"/>
+          <p:nvPr/>
+        </p:nvSpPr>
+        <p:spPr>
+          <a:xfrm>
+            <a:off x="8403336" y="3081528"/>
+            <a:ext cx="3072384" cy="246888"/>
+          </a:xfrm>
+          <a:prstGeom prst="rect">
+            <a:avLst/>
+          </a:prstGeom>
+          <a:noFill/>
+        </p:spPr>
+        <p:txBody>
+          <a:bodyPr wrap="square" lIns="0" rIns="0" tIns="0" bIns="0">
+            <a:spAutoFit/>
+          </a:bodyPr>
+          <a:lstStyle/>
+          <a:p>
+            <a:pPr algn="l">
+              <a:lnSpc>
+                <a:spcPct val="113000"/>
+              </a:lnSpc>
+              <a:spcBef>
+                <a:spcPts val="0"/>
+              </a:spcBef>
+              <a:spcAft>
+                <a:spcPts val="200"/>
+              </a:spcAft>
+            </a:pPr>
+            <a:r>
+              <a:rPr sz="1200" b="1">
+                <a:solidFill>
+                  <a:srgbClr val="A783D7"/>
+                </a:solidFill>
+                <a:latin typeface="Arial"/>
+                <a:ea typeface="Apple SD Gothic Neo"/>
+              </a:rPr>
+              <a:t>Subagents / Fleet</a:t>
+            </a:r>
+          </a:p>
+        </p:txBody>
+      </p:sp>
+      <p:sp>
+        <p:nvSpPr>
+          <p:cNvPr id="18" name="TextBox 17"/>
+          <p:cNvSpPr txBox="1"/>
+          <p:nvPr/>
+        </p:nvSpPr>
+        <p:spPr>
+          <a:xfrm>
+            <a:off x="8403336" y="3447288"/>
+            <a:ext cx="3072384" cy="237744"/>
+          </a:xfrm>
+          <a:prstGeom prst="rect">
+            <a:avLst/>
+          </a:prstGeom>
+          <a:noFill/>
+        </p:spPr>
+        <p:txBody>
+          <a:bodyPr wrap="square" lIns="0" rIns="0" tIns="0" bIns="0">
+            <a:spAutoFit/>
+          </a:bodyPr>
+          <a:lstStyle/>
+          <a:p>
+            <a:pPr algn="l">
+              <a:lnSpc>
+                <a:spcPct val="113000"/>
+              </a:lnSpc>
+              <a:spcBef>
+                <a:spcPts val="0"/>
+              </a:spcBef>
+              <a:spcAft>
+                <a:spcPts val="200"/>
+              </a:spcAft>
+            </a:pPr>
+            <a:r>
+              <a:rPr sz="1250" b="0">
+                <a:solidFill>
+                  <a:srgbClr val="78859A"/>
+                </a:solidFill>
+                <a:latin typeface="Arial"/>
+                <a:ea typeface="Apple SD Gothic Neo"/>
+              </a:rPr>
+              <a:t>하위 작업 위임·가능한 부분 병렬화</a:t>
+            </a:r>
+          </a:p>
+        </p:txBody>
+      </p:sp>
+      <p:sp>
+        <p:nvSpPr>
+          <p:cNvPr id="19" name="Rounded Rectangle 18"/>
+          <p:cNvSpPr/>
+          <p:nvPr/>
+        </p:nvSpPr>
+        <p:spPr>
+          <a:xfrm>
+            <a:off x="594360" y="3959352"/>
+            <a:ext cx="3529584" cy="1353312"/>
+          </a:xfrm>
+          <a:prstGeom prst="roundRect">
+            <a:avLst>
+              <a:gd name="adj" fmla="val 12000"/>
+            </a:avLst>
+          </a:prstGeom>
+          <a:solidFill>
+            <a:srgbClr val="FFFFFF"/>
+          </a:solidFill>
+          <a:ln w="10160">
+            <a:solidFill>
+              <a:srgbClr val="DCE2EC"/>
+            </a:solidFill>
+          </a:ln>
+        </p:spPr>
+        <p:style>
+          <a:lnRef idx="1">
+            <a:schemeClr val="accent1"/>
+          </a:lnRef>
+          <a:fillRef idx="3">
+            <a:schemeClr val="accent1"/>
+          </a:fillRef>
+          <a:effectRef idx="0">
+            <a:schemeClr val="accent1"/>
+          </a:effectRef>
+          <a:fontRef idx="minor">
+            <a:schemeClr val="lt1"/>
+          </a:fontRef>
+        </p:style>
+        <p:txBody>
+          <a:bodyPr rtlCol="0" anchor="ctr"/>
+          <a:lstStyle/>
+          <a:p>
+            <a:pPr algn="ctr"/>
+          </a:p>
+        </p:txBody>
+      </p:sp>
+      <p:sp>
+        <p:nvSpPr>
+          <p:cNvPr id="20" name="TextBox 19"/>
+          <p:cNvSpPr txBox="1"/>
+          <p:nvPr/>
+        </p:nvSpPr>
+        <p:spPr>
+          <a:xfrm>
+            <a:off x="804672" y="4123944"/>
+            <a:ext cx="3081528" cy="374904"/>
+          </a:xfrm>
+          <a:prstGeom prst="rect">
+            <a:avLst/>
+          </a:prstGeom>
+          <a:noFill/>
+        </p:spPr>
+        <p:txBody>
+          <a:bodyPr wrap="square" lIns="0" rIns="0" tIns="0" bIns="0">
+            <a:spAutoFit/>
+          </a:bodyPr>
+          <a:lstStyle/>
+          <a:p>
+            <a:pPr algn="l">
+              <a:lnSpc>
+                <a:spcPct val="113000"/>
+              </a:lnSpc>
+              <a:spcBef>
+                <a:spcPts val="0"/>
+              </a:spcBef>
+              <a:spcAft>
+                <a:spcPts val="400"/>
+              </a:spcAft>
+            </a:pPr>
+            <a:r>
+              <a:rPr sz="2000" b="1">
+                <a:solidFill>
+                  <a:srgbClr val="182236"/>
+                </a:solidFill>
+                <a:latin typeface="Arial"/>
+                <a:ea typeface="Apple SD Gothic Neo"/>
+              </a:rPr>
+              <a:t>업무 절차를 재사용</a:t>
+            </a:r>
+          </a:p>
+        </p:txBody>
+      </p:sp>
+      <p:sp>
+        <p:nvSpPr>
+          <p:cNvPr id="21" name="TextBox 20"/>
+          <p:cNvSpPr txBox="1"/>
+          <p:nvPr/>
+        </p:nvSpPr>
+        <p:spPr>
+          <a:xfrm>
+            <a:off x="813816" y="4617720"/>
+            <a:ext cx="3072384" cy="246888"/>
+          </a:xfrm>
+          <a:prstGeom prst="rect">
+            <a:avLst/>
+          </a:prstGeom>
+          <a:noFill/>
+        </p:spPr>
+        <p:txBody>
+          <a:bodyPr wrap="square" lIns="0" rIns="0" tIns="0" bIns="0">
+            <a:spAutoFit/>
+          </a:bodyPr>
+          <a:lstStyle/>
+          <a:p>
+            <a:pPr algn="l">
+              <a:lnSpc>
+                <a:spcPct val="113000"/>
+              </a:lnSpc>
+              <a:spcBef>
+                <a:spcPts val="0"/>
+              </a:spcBef>
+              <a:spcAft>
+                <a:spcPts val="200"/>
+              </a:spcAft>
+            </a:pPr>
+            <a:r>
+              <a:rPr sz="1200" b="1">
+                <a:solidFill>
+                  <a:srgbClr val="A783D7"/>
+                </a:solidFill>
+                <a:latin typeface="Arial"/>
+                <a:ea typeface="Apple SD Gothic Neo"/>
+              </a:rPr>
+              <a:t>Agent skills</a:t>
+            </a:r>
+          </a:p>
+        </p:txBody>
+      </p:sp>
+      <p:sp>
+        <p:nvSpPr>
+          <p:cNvPr id="22" name="TextBox 21"/>
+          <p:cNvSpPr txBox="1"/>
+          <p:nvPr/>
+        </p:nvSpPr>
+        <p:spPr>
+          <a:xfrm>
+            <a:off x="813816" y="4983480"/>
+            <a:ext cx="3072384" cy="237744"/>
+          </a:xfrm>
+          <a:prstGeom prst="rect">
+            <a:avLst/>
+          </a:prstGeom>
+          <a:noFill/>
+        </p:spPr>
+        <p:txBody>
+          <a:bodyPr wrap="square" lIns="0" rIns="0" tIns="0" bIns="0">
+            <a:spAutoFit/>
+          </a:bodyPr>
+          <a:lstStyle/>
+          <a:p>
+            <a:pPr algn="l">
+              <a:lnSpc>
+                <a:spcPct val="113000"/>
+              </a:lnSpc>
+              <a:spcBef>
+                <a:spcPts val="0"/>
+              </a:spcBef>
+              <a:spcAft>
+                <a:spcPts val="200"/>
+              </a:spcAft>
+            </a:pPr>
+            <a:r>
+              <a:rPr sz="1250" b="0">
+                <a:solidFill>
+                  <a:srgbClr val="78859A"/>
+                </a:solidFill>
+                <a:latin typeface="Arial"/>
+                <a:ea typeface="Apple SD Gothic Neo"/>
+              </a:rPr>
+              <a:t>필요할 때 절차·스크립트·자료 로드</a:t>
+            </a:r>
+          </a:p>
+        </p:txBody>
+      </p:sp>
+      <p:sp>
+        <p:nvSpPr>
+          <p:cNvPr id="23" name="Rounded Rectangle 22"/>
+          <p:cNvSpPr/>
+          <p:nvPr/>
+        </p:nvSpPr>
+        <p:spPr>
+          <a:xfrm>
+            <a:off x="4389120" y="3959352"/>
+            <a:ext cx="3529584" cy="1353312"/>
+          </a:xfrm>
+          <a:prstGeom prst="roundRect">
+            <a:avLst>
+              <a:gd name="adj" fmla="val 12000"/>
+            </a:avLst>
+          </a:prstGeom>
+          <a:solidFill>
+            <a:srgbClr val="FFFFFF"/>
+          </a:solidFill>
+          <a:ln w="10160">
+            <a:solidFill>
+              <a:srgbClr val="DCE2EC"/>
+            </a:solidFill>
+          </a:ln>
+        </p:spPr>
+        <p:style>
+          <a:lnRef idx="1">
+            <a:schemeClr val="accent1"/>
+          </a:lnRef>
+          <a:fillRef idx="3">
+            <a:schemeClr val="accent1"/>
+          </a:fillRef>
+          <a:effectRef idx="0">
+            <a:schemeClr val="accent1"/>
+          </a:effectRef>
+          <a:fontRef idx="minor">
+            <a:schemeClr val="lt1"/>
+          </a:fontRef>
+        </p:style>
+        <p:txBody>
+          <a:bodyPr rtlCol="0" anchor="ctr"/>
+          <a:lstStyle/>
+          <a:p>
+            <a:pPr algn="ctr"/>
+          </a:p>
+        </p:txBody>
+      </p:sp>
+      <p:sp>
+        <p:nvSpPr>
+          <p:cNvPr id="24" name="TextBox 23"/>
+          <p:cNvSpPr txBox="1"/>
+          <p:nvPr/>
+        </p:nvSpPr>
+        <p:spPr>
+          <a:xfrm>
+            <a:off x="4599432" y="4123944"/>
+            <a:ext cx="3081528" cy="374904"/>
+          </a:xfrm>
+          <a:prstGeom prst="rect">
+            <a:avLst/>
+          </a:prstGeom>
+          <a:noFill/>
+        </p:spPr>
+        <p:txBody>
+          <a:bodyPr wrap="square" lIns="0" rIns="0" tIns="0" bIns="0">
+            <a:spAutoFit/>
+          </a:bodyPr>
+          <a:lstStyle/>
+          <a:p>
+            <a:pPr algn="l">
+              <a:lnSpc>
+                <a:spcPct val="113000"/>
+              </a:lnSpc>
+              <a:spcBef>
+                <a:spcPts val="0"/>
+              </a:spcBef>
+              <a:spcAft>
+                <a:spcPts val="400"/>
+              </a:spcAft>
+            </a:pPr>
+            <a:r>
+              <a:rPr sz="2000" b="1">
+                <a:solidFill>
+                  <a:srgbClr val="182236"/>
+                </a:solidFill>
+                <a:latin typeface="Arial"/>
+                <a:ea typeface="Apple SD Gothic Neo"/>
+              </a:rPr>
+              <a:t>외부 도구와 연결</a:t>
+            </a:r>
+          </a:p>
+        </p:txBody>
+      </p:sp>
+      <p:sp>
+        <p:nvSpPr>
+          <p:cNvPr id="25" name="TextBox 24"/>
+          <p:cNvSpPr txBox="1"/>
+          <p:nvPr/>
+        </p:nvSpPr>
+        <p:spPr>
+          <a:xfrm>
+            <a:off x="4608576" y="4617720"/>
+            <a:ext cx="3072384" cy="246888"/>
+          </a:xfrm>
+          <a:prstGeom prst="rect">
+            <a:avLst/>
+          </a:prstGeom>
+          <a:noFill/>
+        </p:spPr>
+        <p:txBody>
+          <a:bodyPr wrap="square" lIns="0" rIns="0" tIns="0" bIns="0">
+            <a:spAutoFit/>
+          </a:bodyPr>
+          <a:lstStyle/>
+          <a:p>
+            <a:pPr algn="l">
+              <a:lnSpc>
+                <a:spcPct val="113000"/>
+              </a:lnSpc>
+              <a:spcBef>
+                <a:spcPts val="0"/>
+              </a:spcBef>
+              <a:spcAft>
+                <a:spcPts val="200"/>
+              </a:spcAft>
+            </a:pPr>
+            <a:r>
+              <a:rPr sz="1200" b="1">
+                <a:solidFill>
+                  <a:srgbClr val="A783D7"/>
+                </a:solidFill>
+                <a:latin typeface="Arial"/>
+                <a:ea typeface="Apple SD Gothic Neo"/>
+              </a:rPr>
+              <a:t>MCP servers</a:t>
+            </a:r>
+          </a:p>
+        </p:txBody>
+      </p:sp>
+      <p:sp>
+        <p:nvSpPr>
+          <p:cNvPr id="26" name="TextBox 25"/>
+          <p:cNvSpPr txBox="1"/>
+          <p:nvPr/>
+        </p:nvSpPr>
+        <p:spPr>
+          <a:xfrm>
+            <a:off x="4608576" y="4983480"/>
+            <a:ext cx="3072384" cy="237744"/>
+          </a:xfrm>
+          <a:prstGeom prst="rect">
+            <a:avLst/>
+          </a:prstGeom>
+          <a:noFill/>
+        </p:spPr>
+        <p:txBody>
+          <a:bodyPr wrap="square" lIns="0" rIns="0" tIns="0" bIns="0">
+            <a:spAutoFit/>
+          </a:bodyPr>
+          <a:lstStyle/>
+          <a:p>
+            <a:pPr algn="l">
+              <a:lnSpc>
+                <a:spcPct val="113000"/>
+              </a:lnSpc>
+              <a:spcBef>
+                <a:spcPts val="0"/>
+              </a:spcBef>
+              <a:spcAft>
+                <a:spcPts val="200"/>
+              </a:spcAft>
+            </a:pPr>
+            <a:r>
+              <a:rPr sz="1250" b="0">
+                <a:solidFill>
+                  <a:srgbClr val="78859A"/>
+                </a:solidFill>
+                <a:latin typeface="Arial"/>
+                <a:ea typeface="Apple SD Gothic Neo"/>
+              </a:rPr>
+              <a:t>이슈·문서·브라우저 등의 도구 연결</a:t>
+            </a:r>
+          </a:p>
+        </p:txBody>
+      </p:sp>
+      <p:sp>
+        <p:nvSpPr>
+          <p:cNvPr id="27" name="Rounded Rectangle 26"/>
+          <p:cNvSpPr/>
+          <p:nvPr/>
+        </p:nvSpPr>
+        <p:spPr>
+          <a:xfrm>
+            <a:off x="8183880" y="3959352"/>
+            <a:ext cx="3529584" cy="1353312"/>
+          </a:xfrm>
+          <a:prstGeom prst="roundRect">
+            <a:avLst>
+              <a:gd name="adj" fmla="val 12000"/>
+            </a:avLst>
+          </a:prstGeom>
+          <a:solidFill>
+            <a:srgbClr val="FFFFFF"/>
+          </a:solidFill>
+          <a:ln w="10160">
+            <a:solidFill>
+              <a:srgbClr val="DCE2EC"/>
+            </a:solidFill>
+          </a:ln>
+        </p:spPr>
+        <p:style>
+          <a:lnRef idx="1">
+            <a:schemeClr val="accent1"/>
+          </a:lnRef>
+          <a:fillRef idx="3">
+            <a:schemeClr val="accent1"/>
+          </a:fillRef>
+          <a:effectRef idx="0">
+            <a:schemeClr val="accent1"/>
+          </a:effectRef>
+          <a:fontRef idx="minor">
+            <a:schemeClr val="lt1"/>
+          </a:fontRef>
+        </p:style>
+        <p:txBody>
+          <a:bodyPr rtlCol="0" anchor="ctr"/>
+          <a:lstStyle/>
+          <a:p>
+            <a:pPr algn="ctr"/>
+          </a:p>
+        </p:txBody>
+      </p:sp>
+      <p:sp>
+        <p:nvSpPr>
+          <p:cNvPr id="28" name="TextBox 27"/>
+          <p:cNvSpPr txBox="1"/>
+          <p:nvPr/>
+        </p:nvSpPr>
+        <p:spPr>
+          <a:xfrm>
+            <a:off x="8394192" y="4123944"/>
+            <a:ext cx="3081528" cy="374904"/>
+          </a:xfrm>
+          <a:prstGeom prst="rect">
+            <a:avLst/>
+          </a:prstGeom>
+          <a:noFill/>
+        </p:spPr>
+        <p:txBody>
+          <a:bodyPr wrap="square" lIns="0" rIns="0" tIns="0" bIns="0">
+            <a:spAutoFit/>
+          </a:bodyPr>
+          <a:lstStyle/>
+          <a:p>
+            <a:pPr algn="l">
+              <a:lnSpc>
+                <a:spcPct val="113000"/>
+              </a:lnSpc>
+              <a:spcBef>
+                <a:spcPts val="0"/>
+              </a:spcBef>
+              <a:spcAft>
+                <a:spcPts val="400"/>
+              </a:spcAft>
+            </a:pPr>
+            <a:r>
+              <a:rPr sz="2000" b="1">
+                <a:solidFill>
+                  <a:srgbClr val="182236"/>
+                </a:solidFill>
+                <a:latin typeface="Arial"/>
+                <a:ea typeface="Apple SD Gothic Neo"/>
+              </a:rPr>
+              <a:t>실행 지점에 통제</a:t>
+            </a:r>
+          </a:p>
+        </p:txBody>
+      </p:sp>
+      <p:sp>
+        <p:nvSpPr>
+          <p:cNvPr id="29" name="TextBox 28"/>
+          <p:cNvSpPr txBox="1"/>
+          <p:nvPr/>
+        </p:nvSpPr>
+        <p:spPr>
+          <a:xfrm>
+            <a:off x="8403336" y="4617720"/>
+            <a:ext cx="3072384" cy="246888"/>
+          </a:xfrm>
+          <a:prstGeom prst="rect">
+            <a:avLst/>
+          </a:prstGeom>
+          <a:noFill/>
+        </p:spPr>
+        <p:txBody>
+          <a:bodyPr wrap="square" lIns="0" rIns="0" tIns="0" bIns="0">
+            <a:spAutoFit/>
+          </a:bodyPr>
+          <a:lstStyle/>
+          <a:p>
+            <a:pPr algn="l">
+              <a:lnSpc>
+                <a:spcPct val="113000"/>
+              </a:lnSpc>
+              <a:spcBef>
+                <a:spcPts val="0"/>
+              </a:spcBef>
+              <a:spcAft>
+                <a:spcPts val="200"/>
+              </a:spcAft>
+            </a:pPr>
+            <a:r>
+              <a:rPr sz="1200" b="1">
+                <a:solidFill>
+                  <a:srgbClr val="A783D7"/>
+                </a:solidFill>
+                <a:latin typeface="Arial"/>
+                <a:ea typeface="Apple SD Gothic Neo"/>
+              </a:rPr>
+              <a:t>Hooks</a:t>
+            </a:r>
+          </a:p>
+        </p:txBody>
+      </p:sp>
+      <p:sp>
+        <p:nvSpPr>
+          <p:cNvPr id="30" name="TextBox 29"/>
+          <p:cNvSpPr txBox="1"/>
+          <p:nvPr/>
+        </p:nvSpPr>
+        <p:spPr>
+          <a:xfrm>
+            <a:off x="8403336" y="4983480"/>
+            <a:ext cx="3072384" cy="237744"/>
+          </a:xfrm>
+          <a:prstGeom prst="rect">
+            <a:avLst/>
+          </a:prstGeom>
+          <a:noFill/>
+        </p:spPr>
+        <p:txBody>
+          <a:bodyPr wrap="square" lIns="0" rIns="0" tIns="0" bIns="0">
+            <a:spAutoFit/>
+          </a:bodyPr>
+          <a:lstStyle/>
+          <a:p>
+            <a:pPr algn="l">
+              <a:lnSpc>
+                <a:spcPct val="113000"/>
+              </a:lnSpc>
+              <a:spcBef>
+                <a:spcPts val="0"/>
+              </a:spcBef>
+              <a:spcAft>
+                <a:spcPts val="200"/>
+              </a:spcAft>
+            </a:pPr>
+            <a:r>
+              <a:rPr sz="1250" b="0">
+                <a:solidFill>
+                  <a:srgbClr val="78859A"/>
+                </a:solidFill>
+                <a:latin typeface="Arial"/>
+                <a:ea typeface="Apple SD Gothic Neo"/>
+              </a:rPr>
+              <a:t>도구 실행 전후 검사·기록</a:t>
+            </a:r>
+          </a:p>
+        </p:txBody>
+      </p:sp>
+      <p:sp>
+        <p:nvSpPr>
+          <p:cNvPr id="31" name="Rounded Rectangle 30"/>
+          <p:cNvSpPr/>
+          <p:nvPr/>
+        </p:nvSpPr>
+        <p:spPr>
+          <a:xfrm>
+            <a:off x="603504" y="5641848"/>
+            <a:ext cx="11009376" cy="521207"/>
+          </a:xfrm>
+          <a:prstGeom prst="roundRect">
+            <a:avLst>
+              <a:gd name="adj" fmla="val 12000"/>
+            </a:avLst>
+          </a:prstGeom>
+          <a:solidFill>
+            <a:srgbClr val="EEE7F7"/>
+          </a:solidFill>
+          <a:ln>
+            <a:noFill/>
+          </a:ln>
+        </p:spPr>
+        <p:style>
+          <a:lnRef idx="1">
+            <a:schemeClr val="accent1"/>
+          </a:lnRef>
+          <a:fillRef idx="3">
+            <a:schemeClr val="accent1"/>
+          </a:fillRef>
+          <a:effectRef idx="0">
+            <a:schemeClr val="accent1"/>
+          </a:effectRef>
+          <a:fontRef idx="minor">
+            <a:schemeClr val="lt1"/>
+          </a:fontRef>
+        </p:style>
+        <p:txBody>
+          <a:bodyPr rtlCol="0" anchor="ctr"/>
+          <a:lstStyle/>
+          <a:p>
+            <a:pPr algn="ctr"/>
+          </a:p>
+        </p:txBody>
+      </p:sp>
+      <p:sp>
+        <p:nvSpPr>
+          <p:cNvPr id="32" name="TextBox 31"/>
+          <p:cNvSpPr txBox="1"/>
+          <p:nvPr/>
+        </p:nvSpPr>
+        <p:spPr>
+          <a:xfrm>
+            <a:off x="813816" y="5769864"/>
+            <a:ext cx="10579608" cy="274320"/>
+          </a:xfrm>
+          <a:prstGeom prst="rect">
+            <a:avLst/>
+          </a:prstGeom>
+          <a:noFill/>
+        </p:spPr>
+        <p:txBody>
+          <a:bodyPr wrap="square" lIns="0" rIns="0" tIns="0" bIns="0">
+            <a:spAutoFit/>
+          </a:bodyPr>
+          <a:lstStyle/>
+          <a:p>
+            <a:pPr algn="l">
+              <a:lnSpc>
+                <a:spcPct val="113000"/>
+              </a:lnSpc>
+              <a:spcBef>
+                <a:spcPts val="0"/>
+              </a:spcBef>
+              <a:spcAft>
+                <a:spcPts val="200"/>
+              </a:spcAft>
+            </a:pPr>
+            <a:r>
+              <a:rPr sz="1300" b="1">
+                <a:solidFill>
+                  <a:srgbClr val="182236"/>
+                </a:solidFill>
+                <a:latin typeface="Arial"/>
+                <a:ea typeface="Apple SD Gothic Neo"/>
+              </a:rPr>
+              <a:t>이번 사용: 저장소 지침·Custom agents·편집 승인  |  그 외 확장 기능은 제품 소개이며 미시연</a:t>
             </a:r>
           </a:p>
         </p:txBody>
@@ -13821,7 +21525,7 @@
                 <a:latin typeface="Arial"/>
                 <a:ea typeface="Apple SD Gothic Neo"/>
               </a:rPr>
-              <a:t>GitHub Copilot CLI  /  Real execution. Human control.</a:t>
+              <a:t>GitHub Copilot  /  CXO Briefing. Real execution. Human control.</a:t>
             </a:r>
           </a:p>
         </p:txBody>
@@ -13867,7 +21571,7 @@
                 <a:latin typeface="Arial"/>
                 <a:ea typeface="Apple SD Gothic Neo"/>
               </a:rPr>
-              <a:t>03</a:t>
+              <a:t>08</a:t>
             </a:r>
           </a:p>
         </p:txBody>
@@ -15167,7 +22871,7 @@
                 <a:latin typeface="Arial"/>
                 <a:ea typeface="Apple SD Gothic Neo"/>
               </a:rPr>
-              <a:t>GitHub Copilot CLI  /  Real execution. Human control.</a:t>
+              <a:t>GitHub Copilot  /  CXO Briefing. Real execution. Human control.</a:t>
             </a:r>
           </a:p>
         </p:txBody>
@@ -15213,7 +22917,7 @@
                 <a:latin typeface="Arial"/>
                 <a:ea typeface="Apple SD Gothic Neo"/>
               </a:rPr>
-              <a:t>04</a:t>
+              <a:t>09</a:t>
             </a:r>
           </a:p>
         </p:txBody>
@@ -15780,7 +23484,7 @@
                 <a:latin typeface="Arial"/>
                 <a:ea typeface="Apple SD Gothic Neo"/>
               </a:rPr>
-              <a:t>GitHub Copilot CLI  /  Real execution. Human control.</a:t>
+              <a:t>GitHub Copilot  /  CXO Briefing. Real execution. Human control.</a:t>
             </a:r>
           </a:p>
         </p:txBody>
@@ -15826,7 +23530,7 @@
                 <a:latin typeface="Arial"/>
                 <a:ea typeface="Apple SD Gothic Neo"/>
               </a:rPr>
-              <a:t>05</a:t>
+              <a:t>10</a:t>
             </a:r>
           </a:p>
         </p:txBody>
@@ -16853,7 +24557,7 @@
                 <a:latin typeface="Arial"/>
                 <a:ea typeface="Apple SD Gothic Neo"/>
               </a:rPr>
-              <a:t>GitHub Copilot CLI  /  Real execution. Human control.</a:t>
+              <a:t>GitHub Copilot  /  CXO Briefing. Real execution. Human control.</a:t>
             </a:r>
           </a:p>
         </p:txBody>
@@ -16899,7 +24603,7 @@
                 <a:latin typeface="Arial"/>
                 <a:ea typeface="Apple SD Gothic Neo"/>
               </a:rPr>
-              <a:t>06</a:t>
+              <a:t>11</a:t>
             </a:r>
           </a:p>
         </p:txBody>
@@ -18348,7 +26052,7 @@
                 <a:latin typeface="Arial"/>
                 <a:ea typeface="Apple SD Gothic Neo"/>
               </a:rPr>
-              <a:t>GitHub Copilot CLI  /  Real execution. Human control.</a:t>
+              <a:t>GitHub Copilot  /  CXO Briefing. Real execution. Human control.</a:t>
             </a:r>
           </a:p>
         </p:txBody>
@@ -18394,7 +26098,7 @@
                 <a:latin typeface="Arial"/>
                 <a:ea typeface="Apple SD Gothic Neo"/>
               </a:rPr>
-              <a:t>07</a:t>
+              <a:t>12</a:t>
             </a:r>
           </a:p>
         </p:txBody>
@@ -18779,7 +26483,7 @@
                 <a:latin typeface="Arial"/>
                 <a:ea typeface="Apple SD Gothic Neo"/>
               </a:rPr>
-              <a:t>GitHub Copilot CLI  /  Real execution. Human control.</a:t>
+              <a:t>GitHub Copilot  /  CXO Briefing. Real execution. Human control.</a:t>
             </a:r>
           </a:p>
         </p:txBody>
@@ -18825,7 +26529,7 @@
                 <a:latin typeface="Arial"/>
                 <a:ea typeface="Apple SD Gothic Neo"/>
               </a:rPr>
-              <a:t>13</a:t>
+              <a:t>18</a:t>
             </a:r>
           </a:p>
         </p:txBody>
@@ -19392,7 +27096,7 @@
                 <a:latin typeface="Arial"/>
                 <a:ea typeface="Apple SD Gothic Neo"/>
               </a:rPr>
-              <a:t>GitHub Copilot CLI  /  Real execution. Human control.</a:t>
+              <a:t>GitHub Copilot  /  CXO Briefing. Real execution. Human control.</a:t>
             </a:r>
           </a:p>
         </p:txBody>
@@ -19438,7 +27142,7 @@
                 <a:latin typeface="Arial"/>
                 <a:ea typeface="Apple SD Gothic Neo"/>
               </a:rPr>
-              <a:t>09</a:t>
+              <a:t>14</a:t>
             </a:r>
           </a:p>
         </p:txBody>
